--- a/Slides/Module 03 Unit Testing.pptx
+++ b/Slides/Module 03 Unit Testing.pptx
@@ -5,7 +5,7 @@
     <p:sldMasterId id="2147483648" r:id="rId1"/>
   </p:sldMasterIdLst>
   <p:notesMasterIdLst>
-    <p:notesMasterId r:id="rId45"/>
+    <p:notesMasterId r:id="rId46"/>
   </p:notesMasterIdLst>
   <p:sldIdLst>
     <p:sldId id="719" r:id="rId2"/>
@@ -21,61 +21,62 @@
     <p:sldId id="583" r:id="rId12"/>
     <p:sldId id="704" r:id="rId13"/>
     <p:sldId id="705" r:id="rId14"/>
-    <p:sldId id="723" r:id="rId15"/>
-    <p:sldId id="729" r:id="rId16"/>
-    <p:sldId id="741" r:id="rId17"/>
-    <p:sldId id="676" r:id="rId18"/>
-    <p:sldId id="732" r:id="rId19"/>
-    <p:sldId id="584" r:id="rId20"/>
-    <p:sldId id="585" r:id="rId21"/>
-    <p:sldId id="586" r:id="rId22"/>
-    <p:sldId id="587" r:id="rId23"/>
-    <p:sldId id="652" r:id="rId24"/>
-    <p:sldId id="690" r:id="rId25"/>
-    <p:sldId id="661" r:id="rId26"/>
-    <p:sldId id="663" r:id="rId27"/>
-    <p:sldId id="589" r:id="rId28"/>
+    <p:sldId id="668" r:id="rId15"/>
+    <p:sldId id="669" r:id="rId16"/>
+    <p:sldId id="723" r:id="rId17"/>
+    <p:sldId id="729" r:id="rId18"/>
+    <p:sldId id="676" r:id="rId19"/>
+    <p:sldId id="732" r:id="rId20"/>
+    <p:sldId id="584" r:id="rId21"/>
+    <p:sldId id="585" r:id="rId22"/>
+    <p:sldId id="586" r:id="rId23"/>
+    <p:sldId id="587" r:id="rId24"/>
+    <p:sldId id="652" r:id="rId25"/>
+    <p:sldId id="690" r:id="rId26"/>
+    <p:sldId id="661" r:id="rId27"/>
+    <p:sldId id="663" r:id="rId28"/>
     <p:sldId id="733" r:id="rId29"/>
-    <p:sldId id="691" r:id="rId30"/>
-    <p:sldId id="588" r:id="rId31"/>
-    <p:sldId id="737" r:id="rId32"/>
-    <p:sldId id="658" r:id="rId33"/>
-    <p:sldId id="726" r:id="rId34"/>
-    <p:sldId id="640" r:id="rId35"/>
-    <p:sldId id="641" r:id="rId36"/>
-    <p:sldId id="643" r:id="rId37"/>
-    <p:sldId id="644" r:id="rId38"/>
-    <p:sldId id="645" r:id="rId39"/>
-    <p:sldId id="646" r:id="rId40"/>
-    <p:sldId id="289" r:id="rId41"/>
-    <p:sldId id="660" r:id="rId42"/>
-    <p:sldId id="291" r:id="rId43"/>
-    <p:sldId id="692" r:id="rId44"/>
+    <p:sldId id="589" r:id="rId30"/>
+    <p:sldId id="691" r:id="rId31"/>
+    <p:sldId id="588" r:id="rId32"/>
+    <p:sldId id="737" r:id="rId33"/>
+    <p:sldId id="658" r:id="rId34"/>
+    <p:sldId id="726" r:id="rId35"/>
+    <p:sldId id="640" r:id="rId36"/>
+    <p:sldId id="641" r:id="rId37"/>
+    <p:sldId id="643" r:id="rId38"/>
+    <p:sldId id="644" r:id="rId39"/>
+    <p:sldId id="645" r:id="rId40"/>
+    <p:sldId id="646" r:id="rId41"/>
+    <p:sldId id="289" r:id="rId42"/>
+    <p:sldId id="660" r:id="rId43"/>
+    <p:sldId id="291" r:id="rId44"/>
+    <p:sldId id="692" r:id="rId45"/>
   </p:sldIdLst>
   <p:sldSz cx="12192000" cy="6858000"/>
   <p:notesSz cx="6858000" cy="9144000"/>
   <p:embeddedFontLst>
     <p:embeddedFont>
       <p:font typeface="Algerian" panose="04020705040A02060702" pitchFamily="82" charset="0"/>
-      <p:regular r:id="rId46"/>
+      <p:regular r:id="rId47"/>
     </p:embeddedFont>
     <p:embeddedFont>
       <p:font typeface="Consolas" panose="020B0609020204030204" pitchFamily="49" charset="0"/>
-      <p:regular r:id="rId47"/>
-      <p:bold r:id="rId48"/>
-      <p:italic r:id="rId49"/>
-      <p:boldItalic r:id="rId50"/>
+      <p:regular r:id="rId48"/>
+      <p:bold r:id="rId49"/>
+      <p:italic r:id="rId50"/>
+      <p:boldItalic r:id="rId51"/>
     </p:embeddedFont>
     <p:embeddedFont>
       <p:font typeface="Ink Free" panose="03080402000500000000" pitchFamily="66" charset="0"/>
-      <p:regular r:id="rId51"/>
+      <p:regular r:id="rId52"/>
     </p:embeddedFont>
     <p:embeddedFont>
       <p:font typeface="Verdana" panose="020B0604030504040204" pitchFamily="34" charset="0"/>
-      <p:regular r:id="rId52"/>
-      <p:bold r:id="rId53"/>
-      <p:italic r:id="rId54"/>
-      <p:boldItalic r:id="rId55"/>
+      <p:regular r:id="rId53"/>
+      <p:bold r:id="rId54"/>
+      <p:italic r:id="rId55"/>
+      <p:boldItalic r:id="rId56"/>
     </p:embeddedFont>
   </p:embeddedFontLst>
   <p:defaultTextStyle>
@@ -191,14 +192,11 @@
             <p14:sldId id="583"/>
             <p14:sldId id="704"/>
             <p14:sldId id="705"/>
+            <p14:sldId id="668"/>
+            <p14:sldId id="669"/>
             <p14:sldId id="723"/>
             <p14:sldId id="729"/>
-            <p14:sldId id="741"/>
             <p14:sldId id="676"/>
-          </p14:sldIdLst>
-        </p14:section>
-        <p14:section name="Default Section" id="{99D725CF-287E-4033-8A0A-65D8E848EB85}">
-          <p14:sldIdLst>
             <p14:sldId id="732"/>
             <p14:sldId id="584"/>
             <p14:sldId id="585"/>
@@ -208,8 +206,8 @@
             <p14:sldId id="690"/>
             <p14:sldId id="661"/>
             <p14:sldId id="663"/>
+            <p14:sldId id="733"/>
             <p14:sldId id="589"/>
-            <p14:sldId id="733"/>
             <p14:sldId id="691"/>
             <p14:sldId id="588"/>
             <p14:sldId id="737"/>
@@ -226,9 +224,6 @@
             <p14:sldId id="291"/>
             <p14:sldId id="692"/>
           </p14:sldIdLst>
-        </p14:section>
-        <p14:section name="Default Section" id="{8798EF7B-FA91-3F42-BBDB-C5DCFDEAEC07}">
-          <p14:sldIdLst/>
         </p14:section>
       </p14:sectionLst>
     </p:ext>
@@ -324,7 +319,7 @@
           <a:p>
             <a:fld id="{7C7E5181-6CF5-45F7-A87A-E0E0B1FD7549}" type="datetimeFigureOut">
               <a:rPr lang="en-US" smtClean="0"/>
-              <a:t>9/11/2026</a:t>
+              <a:t>9/16/2026</a:t>
             </a:fld>
             <a:endParaRPr lang="en-US"/>
           </a:p>
@@ -683,6 +678,304 @@
         <p:cNvPr id="1" name="">
           <a:extLst>
             <a:ext uri="{FF2B5EF4-FFF2-40B4-BE49-F238E27FC236}">
+              <a16:creationId xmlns:a16="http://schemas.microsoft.com/office/drawing/2014/main" id="{62E3D2D4-3B06-92DD-2ABB-088B1DBA788F}"/>
+            </a:ext>
+          </a:extLst>
+        </p:cNvPr>
+        <p:cNvGrpSpPr/>
+        <p:nvPr/>
+      </p:nvGrpSpPr>
+      <p:grpSpPr>
+        <a:xfrm>
+          <a:off x="0" y="0"/>
+          <a:ext cx="0" cy="0"/>
+          <a:chOff x="0" y="0"/>
+          <a:chExt cx="0" cy="0"/>
+        </a:xfrm>
+      </p:grpSpPr>
+      <p:sp>
+        <p:nvSpPr>
+          <p:cNvPr id="2" name="Slide Image Placeholder 1">
+            <a:extLst>
+              <a:ext uri="{FF2B5EF4-FFF2-40B4-BE49-F238E27FC236}">
+                <a16:creationId xmlns:a16="http://schemas.microsoft.com/office/drawing/2014/main" id="{E9A101BA-48A2-D84E-4FC4-92812349A7FD}"/>
+              </a:ext>
+            </a:extLst>
+          </p:cNvPr>
+          <p:cNvSpPr>
+            <a:spLocks noGrp="1" noRot="1" noChangeAspect="1"/>
+          </p:cNvSpPr>
+          <p:nvPr>
+            <p:ph type="sldImg"/>
+          </p:nvPr>
+        </p:nvSpPr>
+        <p:spPr/>
+      </p:sp>
+      <p:sp>
+        <p:nvSpPr>
+          <p:cNvPr id="3" name="Notes Placeholder 2">
+            <a:extLst>
+              <a:ext uri="{FF2B5EF4-FFF2-40B4-BE49-F238E27FC236}">
+                <a16:creationId xmlns:a16="http://schemas.microsoft.com/office/drawing/2014/main" id="{56C17B64-C914-2D5D-3BBC-4469E3D1FD1F}"/>
+              </a:ext>
+            </a:extLst>
+          </p:cNvPr>
+          <p:cNvSpPr>
+            <a:spLocks noGrp="1"/>
+          </p:cNvSpPr>
+          <p:nvPr>
+            <p:ph type="body" idx="1"/>
+          </p:nvPr>
+        </p:nvSpPr>
+        <p:spPr/>
+        <p:txBody>
+          <a:bodyPr/>
+          <a:lstStyle/>
+          <a:p>
+            <a:r>
+              <a:rPr lang="en-US" dirty="0"/>
+              <a:t>Not all inputs to your programs can be trusted to have any particular shape or form!</a:t>
+            </a:r>
+          </a:p>
+          <a:p>
+            <a:endParaRPr lang="en-US" dirty="0"/>
+          </a:p>
+          <a:p>
+            <a:r>
+              <a:rPr lang="en-US" dirty="0"/>
+              <a:t>When you give an input to a website through a web browser, the code on the web browser will make sure the request has a specific format. But the nature of web applications is that those submissions can </a:t>
+            </a:r>
+            <a:r>
+              <a:rPr lang="en-US" i="1" dirty="0"/>
+              <a:t>always </a:t>
+            </a:r>
+            <a:r>
+              <a:rPr lang="en-US" i="0" dirty="0"/>
+              <a:t>be done in different ways, without the same guardrails.</a:t>
+            </a:r>
+          </a:p>
+          <a:p>
+            <a:r>
+              <a:rPr lang="en-US" i="0" dirty="0"/>
+              <a:t> </a:t>
+            </a:r>
+          </a:p>
+          <a:p>
+            <a:r>
+              <a:rPr lang="en-US" i="0" dirty="0"/>
+              <a:t>On the upper right we show the same action of creating a </a:t>
+            </a:r>
+            <a:r>
+              <a:rPr lang="en-US" i="0" dirty="0" err="1"/>
+              <a:t>GameNite</a:t>
+            </a:r>
+            <a:r>
+              <a:rPr lang="en-US" i="0" dirty="0"/>
+              <a:t> account being done through the “Postman” program (there’s a Postman tutorial on the website), and on the command line with a command-line “curl” command. (You can get “curl” commands out of Postman too.)</a:t>
+            </a:r>
+            <a:endParaRPr lang="en-US" dirty="0"/>
+          </a:p>
+        </p:txBody>
+      </p:sp>
+      <p:sp>
+        <p:nvSpPr>
+          <p:cNvPr id="4" name="Slide Number Placeholder 3">
+            <a:extLst>
+              <a:ext uri="{FF2B5EF4-FFF2-40B4-BE49-F238E27FC236}">
+                <a16:creationId xmlns:a16="http://schemas.microsoft.com/office/drawing/2014/main" id="{2FF8C9A4-B2EE-6557-8062-EF8775204CD1}"/>
+              </a:ext>
+            </a:extLst>
+          </p:cNvPr>
+          <p:cNvSpPr>
+            <a:spLocks noGrp="1"/>
+          </p:cNvSpPr>
+          <p:nvPr>
+            <p:ph type="sldNum" sz="quarter" idx="5"/>
+          </p:nvPr>
+        </p:nvSpPr>
+        <p:spPr/>
+        <p:txBody>
+          <a:bodyPr/>
+          <a:lstStyle/>
+          <a:p>
+            <a:fld id="{07937F07-1250-4CCE-B198-1B2887014F41}" type="slidenum">
+              <a:rPr lang="en-US" smtClean="0"/>
+              <a:t>14</a:t>
+            </a:fld>
+            <a:endParaRPr lang="en-US"/>
+          </a:p>
+        </p:txBody>
+      </p:sp>
+    </p:spTree>
+    <p:extLst>
+      <p:ext uri="{BB962C8B-B14F-4D97-AF65-F5344CB8AC3E}">
+        <p14:creationId xmlns:p14="http://schemas.microsoft.com/office/powerpoint/2010/main" val="2619626549"/>
+      </p:ext>
+    </p:extLst>
+  </p:cSld>
+  <p:clrMapOvr>
+    <a:masterClrMapping/>
+  </p:clrMapOvr>
+</p:notes>
+</file>
+
+<file path=ppt/notesSlides/notesSlide11.xml><?xml version="1.0" encoding="utf-8"?>
+<p:notes xmlns:a="http://schemas.openxmlformats.org/drawingml/2006/main" xmlns:r="http://schemas.openxmlformats.org/officeDocument/2006/relationships" xmlns:p="http://schemas.openxmlformats.org/presentationml/2006/main">
+  <p:cSld>
+    <p:spTree>
+      <p:nvGrpSpPr>
+        <p:cNvPr id="1" name="">
+          <a:extLst>
+            <a:ext uri="{FF2B5EF4-FFF2-40B4-BE49-F238E27FC236}">
+              <a16:creationId xmlns:a16="http://schemas.microsoft.com/office/drawing/2014/main" id="{4FD3F2F5-3486-F3D4-01BD-3A260D56A411}"/>
+            </a:ext>
+          </a:extLst>
+        </p:cNvPr>
+        <p:cNvGrpSpPr/>
+        <p:nvPr/>
+      </p:nvGrpSpPr>
+      <p:grpSpPr>
+        <a:xfrm>
+          <a:off x="0" y="0"/>
+          <a:ext cx="0" cy="0"/>
+          <a:chOff x="0" y="0"/>
+          <a:chExt cx="0" cy="0"/>
+        </a:xfrm>
+      </p:grpSpPr>
+      <p:sp>
+        <p:nvSpPr>
+          <p:cNvPr id="2" name="Slide Image Placeholder 1">
+            <a:extLst>
+              <a:ext uri="{FF2B5EF4-FFF2-40B4-BE49-F238E27FC236}">
+                <a16:creationId xmlns:a16="http://schemas.microsoft.com/office/drawing/2014/main" id="{77BA9310-4DD7-173D-212C-E57A29B49F37}"/>
+              </a:ext>
+            </a:extLst>
+          </p:cNvPr>
+          <p:cNvSpPr>
+            <a:spLocks noGrp="1" noRot="1" noChangeAspect="1"/>
+          </p:cNvSpPr>
+          <p:nvPr>
+            <p:ph type="sldImg"/>
+          </p:nvPr>
+        </p:nvSpPr>
+        <p:spPr/>
+      </p:sp>
+      <p:sp>
+        <p:nvSpPr>
+          <p:cNvPr id="3" name="Notes Placeholder 2">
+            <a:extLst>
+              <a:ext uri="{FF2B5EF4-FFF2-40B4-BE49-F238E27FC236}">
+                <a16:creationId xmlns:a16="http://schemas.microsoft.com/office/drawing/2014/main" id="{1EFC2DE8-FE51-C4EA-5FC3-AEBE167FCF82}"/>
+              </a:ext>
+            </a:extLst>
+          </p:cNvPr>
+          <p:cNvSpPr>
+            <a:spLocks noGrp="1"/>
+          </p:cNvSpPr>
+          <p:nvPr>
+            <p:ph type="body" idx="1"/>
+          </p:nvPr>
+        </p:nvSpPr>
+        <p:spPr/>
+        <p:txBody>
+          <a:bodyPr/>
+          <a:lstStyle/>
+          <a:p>
+            <a:r>
+              <a:rPr lang="en-US" dirty="0"/>
+              <a:t>TypeScript has a way of dealing with inputs when you can’t trust that the input is going to obey any sort of contract: the unknown type.</a:t>
+            </a:r>
+          </a:p>
+          <a:p>
+            <a:endParaRPr lang="en-US" dirty="0"/>
+          </a:p>
+          <a:p>
+            <a:r>
+              <a:rPr lang="en-US" dirty="0"/>
+              <a:t>(click)</a:t>
+            </a:r>
+          </a:p>
+          <a:p>
+            <a:r>
+              <a:rPr lang="en-US" dirty="0"/>
+              <a:t>If you have an unknown value and you try to do pretty much anything to it (such as cast it to uppercase like it’s a string), TypeScript will yell at you. </a:t>
+            </a:r>
+          </a:p>
+          <a:p>
+            <a:endParaRPr lang="en-US" dirty="0"/>
+          </a:p>
+          <a:p>
+            <a:r>
+              <a:rPr lang="en-US" dirty="0"/>
+              <a:t>(click)</a:t>
+            </a:r>
+          </a:p>
+          <a:p>
+            <a:r>
+              <a:rPr lang="en-US" dirty="0"/>
+              <a:t>But if you check that it’s a string first with JavaScript’s </a:t>
+            </a:r>
+            <a:r>
+              <a:rPr lang="en-US" dirty="0" err="1"/>
+              <a:t>typeof</a:t>
+            </a:r>
+            <a:r>
+              <a:rPr lang="en-US" dirty="0"/>
+              <a:t> function, TypeScript will then remember that you’ve checked that it’s a string.</a:t>
+            </a:r>
+          </a:p>
+        </p:txBody>
+      </p:sp>
+      <p:sp>
+        <p:nvSpPr>
+          <p:cNvPr id="4" name="Slide Number Placeholder 3">
+            <a:extLst>
+              <a:ext uri="{FF2B5EF4-FFF2-40B4-BE49-F238E27FC236}">
+                <a16:creationId xmlns:a16="http://schemas.microsoft.com/office/drawing/2014/main" id="{9BF8BCC5-B2AB-557F-2B03-6F1C9309125F}"/>
+              </a:ext>
+            </a:extLst>
+          </p:cNvPr>
+          <p:cNvSpPr>
+            <a:spLocks noGrp="1"/>
+          </p:cNvSpPr>
+          <p:nvPr>
+            <p:ph type="sldNum" sz="quarter" idx="5"/>
+          </p:nvPr>
+        </p:nvSpPr>
+        <p:spPr/>
+        <p:txBody>
+          <a:bodyPr/>
+          <a:lstStyle/>
+          <a:p>
+            <a:fld id="{07937F07-1250-4CCE-B198-1B2887014F41}" type="slidenum">
+              <a:rPr lang="en-US" smtClean="0"/>
+              <a:t>15</a:t>
+            </a:fld>
+            <a:endParaRPr lang="en-US"/>
+          </a:p>
+        </p:txBody>
+      </p:sp>
+    </p:spTree>
+    <p:extLst>
+      <p:ext uri="{BB962C8B-B14F-4D97-AF65-F5344CB8AC3E}">
+        <p14:creationId xmlns:p14="http://schemas.microsoft.com/office/powerpoint/2010/main" val="2639117819"/>
+      </p:ext>
+    </p:extLst>
+  </p:cSld>
+  <p:clrMapOvr>
+    <a:masterClrMapping/>
+  </p:clrMapOvr>
+</p:notes>
+</file>
+
+<file path=ppt/notesSlides/notesSlide12.xml><?xml version="1.0" encoding="utf-8"?>
+<p:notes xmlns:a="http://schemas.openxmlformats.org/drawingml/2006/main" xmlns:r="http://schemas.openxmlformats.org/officeDocument/2006/relationships" xmlns:p="http://schemas.openxmlformats.org/presentationml/2006/main">
+  <p:cSld>
+    <p:spTree>
+      <p:nvGrpSpPr>
+        <p:cNvPr id="1" name="">
+          <a:extLst>
+            <a:ext uri="{FF2B5EF4-FFF2-40B4-BE49-F238E27FC236}">
               <a16:creationId xmlns:a16="http://schemas.microsoft.com/office/drawing/2014/main" id="{F52E1702-4BAC-79EB-B53B-BC8CF5D42278}"/>
             </a:ext>
           </a:extLst>
@@ -886,7 +1179,7 @@
           <a:p>
             <a:fld id="{07937F07-1250-4CCE-B198-1B2887014F41}" type="slidenum">
               <a:rPr lang="en-US" smtClean="0"/>
-              <a:t>14</a:t>
+              <a:t>16</a:t>
             </a:fld>
             <a:endParaRPr lang="en-US"/>
           </a:p>
@@ -905,7 +1198,7 @@
 </p:notes>
 </file>
 
-<file path=ppt/notesSlides/notesSlide11.xml><?xml version="1.0" encoding="utf-8"?>
+<file path=ppt/notesSlides/notesSlide13.xml><?xml version="1.0" encoding="utf-8"?>
 <p:notes xmlns:a="http://schemas.openxmlformats.org/drawingml/2006/main" xmlns:r="http://schemas.openxmlformats.org/officeDocument/2006/relationships" xmlns:p="http://schemas.openxmlformats.org/presentationml/2006/main">
   <p:cSld>
     <p:spTree>
@@ -1006,7 +1299,7 @@
           <a:p>
             <a:fld id="{07937F07-1250-4CCE-B198-1B2887014F41}" type="slidenum">
               <a:rPr lang="en-US" smtClean="0"/>
-              <a:t>17</a:t>
+              <a:t>18</a:t>
             </a:fld>
             <a:endParaRPr lang="en-US"/>
           </a:p>
@@ -1016,199 +1309,6 @@
     <p:extLst>
       <p:ext uri="{BB962C8B-B14F-4D97-AF65-F5344CB8AC3E}">
         <p14:creationId xmlns:p14="http://schemas.microsoft.com/office/powerpoint/2010/main" val="3597398130"/>
-      </p:ext>
-    </p:extLst>
-  </p:cSld>
-  <p:clrMapOvr>
-    <a:masterClrMapping/>
-  </p:clrMapOvr>
-</p:notes>
-</file>
-
-<file path=ppt/notesSlides/notesSlide12.xml><?xml version="1.0" encoding="utf-8"?>
-<p:notes xmlns:a="http://schemas.openxmlformats.org/drawingml/2006/main" xmlns:r="http://schemas.openxmlformats.org/officeDocument/2006/relationships" xmlns:p="http://schemas.openxmlformats.org/presentationml/2006/main">
-  <p:cSld>
-    <p:spTree>
-      <p:nvGrpSpPr>
-        <p:cNvPr id="1" name=""/>
-        <p:cNvGrpSpPr/>
-        <p:nvPr/>
-      </p:nvGrpSpPr>
-      <p:grpSpPr>
-        <a:xfrm>
-          <a:off x="0" y="0"/>
-          <a:ext cx="0" cy="0"/>
-          <a:chOff x="0" y="0"/>
-          <a:chExt cx="0" cy="0"/>
-        </a:xfrm>
-      </p:grpSpPr>
-      <p:sp>
-        <p:nvSpPr>
-          <p:cNvPr id="2" name="Slide Image Placeholder 1"/>
-          <p:cNvSpPr>
-            <a:spLocks noGrp="1" noRot="1" noChangeAspect="1"/>
-          </p:cNvSpPr>
-          <p:nvPr>
-            <p:ph type="sldImg"/>
-          </p:nvPr>
-        </p:nvSpPr>
-        <p:spPr/>
-      </p:sp>
-      <p:sp>
-        <p:nvSpPr>
-          <p:cNvPr id="3" name="Notes Placeholder 2"/>
-          <p:cNvSpPr>
-            <a:spLocks noGrp="1"/>
-          </p:cNvSpPr>
-          <p:nvPr>
-            <p:ph type="body" idx="1"/>
-          </p:nvPr>
-        </p:nvSpPr>
-        <p:spPr/>
-        <p:txBody>
-          <a:bodyPr/>
-          <a:lstStyle/>
-          <a:p>
-            <a:r>
-              <a:rPr lang="en-US" dirty="0"/>
-              <a:t>That talks about what our goals are for writing enough tests. In most software engineering applications, when we </a:t>
-            </a:r>
-            <a:r>
-              <a:rPr lang="en-US" i="1" dirty="0"/>
-              <a:t>measure</a:t>
-            </a:r>
-            <a:r>
-              <a:rPr lang="en-US" i="0" dirty="0"/>
-              <a:t> whether we’re writing good tests, we are talking about measuring </a:t>
-            </a:r>
-            <a:r>
-              <a:rPr lang="en-US" i="1" dirty="0"/>
-              <a:t>code coverage.</a:t>
-            </a:r>
-            <a:endParaRPr lang="en-US" i="0" dirty="0"/>
-          </a:p>
-          <a:p>
-            <a:endParaRPr lang="en-US" i="0" dirty="0"/>
-          </a:p>
-          <a:p>
-            <a:r>
-              <a:rPr lang="en-US" i="0" dirty="0"/>
-              <a:t>Measuring code coverage is based on a really simple thought: if you’re not running code, you’re not testing it.</a:t>
-            </a:r>
-          </a:p>
-        </p:txBody>
-      </p:sp>
-      <p:sp>
-        <p:nvSpPr>
-          <p:cNvPr id="4" name="Slide Number Placeholder 3"/>
-          <p:cNvSpPr>
-            <a:spLocks noGrp="1"/>
-          </p:cNvSpPr>
-          <p:nvPr>
-            <p:ph type="sldNum" sz="quarter" idx="5"/>
-          </p:nvPr>
-        </p:nvSpPr>
-        <p:spPr/>
-        <p:txBody>
-          <a:bodyPr/>
-          <a:lstStyle/>
-          <a:p>
-            <a:fld id="{07937F07-1250-4CCE-B198-1B2887014F41}" type="slidenum">
-              <a:rPr lang="en-US" smtClean="0"/>
-              <a:t>19</a:t>
-            </a:fld>
-            <a:endParaRPr lang="en-US"/>
-          </a:p>
-        </p:txBody>
-      </p:sp>
-    </p:spTree>
-    <p:extLst>
-      <p:ext uri="{BB962C8B-B14F-4D97-AF65-F5344CB8AC3E}">
-        <p14:creationId xmlns:p14="http://schemas.microsoft.com/office/powerpoint/2010/main" val="2377980533"/>
-      </p:ext>
-    </p:extLst>
-  </p:cSld>
-  <p:clrMapOvr>
-    <a:masterClrMapping/>
-  </p:clrMapOvr>
-</p:notes>
-</file>
-
-<file path=ppt/notesSlides/notesSlide13.xml><?xml version="1.0" encoding="utf-8"?>
-<p:notes xmlns:a="http://schemas.openxmlformats.org/drawingml/2006/main" xmlns:r="http://schemas.openxmlformats.org/officeDocument/2006/relationships" xmlns:p="http://schemas.openxmlformats.org/presentationml/2006/main">
-  <p:cSld>
-    <p:spTree>
-      <p:nvGrpSpPr>
-        <p:cNvPr id="1" name=""/>
-        <p:cNvGrpSpPr/>
-        <p:nvPr/>
-      </p:nvGrpSpPr>
-      <p:grpSpPr>
-        <a:xfrm>
-          <a:off x="0" y="0"/>
-          <a:ext cx="0" cy="0"/>
-          <a:chOff x="0" y="0"/>
-          <a:chExt cx="0" cy="0"/>
-        </a:xfrm>
-      </p:grpSpPr>
-      <p:sp>
-        <p:nvSpPr>
-          <p:cNvPr id="2" name="Slide Image Placeholder 1"/>
-          <p:cNvSpPr>
-            <a:spLocks noGrp="1" noRot="1" noChangeAspect="1"/>
-          </p:cNvSpPr>
-          <p:nvPr>
-            <p:ph type="sldImg"/>
-          </p:nvPr>
-        </p:nvSpPr>
-        <p:spPr/>
-      </p:sp>
-      <p:sp>
-        <p:nvSpPr>
-          <p:cNvPr id="3" name="Notes Placeholder 2"/>
-          <p:cNvSpPr>
-            <a:spLocks noGrp="1"/>
-          </p:cNvSpPr>
-          <p:nvPr>
-            <p:ph type="body" idx="1"/>
-          </p:nvPr>
-        </p:nvSpPr>
-        <p:spPr/>
-        <p:txBody>
-          <a:bodyPr/>
-          <a:lstStyle/>
-          <a:p>
-            <a:endParaRPr lang="en-US" dirty="0"/>
-          </a:p>
-        </p:txBody>
-      </p:sp>
-      <p:sp>
-        <p:nvSpPr>
-          <p:cNvPr id="4" name="Slide Number Placeholder 3"/>
-          <p:cNvSpPr>
-            <a:spLocks noGrp="1"/>
-          </p:cNvSpPr>
-          <p:nvPr>
-            <p:ph type="sldNum" sz="quarter" idx="5"/>
-          </p:nvPr>
-        </p:nvSpPr>
-        <p:spPr/>
-        <p:txBody>
-          <a:bodyPr/>
-          <a:lstStyle/>
-          <a:p>
-            <a:fld id="{07937F07-1250-4CCE-B198-1B2887014F41}" type="slidenum">
-              <a:rPr lang="en-US" smtClean="0"/>
-              <a:t>20</a:t>
-            </a:fld>
-            <a:endParaRPr lang="en-US"/>
-          </a:p>
-        </p:txBody>
-      </p:sp>
-    </p:spTree>
-    <p:extLst>
-      <p:ext uri="{BB962C8B-B14F-4D97-AF65-F5344CB8AC3E}">
-        <p14:creationId xmlns:p14="http://schemas.microsoft.com/office/powerpoint/2010/main" val="2509370737"/>
       </p:ext>
     </p:extLst>
   </p:cSld>
@@ -1262,7 +1362,32 @@
           <a:bodyPr/>
           <a:lstStyle/>
           <a:p>
-            <a:endParaRPr lang="en-US" dirty="0"/>
+            <a:r>
+              <a:rPr lang="en-US" dirty="0"/>
+              <a:t>That talks about what our goals are for writing enough tests. In most software engineering applications, when we </a:t>
+            </a:r>
+            <a:r>
+              <a:rPr lang="en-US" i="1" dirty="0"/>
+              <a:t>measure</a:t>
+            </a:r>
+            <a:r>
+              <a:rPr lang="en-US" i="0" dirty="0"/>
+              <a:t> whether we’re writing good tests, we are talking about measuring </a:t>
+            </a:r>
+            <a:r>
+              <a:rPr lang="en-US" i="1" dirty="0"/>
+              <a:t>code coverage.</a:t>
+            </a:r>
+            <a:endParaRPr lang="en-US" i="0" dirty="0"/>
+          </a:p>
+          <a:p>
+            <a:endParaRPr lang="en-US" i="0" dirty="0"/>
+          </a:p>
+          <a:p>
+            <a:r>
+              <a:rPr lang="en-US" i="0" dirty="0"/>
+              <a:t>Measuring code coverage is based on a really simple thought: if you’re not running code, you’re not testing it.</a:t>
+            </a:r>
           </a:p>
         </p:txBody>
       </p:sp>
@@ -1283,7 +1408,7 @@
           <a:p>
             <a:fld id="{07937F07-1250-4CCE-B198-1B2887014F41}" type="slidenum">
               <a:rPr lang="en-US" smtClean="0"/>
-              <a:t>21</a:t>
+              <a:t>20</a:t>
             </a:fld>
             <a:endParaRPr lang="en-US"/>
           </a:p>
@@ -1292,7 +1417,7 @@
     </p:spTree>
     <p:extLst>
       <p:ext uri="{BB962C8B-B14F-4D97-AF65-F5344CB8AC3E}">
-        <p14:creationId xmlns:p14="http://schemas.microsoft.com/office/powerpoint/2010/main" val="4257436232"/>
+        <p14:creationId xmlns:p14="http://schemas.microsoft.com/office/powerpoint/2010/main" val="2377980533"/>
       </p:ext>
     </p:extLst>
   </p:cSld>
@@ -1346,18 +1471,6 @@
           <a:bodyPr/>
           <a:lstStyle/>
           <a:p>
-            <a:r>
-              <a:rPr lang="en-US" dirty="0"/>
-              <a:t>(Answer: just the input 1 will get line coverage </a:t>
-            </a:r>
-            <a:r>
-              <a:rPr lang="en-US" i="1" dirty="0"/>
-              <a:t>and </a:t>
-            </a:r>
-            <a:r>
-              <a:rPr lang="en-US" i="0" dirty="0"/>
-              <a:t>branch coverage. That’s not great! But path coverage would take an infinite number of tests. This metric isn’t perfect!)</a:t>
-            </a:r>
             <a:endParaRPr lang="en-US" dirty="0"/>
           </a:p>
         </p:txBody>
@@ -1379,7 +1492,187 @@
           <a:p>
             <a:fld id="{07937F07-1250-4CCE-B198-1B2887014F41}" type="slidenum">
               <a:rPr lang="en-US" smtClean="0"/>
-              <a:t>23</a:t>
+              <a:t>21</a:t>
+            </a:fld>
+            <a:endParaRPr lang="en-US"/>
+          </a:p>
+        </p:txBody>
+      </p:sp>
+    </p:spTree>
+    <p:extLst>
+      <p:ext uri="{BB962C8B-B14F-4D97-AF65-F5344CB8AC3E}">
+        <p14:creationId xmlns:p14="http://schemas.microsoft.com/office/powerpoint/2010/main" val="2509370737"/>
+      </p:ext>
+    </p:extLst>
+  </p:cSld>
+  <p:clrMapOvr>
+    <a:masterClrMapping/>
+  </p:clrMapOvr>
+</p:notes>
+</file>
+
+<file path=ppt/notesSlides/notesSlide16.xml><?xml version="1.0" encoding="utf-8"?>
+<p:notes xmlns:a="http://schemas.openxmlformats.org/drawingml/2006/main" xmlns:r="http://schemas.openxmlformats.org/officeDocument/2006/relationships" xmlns:p="http://schemas.openxmlformats.org/presentationml/2006/main">
+  <p:cSld>
+    <p:spTree>
+      <p:nvGrpSpPr>
+        <p:cNvPr id="1" name=""/>
+        <p:cNvGrpSpPr/>
+        <p:nvPr/>
+      </p:nvGrpSpPr>
+      <p:grpSpPr>
+        <a:xfrm>
+          <a:off x="0" y="0"/>
+          <a:ext cx="0" cy="0"/>
+          <a:chOff x="0" y="0"/>
+          <a:chExt cx="0" cy="0"/>
+        </a:xfrm>
+      </p:grpSpPr>
+      <p:sp>
+        <p:nvSpPr>
+          <p:cNvPr id="2" name="Slide Image Placeholder 1"/>
+          <p:cNvSpPr>
+            <a:spLocks noGrp="1" noRot="1" noChangeAspect="1"/>
+          </p:cNvSpPr>
+          <p:nvPr>
+            <p:ph type="sldImg"/>
+          </p:nvPr>
+        </p:nvSpPr>
+        <p:spPr/>
+      </p:sp>
+      <p:sp>
+        <p:nvSpPr>
+          <p:cNvPr id="3" name="Notes Placeholder 2"/>
+          <p:cNvSpPr>
+            <a:spLocks noGrp="1"/>
+          </p:cNvSpPr>
+          <p:nvPr>
+            <p:ph type="body" idx="1"/>
+          </p:nvPr>
+        </p:nvSpPr>
+        <p:spPr/>
+        <p:txBody>
+          <a:bodyPr/>
+          <a:lstStyle/>
+          <a:p>
+            <a:endParaRPr lang="en-US" dirty="0"/>
+          </a:p>
+        </p:txBody>
+      </p:sp>
+      <p:sp>
+        <p:nvSpPr>
+          <p:cNvPr id="4" name="Slide Number Placeholder 3"/>
+          <p:cNvSpPr>
+            <a:spLocks noGrp="1"/>
+          </p:cNvSpPr>
+          <p:nvPr>
+            <p:ph type="sldNum" sz="quarter" idx="5"/>
+          </p:nvPr>
+        </p:nvSpPr>
+        <p:spPr/>
+        <p:txBody>
+          <a:bodyPr/>
+          <a:lstStyle/>
+          <a:p>
+            <a:fld id="{07937F07-1250-4CCE-B198-1B2887014F41}" type="slidenum">
+              <a:rPr lang="en-US" smtClean="0"/>
+              <a:t>22</a:t>
+            </a:fld>
+            <a:endParaRPr lang="en-US"/>
+          </a:p>
+        </p:txBody>
+      </p:sp>
+    </p:spTree>
+    <p:extLst>
+      <p:ext uri="{BB962C8B-B14F-4D97-AF65-F5344CB8AC3E}">
+        <p14:creationId xmlns:p14="http://schemas.microsoft.com/office/powerpoint/2010/main" val="4257436232"/>
+      </p:ext>
+    </p:extLst>
+  </p:cSld>
+  <p:clrMapOvr>
+    <a:masterClrMapping/>
+  </p:clrMapOvr>
+</p:notes>
+</file>
+
+<file path=ppt/notesSlides/notesSlide17.xml><?xml version="1.0" encoding="utf-8"?>
+<p:notes xmlns:a="http://schemas.openxmlformats.org/drawingml/2006/main" xmlns:r="http://schemas.openxmlformats.org/officeDocument/2006/relationships" xmlns:p="http://schemas.openxmlformats.org/presentationml/2006/main">
+  <p:cSld>
+    <p:spTree>
+      <p:nvGrpSpPr>
+        <p:cNvPr id="1" name=""/>
+        <p:cNvGrpSpPr/>
+        <p:nvPr/>
+      </p:nvGrpSpPr>
+      <p:grpSpPr>
+        <a:xfrm>
+          <a:off x="0" y="0"/>
+          <a:ext cx="0" cy="0"/>
+          <a:chOff x="0" y="0"/>
+          <a:chExt cx="0" cy="0"/>
+        </a:xfrm>
+      </p:grpSpPr>
+      <p:sp>
+        <p:nvSpPr>
+          <p:cNvPr id="2" name="Slide Image Placeholder 1"/>
+          <p:cNvSpPr>
+            <a:spLocks noGrp="1" noRot="1" noChangeAspect="1"/>
+          </p:cNvSpPr>
+          <p:nvPr>
+            <p:ph type="sldImg"/>
+          </p:nvPr>
+        </p:nvSpPr>
+        <p:spPr/>
+      </p:sp>
+      <p:sp>
+        <p:nvSpPr>
+          <p:cNvPr id="3" name="Notes Placeholder 2"/>
+          <p:cNvSpPr>
+            <a:spLocks noGrp="1"/>
+          </p:cNvSpPr>
+          <p:nvPr>
+            <p:ph type="body" idx="1"/>
+          </p:nvPr>
+        </p:nvSpPr>
+        <p:spPr/>
+        <p:txBody>
+          <a:bodyPr/>
+          <a:lstStyle/>
+          <a:p>
+            <a:r>
+              <a:rPr lang="en-US" dirty="0"/>
+              <a:t>(Answer: just the input 1 will get line coverage </a:t>
+            </a:r>
+            <a:r>
+              <a:rPr lang="en-US" i="1" dirty="0"/>
+              <a:t>and </a:t>
+            </a:r>
+            <a:r>
+              <a:rPr lang="en-US" i="0" dirty="0"/>
+              <a:t>branch coverage. That’s not great! But path coverage would take an infinite number of tests. This metric isn’t perfect!)</a:t>
+            </a:r>
+            <a:endParaRPr lang="en-US" dirty="0"/>
+          </a:p>
+        </p:txBody>
+      </p:sp>
+      <p:sp>
+        <p:nvSpPr>
+          <p:cNvPr id="4" name="Slide Number Placeholder 3"/>
+          <p:cNvSpPr>
+            <a:spLocks noGrp="1"/>
+          </p:cNvSpPr>
+          <p:nvPr>
+            <p:ph type="sldNum" sz="quarter" idx="5"/>
+          </p:nvPr>
+        </p:nvSpPr>
+        <p:spPr/>
+        <p:txBody>
+          <a:bodyPr/>
+          <a:lstStyle/>
+          <a:p>
+            <a:fld id="{07937F07-1250-4CCE-B198-1B2887014F41}" type="slidenum">
+              <a:rPr lang="en-US" smtClean="0"/>
+              <a:t>24</a:t>
             </a:fld>
             <a:endParaRPr lang="en-US"/>
           </a:p>
@@ -1398,7 +1691,7 @@
 </p:notes>
 </file>
 
-<file path=ppt/notesSlides/notesSlide16.xml><?xml version="1.0" encoding="utf-8"?>
+<file path=ppt/notesSlides/notesSlide18.xml><?xml version="1.0" encoding="utf-8"?>
 <p:notes xmlns:a="http://schemas.openxmlformats.org/drawingml/2006/main" xmlns:r="http://schemas.openxmlformats.org/officeDocument/2006/relationships" xmlns:p="http://schemas.openxmlformats.org/presentationml/2006/main">
   <p:cSld>
     <p:spTree>
@@ -1498,7 +1791,7 @@
           <a:p>
             <a:fld id="{07937F07-1250-4CCE-B198-1B2887014F41}" type="slidenum">
               <a:rPr lang="en-US" smtClean="0"/>
-              <a:t>24</a:t>
+              <a:t>25</a:t>
             </a:fld>
             <a:endParaRPr lang="en-US"/>
           </a:p>
@@ -1517,7 +1810,7 @@
 </p:notes>
 </file>
 
-<file path=ppt/notesSlides/notesSlide17.xml><?xml version="1.0" encoding="utf-8"?>
+<file path=ppt/notesSlides/notesSlide19.xml><?xml version="1.0" encoding="utf-8"?>
 <p:notes xmlns:a="http://schemas.openxmlformats.org/drawingml/2006/main" xmlns:r="http://schemas.openxmlformats.org/officeDocument/2006/relationships" xmlns:p="http://schemas.openxmlformats.org/presentationml/2006/main">
   <p:cSld>
     <p:spTree>
@@ -1581,6 +1874,15 @@
           <a:p>
             <a:r>
               <a:rPr lang="en-US" dirty="0"/>
+              <a:t>You can get 100% code coverage while completely missing edge cases.</a:t>
+            </a:r>
+          </a:p>
+          <a:p>
+            <a:br>
+              <a:rPr lang="en-US" dirty="0"/>
+            </a:br>
+            <a:r>
+              <a:rPr lang="en-US" dirty="0"/>
               <a:t>Possible answers: </a:t>
             </a:r>
           </a:p>
@@ -1646,7 +1948,7 @@
           <a:p>
             <a:fld id="{07937F07-1250-4CCE-B198-1B2887014F41}" type="slidenum">
               <a:rPr lang="en-US" smtClean="0"/>
-              <a:t>25</a:t>
+              <a:t>26</a:t>
             </a:fld>
             <a:endParaRPr lang="en-US"/>
           </a:p>
@@ -1656,201 +1958,6 @@
     <p:extLst>
       <p:ext uri="{BB962C8B-B14F-4D97-AF65-F5344CB8AC3E}">
         <p14:creationId xmlns:p14="http://schemas.microsoft.com/office/powerpoint/2010/main" val="2204823044"/>
-      </p:ext>
-    </p:extLst>
-  </p:cSld>
-  <p:clrMapOvr>
-    <a:masterClrMapping/>
-  </p:clrMapOvr>
-</p:notes>
-</file>
-
-<file path=ppt/notesSlides/notesSlide18.xml><?xml version="1.0" encoding="utf-8"?>
-<p:notes xmlns:a="http://schemas.openxmlformats.org/drawingml/2006/main" xmlns:r="http://schemas.openxmlformats.org/officeDocument/2006/relationships" xmlns:p="http://schemas.openxmlformats.org/presentationml/2006/main">
-  <p:cSld>
-    <p:spTree>
-      <p:nvGrpSpPr>
-        <p:cNvPr id="1" name="">
-          <a:extLst>
-            <a:ext uri="{FF2B5EF4-FFF2-40B4-BE49-F238E27FC236}">
-              <a16:creationId xmlns:a16="http://schemas.microsoft.com/office/drawing/2014/main" id="{81EB80F2-2C9B-12B8-0D16-5174A8CD943B}"/>
-            </a:ext>
-          </a:extLst>
-        </p:cNvPr>
-        <p:cNvGrpSpPr/>
-        <p:nvPr/>
-      </p:nvGrpSpPr>
-      <p:grpSpPr>
-        <a:xfrm>
-          <a:off x="0" y="0"/>
-          <a:ext cx="0" cy="0"/>
-          <a:chOff x="0" y="0"/>
-          <a:chExt cx="0" cy="0"/>
-        </a:xfrm>
-      </p:grpSpPr>
-      <p:sp>
-        <p:nvSpPr>
-          <p:cNvPr id="2" name="Slide Image Placeholder 1">
-            <a:extLst>
-              <a:ext uri="{FF2B5EF4-FFF2-40B4-BE49-F238E27FC236}">
-                <a16:creationId xmlns:a16="http://schemas.microsoft.com/office/drawing/2014/main" id="{394E6585-1A51-5728-B06A-4BA3DD6706A3}"/>
-              </a:ext>
-            </a:extLst>
-          </p:cNvPr>
-          <p:cNvSpPr>
-            <a:spLocks noGrp="1" noRot="1" noChangeAspect="1"/>
-          </p:cNvSpPr>
-          <p:nvPr>
-            <p:ph type="sldImg"/>
-          </p:nvPr>
-        </p:nvSpPr>
-        <p:spPr/>
-      </p:sp>
-      <p:sp>
-        <p:nvSpPr>
-          <p:cNvPr id="3" name="Notes Placeholder 2">
-            <a:extLst>
-              <a:ext uri="{FF2B5EF4-FFF2-40B4-BE49-F238E27FC236}">
-                <a16:creationId xmlns:a16="http://schemas.microsoft.com/office/drawing/2014/main" id="{F4B79137-AD76-D014-11A3-ED532727C702}"/>
-              </a:ext>
-            </a:extLst>
-          </p:cNvPr>
-          <p:cNvSpPr>
-            <a:spLocks noGrp="1"/>
-          </p:cNvSpPr>
-          <p:nvPr>
-            <p:ph type="body" idx="1"/>
-          </p:nvPr>
-        </p:nvSpPr>
-        <p:spPr/>
-        <p:txBody>
-          <a:bodyPr/>
-          <a:lstStyle/>
-          <a:p>
-            <a:endParaRPr lang="en-US" dirty="0"/>
-          </a:p>
-        </p:txBody>
-      </p:sp>
-      <p:sp>
-        <p:nvSpPr>
-          <p:cNvPr id="4" name="Slide Number Placeholder 3">
-            <a:extLst>
-              <a:ext uri="{FF2B5EF4-FFF2-40B4-BE49-F238E27FC236}">
-                <a16:creationId xmlns:a16="http://schemas.microsoft.com/office/drawing/2014/main" id="{805342C6-3369-7CC8-4388-FC3B2A34975A}"/>
-              </a:ext>
-            </a:extLst>
-          </p:cNvPr>
-          <p:cNvSpPr>
-            <a:spLocks noGrp="1"/>
-          </p:cNvSpPr>
-          <p:nvPr>
-            <p:ph type="sldNum" sz="quarter" idx="5"/>
-          </p:nvPr>
-        </p:nvSpPr>
-        <p:spPr/>
-        <p:txBody>
-          <a:bodyPr/>
-          <a:lstStyle/>
-          <a:p>
-            <a:fld id="{07937F07-1250-4CCE-B198-1B2887014F41}" type="slidenum">
-              <a:rPr lang="en-US" smtClean="0"/>
-              <a:t>26</a:t>
-            </a:fld>
-            <a:endParaRPr lang="en-US"/>
-          </a:p>
-        </p:txBody>
-      </p:sp>
-    </p:spTree>
-    <p:extLst>
-      <p:ext uri="{BB962C8B-B14F-4D97-AF65-F5344CB8AC3E}">
-        <p14:creationId xmlns:p14="http://schemas.microsoft.com/office/powerpoint/2010/main" val="2943393318"/>
-      </p:ext>
-    </p:extLst>
-  </p:cSld>
-  <p:clrMapOvr>
-    <a:masterClrMapping/>
-  </p:clrMapOvr>
-</p:notes>
-</file>
-
-<file path=ppt/notesSlides/notesSlide19.xml><?xml version="1.0" encoding="utf-8"?>
-<p:notes xmlns:a="http://schemas.openxmlformats.org/drawingml/2006/main" xmlns:r="http://schemas.openxmlformats.org/officeDocument/2006/relationships" xmlns:p="http://schemas.openxmlformats.org/presentationml/2006/main">
-  <p:cSld>
-    <p:spTree>
-      <p:nvGrpSpPr>
-        <p:cNvPr id="1" name=""/>
-        <p:cNvGrpSpPr/>
-        <p:nvPr/>
-      </p:nvGrpSpPr>
-      <p:grpSpPr>
-        <a:xfrm>
-          <a:off x="0" y="0"/>
-          <a:ext cx="0" cy="0"/>
-          <a:chOff x="0" y="0"/>
-          <a:chExt cx="0" cy="0"/>
-        </a:xfrm>
-      </p:grpSpPr>
-      <p:sp>
-        <p:nvSpPr>
-          <p:cNvPr id="2" name="Slide Image Placeholder 1"/>
-          <p:cNvSpPr>
-            <a:spLocks noGrp="1" noRot="1" noChangeAspect="1"/>
-          </p:cNvSpPr>
-          <p:nvPr>
-            <p:ph type="sldImg"/>
-          </p:nvPr>
-        </p:nvSpPr>
-        <p:spPr/>
-      </p:sp>
-      <p:sp>
-        <p:nvSpPr>
-          <p:cNvPr id="3" name="Notes Placeholder 2"/>
-          <p:cNvSpPr>
-            <a:spLocks noGrp="1"/>
-          </p:cNvSpPr>
-          <p:nvPr>
-            <p:ph type="body" idx="1"/>
-          </p:nvPr>
-        </p:nvSpPr>
-        <p:spPr/>
-        <p:txBody>
-          <a:bodyPr/>
-          <a:lstStyle/>
-          <a:p>
-            <a:r>
-              <a:rPr lang="en-US" dirty="0"/>
-              <a:t>(Rob: I’ve been saved more than once by trying to intentionally break my code and noticing that the test I expected to fail didn’t fail — this meant the test wasn’t checking what I expected it to!)</a:t>
-            </a:r>
-          </a:p>
-        </p:txBody>
-      </p:sp>
-      <p:sp>
-        <p:nvSpPr>
-          <p:cNvPr id="4" name="Slide Number Placeholder 3"/>
-          <p:cNvSpPr>
-            <a:spLocks noGrp="1"/>
-          </p:cNvSpPr>
-          <p:nvPr>
-            <p:ph type="sldNum" sz="quarter" idx="5"/>
-          </p:nvPr>
-        </p:nvSpPr>
-        <p:spPr/>
-        <p:txBody>
-          <a:bodyPr/>
-          <a:lstStyle/>
-          <a:p>
-            <a:fld id="{07937F07-1250-4CCE-B198-1B2887014F41}" type="slidenum">
-              <a:rPr lang="en-US" smtClean="0"/>
-              <a:t>27</a:t>
-            </a:fld>
-            <a:endParaRPr lang="en-US"/>
-          </a:p>
-        </p:txBody>
-      </p:sp>
-    </p:spTree>
-    <p:extLst>
-      <p:ext uri="{BB962C8B-B14F-4D97-AF65-F5344CB8AC3E}">
-        <p14:creationId xmlns:p14="http://schemas.microsoft.com/office/powerpoint/2010/main" val="3918090583"/>
       </p:ext>
     </p:extLst>
   </p:cSld>
@@ -2039,6 +2146,201 @@
         <p:cNvPr id="1" name="">
           <a:extLst>
             <a:ext uri="{FF2B5EF4-FFF2-40B4-BE49-F238E27FC236}">
+              <a16:creationId xmlns:a16="http://schemas.microsoft.com/office/drawing/2014/main" id="{81EB80F2-2C9B-12B8-0D16-5174A8CD943B}"/>
+            </a:ext>
+          </a:extLst>
+        </p:cNvPr>
+        <p:cNvGrpSpPr/>
+        <p:nvPr/>
+      </p:nvGrpSpPr>
+      <p:grpSpPr>
+        <a:xfrm>
+          <a:off x="0" y="0"/>
+          <a:ext cx="0" cy="0"/>
+          <a:chOff x="0" y="0"/>
+          <a:chExt cx="0" cy="0"/>
+        </a:xfrm>
+      </p:grpSpPr>
+      <p:sp>
+        <p:nvSpPr>
+          <p:cNvPr id="2" name="Slide Image Placeholder 1">
+            <a:extLst>
+              <a:ext uri="{FF2B5EF4-FFF2-40B4-BE49-F238E27FC236}">
+                <a16:creationId xmlns:a16="http://schemas.microsoft.com/office/drawing/2014/main" id="{394E6585-1A51-5728-B06A-4BA3DD6706A3}"/>
+              </a:ext>
+            </a:extLst>
+          </p:cNvPr>
+          <p:cNvSpPr>
+            <a:spLocks noGrp="1" noRot="1" noChangeAspect="1"/>
+          </p:cNvSpPr>
+          <p:nvPr>
+            <p:ph type="sldImg"/>
+          </p:nvPr>
+        </p:nvSpPr>
+        <p:spPr/>
+      </p:sp>
+      <p:sp>
+        <p:nvSpPr>
+          <p:cNvPr id="3" name="Notes Placeholder 2">
+            <a:extLst>
+              <a:ext uri="{FF2B5EF4-FFF2-40B4-BE49-F238E27FC236}">
+                <a16:creationId xmlns:a16="http://schemas.microsoft.com/office/drawing/2014/main" id="{F4B79137-AD76-D014-11A3-ED532727C702}"/>
+              </a:ext>
+            </a:extLst>
+          </p:cNvPr>
+          <p:cNvSpPr>
+            <a:spLocks noGrp="1"/>
+          </p:cNvSpPr>
+          <p:nvPr>
+            <p:ph type="body" idx="1"/>
+          </p:nvPr>
+        </p:nvSpPr>
+        <p:spPr/>
+        <p:txBody>
+          <a:bodyPr/>
+          <a:lstStyle/>
+          <a:p>
+            <a:endParaRPr lang="en-US" dirty="0"/>
+          </a:p>
+        </p:txBody>
+      </p:sp>
+      <p:sp>
+        <p:nvSpPr>
+          <p:cNvPr id="4" name="Slide Number Placeholder 3">
+            <a:extLst>
+              <a:ext uri="{FF2B5EF4-FFF2-40B4-BE49-F238E27FC236}">
+                <a16:creationId xmlns:a16="http://schemas.microsoft.com/office/drawing/2014/main" id="{805342C6-3369-7CC8-4388-FC3B2A34975A}"/>
+              </a:ext>
+            </a:extLst>
+          </p:cNvPr>
+          <p:cNvSpPr>
+            <a:spLocks noGrp="1"/>
+          </p:cNvSpPr>
+          <p:nvPr>
+            <p:ph type="sldNum" sz="quarter" idx="5"/>
+          </p:nvPr>
+        </p:nvSpPr>
+        <p:spPr/>
+        <p:txBody>
+          <a:bodyPr/>
+          <a:lstStyle/>
+          <a:p>
+            <a:fld id="{07937F07-1250-4CCE-B198-1B2887014F41}" type="slidenum">
+              <a:rPr lang="en-US" smtClean="0"/>
+              <a:t>27</a:t>
+            </a:fld>
+            <a:endParaRPr lang="en-US"/>
+          </a:p>
+        </p:txBody>
+      </p:sp>
+    </p:spTree>
+    <p:extLst>
+      <p:ext uri="{BB962C8B-B14F-4D97-AF65-F5344CB8AC3E}">
+        <p14:creationId xmlns:p14="http://schemas.microsoft.com/office/powerpoint/2010/main" val="2943393318"/>
+      </p:ext>
+    </p:extLst>
+  </p:cSld>
+  <p:clrMapOvr>
+    <a:masterClrMapping/>
+  </p:clrMapOvr>
+</p:notes>
+</file>
+
+<file path=ppt/notesSlides/notesSlide21.xml><?xml version="1.0" encoding="utf-8"?>
+<p:notes xmlns:a="http://schemas.openxmlformats.org/drawingml/2006/main" xmlns:r="http://schemas.openxmlformats.org/officeDocument/2006/relationships" xmlns:p="http://schemas.openxmlformats.org/presentationml/2006/main">
+  <p:cSld>
+    <p:spTree>
+      <p:nvGrpSpPr>
+        <p:cNvPr id="1" name=""/>
+        <p:cNvGrpSpPr/>
+        <p:nvPr/>
+      </p:nvGrpSpPr>
+      <p:grpSpPr>
+        <a:xfrm>
+          <a:off x="0" y="0"/>
+          <a:ext cx="0" cy="0"/>
+          <a:chOff x="0" y="0"/>
+          <a:chExt cx="0" cy="0"/>
+        </a:xfrm>
+      </p:grpSpPr>
+      <p:sp>
+        <p:nvSpPr>
+          <p:cNvPr id="2" name="Slide Image Placeholder 1"/>
+          <p:cNvSpPr>
+            <a:spLocks noGrp="1" noRot="1" noChangeAspect="1"/>
+          </p:cNvSpPr>
+          <p:nvPr>
+            <p:ph type="sldImg"/>
+          </p:nvPr>
+        </p:nvSpPr>
+        <p:spPr/>
+      </p:sp>
+      <p:sp>
+        <p:nvSpPr>
+          <p:cNvPr id="3" name="Notes Placeholder 2"/>
+          <p:cNvSpPr>
+            <a:spLocks noGrp="1"/>
+          </p:cNvSpPr>
+          <p:nvPr>
+            <p:ph type="body" idx="1"/>
+          </p:nvPr>
+        </p:nvSpPr>
+        <p:spPr/>
+        <p:txBody>
+          <a:bodyPr/>
+          <a:lstStyle/>
+          <a:p>
+            <a:r>
+              <a:rPr lang="en-US" dirty="0"/>
+              <a:t>(Rob: I’ve been saved more than once by trying to intentionally break my code and noticing that the test I expected to fail didn’t fail — this meant the test wasn’t checking what I expected it to!)</a:t>
+            </a:r>
+          </a:p>
+        </p:txBody>
+      </p:sp>
+      <p:sp>
+        <p:nvSpPr>
+          <p:cNvPr id="4" name="Slide Number Placeholder 3"/>
+          <p:cNvSpPr>
+            <a:spLocks noGrp="1"/>
+          </p:cNvSpPr>
+          <p:nvPr>
+            <p:ph type="sldNum" sz="quarter" idx="5"/>
+          </p:nvPr>
+        </p:nvSpPr>
+        <p:spPr/>
+        <p:txBody>
+          <a:bodyPr/>
+          <a:lstStyle/>
+          <a:p>
+            <a:fld id="{07937F07-1250-4CCE-B198-1B2887014F41}" type="slidenum">
+              <a:rPr lang="en-US" smtClean="0"/>
+              <a:t>29</a:t>
+            </a:fld>
+            <a:endParaRPr lang="en-US"/>
+          </a:p>
+        </p:txBody>
+      </p:sp>
+    </p:spTree>
+    <p:extLst>
+      <p:ext uri="{BB962C8B-B14F-4D97-AF65-F5344CB8AC3E}">
+        <p14:creationId xmlns:p14="http://schemas.microsoft.com/office/powerpoint/2010/main" val="3918090583"/>
+      </p:ext>
+    </p:extLst>
+  </p:cSld>
+  <p:clrMapOvr>
+    <a:masterClrMapping/>
+  </p:clrMapOvr>
+</p:notes>
+</file>
+
+<file path=ppt/notesSlides/notesSlide22.xml><?xml version="1.0" encoding="utf-8"?>
+<p:notes xmlns:a="http://schemas.openxmlformats.org/drawingml/2006/main" xmlns:r="http://schemas.openxmlformats.org/officeDocument/2006/relationships" xmlns:p="http://schemas.openxmlformats.org/presentationml/2006/main">
+  <p:cSld>
+    <p:spTree>
+      <p:nvGrpSpPr>
+        <p:cNvPr id="1" name="">
+          <a:extLst>
+            <a:ext uri="{FF2B5EF4-FFF2-40B4-BE49-F238E27FC236}">
               <a16:creationId xmlns:a16="http://schemas.microsoft.com/office/drawing/2014/main" id="{F5559C79-1D0E-6ABE-CDB6-D5D64400AD4C}"/>
             </a:ext>
           </a:extLst>
@@ -2156,7 +2458,7 @@
           <a:p>
             <a:fld id="{07937F07-1250-4CCE-B198-1B2887014F41}" type="slidenum">
               <a:rPr lang="en-US" smtClean="0"/>
-              <a:t>29</a:t>
+              <a:t>30</a:t>
             </a:fld>
             <a:endParaRPr lang="en-US"/>
           </a:p>
@@ -2175,7 +2477,7 @@
 </p:notes>
 </file>
 
-<file path=ppt/notesSlides/notesSlide21.xml><?xml version="1.0" encoding="utf-8"?>
+<file path=ppt/notesSlides/notesSlide23.xml><?xml version="1.0" encoding="utf-8"?>
 <p:notes xmlns:a="http://schemas.openxmlformats.org/drawingml/2006/main" xmlns:r="http://schemas.openxmlformats.org/officeDocument/2006/relationships" xmlns:p="http://schemas.openxmlformats.org/presentationml/2006/main">
   <p:cSld>
     <p:spTree>
@@ -2267,7 +2569,7 @@
           <a:p>
             <a:fld id="{07937F07-1250-4CCE-B198-1B2887014F41}" type="slidenum">
               <a:rPr lang="en-US" smtClean="0"/>
-              <a:t>30</a:t>
+              <a:t>31</a:t>
             </a:fld>
             <a:endParaRPr lang="en-US"/>
           </a:p>
@@ -2286,7 +2588,7 @@
 </p:notes>
 </file>
 
-<file path=ppt/notesSlides/notesSlide22.xml><?xml version="1.0" encoding="utf-8"?>
+<file path=ppt/notesSlides/notesSlide24.xml><?xml version="1.0" encoding="utf-8"?>
 <p:notes xmlns:a="http://schemas.openxmlformats.org/drawingml/2006/main" xmlns:r="http://schemas.openxmlformats.org/officeDocument/2006/relationships" xmlns:p="http://schemas.openxmlformats.org/presentationml/2006/main">
   <p:cSld>
     <p:spTree>
@@ -2411,144 +2713,6 @@
     <p:extLst>
       <p:ext uri="{BB962C8B-B14F-4D97-AF65-F5344CB8AC3E}">
         <p14:creationId xmlns:p14="http://schemas.microsoft.com/office/powerpoint/2010/main" val="3023119614"/>
-      </p:ext>
-    </p:extLst>
-  </p:cSld>
-  <p:clrMapOvr>
-    <a:masterClrMapping/>
-  </p:clrMapOvr>
-</p:notes>
-</file>
-
-<file path=ppt/notesSlides/notesSlide23.xml><?xml version="1.0" encoding="utf-8"?>
-<p:notes xmlns:a="http://schemas.openxmlformats.org/drawingml/2006/main" xmlns:r="http://schemas.openxmlformats.org/officeDocument/2006/relationships" xmlns:p="http://schemas.openxmlformats.org/presentationml/2006/main">
-  <p:cSld>
-    <p:spTree>
-      <p:nvGrpSpPr>
-        <p:cNvPr id="1" name=""/>
-        <p:cNvGrpSpPr/>
-        <p:nvPr/>
-      </p:nvGrpSpPr>
-      <p:grpSpPr>
-        <a:xfrm>
-          <a:off x="0" y="0"/>
-          <a:ext cx="0" cy="0"/>
-          <a:chOff x="0" y="0"/>
-          <a:chExt cx="0" cy="0"/>
-        </a:xfrm>
-      </p:grpSpPr>
-      <p:sp>
-        <p:nvSpPr>
-          <p:cNvPr id="2" name="Slide Image Placeholder 1"/>
-          <p:cNvSpPr>
-            <a:spLocks noGrp="1" noRot="1" noChangeAspect="1"/>
-          </p:cNvSpPr>
-          <p:nvPr>
-            <p:ph type="sldImg"/>
-          </p:nvPr>
-        </p:nvSpPr>
-        <p:spPr>
-          <a:xfrm>
-            <a:off x="381000" y="685800"/>
-            <a:ext cx="6096000" cy="3429000"/>
-          </a:xfrm>
-        </p:spPr>
-      </p:sp>
-      <p:sp>
-        <p:nvSpPr>
-          <p:cNvPr id="3" name="Notes Placeholder 2"/>
-          <p:cNvSpPr>
-            <a:spLocks noGrp="1"/>
-          </p:cNvSpPr>
-          <p:nvPr>
-            <p:ph type="body" idx="1"/>
-          </p:nvPr>
-        </p:nvSpPr>
-        <p:spPr/>
-        <p:txBody>
-          <a:bodyPr/>
-          <a:lstStyle/>
-          <a:p>
-            <a:r>
-              <a:rPr lang="en-US" dirty="0"/>
-              <a:t>&lt;read slide&gt;</a:t>
-            </a:r>
-          </a:p>
-        </p:txBody>
-      </p:sp>
-    </p:spTree>
-    <p:extLst>
-      <p:ext uri="{BB962C8B-B14F-4D97-AF65-F5344CB8AC3E}">
-        <p14:creationId xmlns:p14="http://schemas.microsoft.com/office/powerpoint/2010/main" val="682520724"/>
-      </p:ext>
-    </p:extLst>
-  </p:cSld>
-  <p:clrMapOvr>
-    <a:masterClrMapping/>
-  </p:clrMapOvr>
-</p:notes>
-</file>
-
-<file path=ppt/notesSlides/notesSlide24.xml><?xml version="1.0" encoding="utf-8"?>
-<p:notes xmlns:a="http://schemas.openxmlformats.org/drawingml/2006/main" xmlns:r="http://schemas.openxmlformats.org/officeDocument/2006/relationships" xmlns:p="http://schemas.openxmlformats.org/presentationml/2006/main">
-  <p:cSld>
-    <p:spTree>
-      <p:nvGrpSpPr>
-        <p:cNvPr id="1" name=""/>
-        <p:cNvGrpSpPr/>
-        <p:nvPr/>
-      </p:nvGrpSpPr>
-      <p:grpSpPr>
-        <a:xfrm>
-          <a:off x="0" y="0"/>
-          <a:ext cx="0" cy="0"/>
-          <a:chOff x="0" y="0"/>
-          <a:chExt cx="0" cy="0"/>
-        </a:xfrm>
-      </p:grpSpPr>
-      <p:sp>
-        <p:nvSpPr>
-          <p:cNvPr id="2" name="Slide Image Placeholder 1"/>
-          <p:cNvSpPr>
-            <a:spLocks noGrp="1" noRot="1" noChangeAspect="1"/>
-          </p:cNvSpPr>
-          <p:nvPr>
-            <p:ph type="sldImg"/>
-          </p:nvPr>
-        </p:nvSpPr>
-        <p:spPr>
-          <a:xfrm>
-            <a:off x="381000" y="685800"/>
-            <a:ext cx="6096000" cy="3429000"/>
-          </a:xfrm>
-        </p:spPr>
-      </p:sp>
-      <p:sp>
-        <p:nvSpPr>
-          <p:cNvPr id="3" name="Notes Placeholder 2"/>
-          <p:cNvSpPr>
-            <a:spLocks noGrp="1"/>
-          </p:cNvSpPr>
-          <p:nvPr>
-            <p:ph type="body" idx="1"/>
-          </p:nvPr>
-        </p:nvSpPr>
-        <p:spPr/>
-        <p:txBody>
-          <a:bodyPr/>
-          <a:lstStyle/>
-          <a:p>
-            <a:r>
-              <a:rPr lang="en-US" dirty="0"/>
-              <a:t>Let's look at a tiny example. &lt;Read Slide&gt; Next, let's look at the Stryker report for this example.</a:t>
-            </a:r>
-          </a:p>
-        </p:txBody>
-      </p:sp>
-    </p:spTree>
-    <p:extLst>
-      <p:ext uri="{BB962C8B-B14F-4D97-AF65-F5344CB8AC3E}">
-        <p14:creationId xmlns:p14="http://schemas.microsoft.com/office/powerpoint/2010/main" val="1442141339"/>
       </p:ext>
     </p:extLst>
   </p:cSld>
@@ -2609,27 +2773,15 @@
           <a:p>
             <a:r>
               <a:rPr lang="en-US" dirty="0"/>
-              <a:t>Here is the actual Stryker report for my initial set of tests.  (There was actually only one test in my suite, but that doesn't make a difference)</a:t>
-            </a:r>
-          </a:p>
-          <a:p>
-            <a:endParaRPr lang="en-US" dirty="0"/>
-          </a:p>
-          <a:p>
-            <a:r>
-              <a:rPr lang="en-US" dirty="0"/>
-              <a:t>Let's look at each of these mutants in turn.  Point out: the location of the mutation; the titles of the test(s) that covered this location (in this case, there was only one test, so they are both the same).</a:t>
-            </a:r>
-          </a:p>
-          <a:p>
-            <a:endParaRPr lang="en-US" dirty="0"/>
+              <a:t>&lt;read slide&gt;</a:t>
+            </a:r>
           </a:p>
         </p:txBody>
       </p:sp>
     </p:spTree>
     <p:extLst>
       <p:ext uri="{BB962C8B-B14F-4D97-AF65-F5344CB8AC3E}">
-        <p14:creationId xmlns:p14="http://schemas.microsoft.com/office/powerpoint/2010/main" val="4157729365"/>
+        <p14:creationId xmlns:p14="http://schemas.microsoft.com/office/powerpoint/2010/main" val="682520724"/>
       </p:ext>
     </p:extLst>
   </p:cSld>
@@ -2690,22 +2842,7 @@
           <a:p>
             <a:r>
               <a:rPr lang="en-US" dirty="0"/>
-              <a:t>When do these code fragments behave differently?  How could we give the program an input that makes the mutant fail?.</a:t>
-            </a:r>
-          </a:p>
-          <a:p>
-            <a:r>
-              <a:rPr lang="en-US" dirty="0"/>
-              <a:t>Discuss.</a:t>
-            </a:r>
-          </a:p>
-          <a:p>
-            <a:endParaRPr lang="en-US" dirty="0"/>
-          </a:p>
-          <a:p>
-            <a:r>
-              <a:rPr lang="en-US" dirty="0"/>
-              <a:t>Ans: the mutant always returns the first element of the list.   You could distinguish them by giving an input that should return some other element of the list</a:t>
+              <a:t>Let's look at a tiny example. &lt;Read Slide&gt; Next, let's look at the Stryker report for this example.</a:t>
             </a:r>
           </a:p>
         </p:txBody>
@@ -2713,7 +2850,7 @@
     </p:spTree>
     <p:extLst>
       <p:ext uri="{BB962C8B-B14F-4D97-AF65-F5344CB8AC3E}">
-        <p14:creationId xmlns:p14="http://schemas.microsoft.com/office/powerpoint/2010/main" val="445764883"/>
+        <p14:creationId xmlns:p14="http://schemas.microsoft.com/office/powerpoint/2010/main" val="1442141339"/>
       </p:ext>
     </p:extLst>
   </p:cSld>
@@ -2774,7 +2911,7 @@
           <a:p>
             <a:r>
               <a:rPr lang="en-US" dirty="0"/>
-              <a:t>Under what conditions will these two program fragments behave differently?  How could we write a test to create those conditions? </a:t>
+              <a:t>Here is the actual Stryker report for my initial set of tests.  (There was actually only one test in my suite, but that doesn't make a difference)</a:t>
             </a:r>
           </a:p>
           <a:p>
@@ -2783,24 +2920,18 @@
           <a:p>
             <a:r>
               <a:rPr lang="en-US" dirty="0"/>
-              <a:t>DISCUSS.</a:t>
+              <a:t>Let's look at each of these mutants in turn.  Point out: the location of the mutation; the titles of the test(s) that covered this location (in this case, there was only one test, so they are both the same).</a:t>
             </a:r>
           </a:p>
           <a:p>
             <a:endParaRPr lang="en-US" dirty="0"/>
-          </a:p>
-          <a:p>
-            <a:r>
-              <a:rPr lang="en-US" dirty="0"/>
-              <a:t>ANS: if the target is equal to one of the list items, the second one will keep going and return a different one.</a:t>
-            </a:r>
           </a:p>
         </p:txBody>
       </p:sp>
     </p:spTree>
     <p:extLst>
       <p:ext uri="{BB962C8B-B14F-4D97-AF65-F5344CB8AC3E}">
-        <p14:creationId xmlns:p14="http://schemas.microsoft.com/office/powerpoint/2010/main" val="169051177"/>
+        <p14:creationId xmlns:p14="http://schemas.microsoft.com/office/powerpoint/2010/main" val="4157729365"/>
       </p:ext>
     </p:extLst>
   </p:cSld>
@@ -2861,7 +2992,22 @@
           <a:p>
             <a:r>
               <a:rPr lang="en-US" dirty="0"/>
-              <a:t>We've made the mutant fail, but our correct program succeeds.</a:t>
+              <a:t>When do these code fragments behave differently?  How could we give the program an input that makes the mutant fail?.</a:t>
+            </a:r>
+          </a:p>
+          <a:p>
+            <a:r>
+              <a:rPr lang="en-US" dirty="0"/>
+              <a:t>Discuss.</a:t>
+            </a:r>
+          </a:p>
+          <a:p>
+            <a:endParaRPr lang="en-US" dirty="0"/>
+          </a:p>
+          <a:p>
+            <a:r>
+              <a:rPr lang="en-US" dirty="0"/>
+              <a:t>Ans: the mutant always returns the first element of the list.   You could distinguish them by giving an input that should return some other element of the list</a:t>
             </a:r>
           </a:p>
         </p:txBody>
@@ -2869,7 +3015,7 @@
     </p:spTree>
     <p:extLst>
       <p:ext uri="{BB962C8B-B14F-4D97-AF65-F5344CB8AC3E}">
-        <p14:creationId xmlns:p14="http://schemas.microsoft.com/office/powerpoint/2010/main" val="346233588"/>
+        <p14:creationId xmlns:p14="http://schemas.microsoft.com/office/powerpoint/2010/main" val="445764883"/>
       </p:ext>
     </p:extLst>
   </p:cSld>
@@ -2930,7 +3076,7 @@
           <a:p>
             <a:r>
               <a:rPr lang="en-US" dirty="0"/>
-              <a:t>Mutation analysis helps us improve our tests as we write them, because it shows us changes to our code (potential bugs!) that our tests do not detect. Remember, that to “detect” a mutant means that at least one test  in your test suite fails when run on the mutated code.</a:t>
+              <a:t>Under what conditions will these two program fragments behave differently?  How could we write a test to create those conditions? </a:t>
             </a:r>
           </a:p>
           <a:p>
@@ -2939,48 +3085,24 @@
           <a:p>
             <a:r>
               <a:rPr lang="en-US" dirty="0"/>
-              <a:t>Stryker actually reports both in plain text form, as we showed before, and as a handy html page.   Here is a piece of the html report, running on an 'overlaps' method from </a:t>
-            </a:r>
-            <a:r>
-              <a:rPr lang="en-US" dirty="0" err="1"/>
-              <a:t>Covey.town</a:t>
-            </a:r>
+              <a:t>DISCUSS.</a:t>
+            </a:r>
+          </a:p>
+          <a:p>
+            <a:endParaRPr lang="en-US" dirty="0"/>
+          </a:p>
+          <a:p>
             <a:r>
               <a:rPr lang="en-US" dirty="0"/>
-              <a:t> (our project from last year). In this screenshot, we can see an undetected mutant, on line 137. The red highlighting (with the minus sign) shows how the line was before the mutation, and the green highlighting (with the plus sign) shows the line after the mutation. In this case, the mutation was to replace a &gt;= with a &gt; sign. </a:t>
-            </a:r>
-          </a:p>
-          <a:p>
-            <a:endParaRPr lang="en-US" dirty="0"/>
-          </a:p>
-          <a:p>
-            <a:r>
-              <a:rPr lang="en-US" dirty="0"/>
-              <a:t>There is also an undetected mutation on line 138, but it is not expanded (the red dot). When working through the report, you'll see them a single mutant at a time (because that’s what was run – one mutant at a time).</a:t>
-            </a:r>
-          </a:p>
-          <a:p>
-            <a:endParaRPr lang="en-US" dirty="0"/>
-          </a:p>
-          <a:p>
-            <a:r>
-              <a:rPr lang="en-US" dirty="0"/>
-              <a:t>Was this a bug?  I don't know, because I don't have enough context to decide </a:t>
-            </a:r>
-            <a:r>
-              <a:rPr lang="en-US" dirty="0">
-                <a:sym typeface="Wingdings" panose="05000000000000000000" pitchFamily="2" charset="2"/>
-              </a:rPr>
-              <a:t>.  But when you are running Stryker, you *will* know the context.</a:t>
-            </a:r>
-            <a:endParaRPr lang="en-US" dirty="0"/>
+              <a:t>ANS: if the target is equal to one of the list items, the second one will keep going and return a different one.</a:t>
+            </a:r>
           </a:p>
         </p:txBody>
       </p:sp>
     </p:spTree>
     <p:extLst>
       <p:ext uri="{BB962C8B-B14F-4D97-AF65-F5344CB8AC3E}">
-        <p14:creationId xmlns:p14="http://schemas.microsoft.com/office/powerpoint/2010/main" val="421312046"/>
+        <p14:creationId xmlns:p14="http://schemas.microsoft.com/office/powerpoint/2010/main" val="169051177"/>
       </p:ext>
     </p:extLst>
   </p:cSld>
@@ -3160,13 +3282,7 @@
   <p:cSld>
     <p:spTree>
       <p:nvGrpSpPr>
-        <p:cNvPr id="1" name="">
-          <a:extLst>
-            <a:ext uri="{FF2B5EF4-FFF2-40B4-BE49-F238E27FC236}">
-              <a16:creationId xmlns:a16="http://schemas.microsoft.com/office/drawing/2014/main" id="{94105A32-CF27-6208-B335-532EE2A1F371}"/>
-            </a:ext>
-          </a:extLst>
-        </p:cNvPr>
+        <p:cNvPr id="1" name=""/>
         <p:cNvGrpSpPr/>
         <p:nvPr/>
       </p:nvGrpSpPr>
@@ -3180,13 +3296,7 @@
       </p:grpSpPr>
       <p:sp>
         <p:nvSpPr>
-          <p:cNvPr id="834" name="Shape 834">
-            <a:extLst>
-              <a:ext uri="{FF2B5EF4-FFF2-40B4-BE49-F238E27FC236}">
-                <a16:creationId xmlns:a16="http://schemas.microsoft.com/office/drawing/2014/main" id="{AF7354D2-CBDA-E105-4FAE-71A74BF56188}"/>
-              </a:ext>
-            </a:extLst>
-          </p:cNvPr>
+          <p:cNvPr id="2" name="Slide Image Placeholder 1"/>
           <p:cNvSpPr>
             <a:spLocks noGrp="1" noRot="1" noChangeAspect="1"/>
           </p:cNvSpPr>
@@ -3199,97 +3309,26 @@
             <a:off x="381000" y="685800"/>
             <a:ext cx="6096000" cy="3429000"/>
           </a:xfrm>
-          <a:prstGeom prst="rect">
-            <a:avLst/>
-          </a:prstGeom>
         </p:spPr>
-        <p:txBody>
-          <a:bodyPr/>
-          <a:lstStyle/>
-          <a:p>
-            <a:endParaRPr/>
-          </a:p>
-        </p:txBody>
       </p:sp>
       <p:sp>
         <p:nvSpPr>
-          <p:cNvPr id="835" name="Shape 835">
-            <a:extLst>
-              <a:ext uri="{FF2B5EF4-FFF2-40B4-BE49-F238E27FC236}">
-                <a16:creationId xmlns:a16="http://schemas.microsoft.com/office/drawing/2014/main" id="{A2E9D587-82F1-3A4C-DC13-B23C2340E902}"/>
-              </a:ext>
-            </a:extLst>
-          </p:cNvPr>
+          <p:cNvPr id="3" name="Notes Placeholder 2"/>
           <p:cNvSpPr>
             <a:spLocks noGrp="1"/>
           </p:cNvSpPr>
           <p:nvPr>
-            <p:ph type="body" sz="quarter" idx="1"/>
+            <p:ph type="body" idx="1"/>
           </p:nvPr>
         </p:nvSpPr>
-        <p:spPr>
-          <a:prstGeom prst="rect">
-            <a:avLst/>
-          </a:prstGeom>
-        </p:spPr>
+        <p:spPr/>
         <p:txBody>
           <a:bodyPr/>
           <a:lstStyle/>
           <a:p>
             <a:r>
               <a:rPr lang="en-US" dirty="0"/>
-              <a:t>Adversarial testing is a game, and sometimes your adversary loses the game because the “mutant” isn’t a bug.</a:t>
-            </a:r>
-          </a:p>
-          <a:p>
-            <a:endParaRPr lang="en-US" dirty="0"/>
-          </a:p>
-          <a:p>
-            <a:r>
-              <a:rPr lang="en-US" dirty="0"/>
-              <a:t>If the spec is just “throw an error if the width or height is nonzero” then this change is fine.</a:t>
-            </a:r>
-          </a:p>
-          <a:p>
-            <a:endParaRPr lang="en-US" dirty="0"/>
-          </a:p>
-          <a:p>
-            <a:r>
-              <a:rPr lang="en-US" dirty="0"/>
-              <a:t>This is related to a real problem with tests: they can be </a:t>
-            </a:r>
-            <a:r>
-              <a:rPr lang="en-US" i="1" dirty="0"/>
-              <a:t>overspecified</a:t>
-            </a:r>
-            <a:r>
-              <a:rPr lang="en-US" i="0" dirty="0"/>
-              <a:t>, and can test properties of your program you don’t actually care about. In the Tic-Tac-Toe example in your homework, the tests have to be carefully written, because it doesn’t matter whether you describe a winning line as ([[0,0], [1,1], [2,2]]) or ([[1,1], [0,0], [2,2]]).</a:t>
-            </a:r>
-          </a:p>
-          <a:p>
-            <a:endParaRPr lang="en-US" i="0" dirty="0"/>
-          </a:p>
-          <a:p>
-            <a:r>
-              <a:rPr lang="en-US" i="0" dirty="0"/>
-              <a:t>Overly-specific tests aren’t generally a huge problem, but they can lead to </a:t>
-            </a:r>
-            <a:r>
-              <a:rPr lang="en-US" i="1" dirty="0"/>
-              <a:t>flaky </a:t>
-            </a:r>
-            <a:r>
-              <a:rPr lang="en-US" i="0" dirty="0"/>
-              <a:t>tests — imagine a tic-tac-toe program has randomness, and </a:t>
-            </a:r>
-            <a:r>
-              <a:rPr lang="en-US" i="1" dirty="0"/>
-              <a:t>some of the time</a:t>
-            </a:r>
-            <a:r>
-              <a:rPr lang="en-US" i="0" dirty="0"/>
-              <a:t> it reports solutions in a different order, so your fail… some of the time. (We’ll return to this idea in a later lecture.)</a:t>
+              <a:t>We've made the mutant fail, but our correct program succeeds.</a:t>
             </a:r>
           </a:p>
         </p:txBody>
@@ -3297,7 +3336,7 @@
     </p:spTree>
     <p:extLst>
       <p:ext uri="{BB962C8B-B14F-4D97-AF65-F5344CB8AC3E}">
-        <p14:creationId xmlns:p14="http://schemas.microsoft.com/office/powerpoint/2010/main" val="3105923274"/>
+        <p14:creationId xmlns:p14="http://schemas.microsoft.com/office/powerpoint/2010/main" val="346233588"/>
       </p:ext>
     </p:extLst>
   </p:cSld>
@@ -3358,6 +3397,269 @@
           <a:p>
             <a:r>
               <a:rPr lang="en-US" dirty="0"/>
+              <a:t>Mutation analysis helps us improve our tests as we write them, because it shows us changes to our code (potential bugs!) that our tests do not detect. Remember, that to “detect” a mutant means that at least one test  in your test suite fails when run on the mutated code.</a:t>
+            </a:r>
+          </a:p>
+          <a:p>
+            <a:endParaRPr lang="en-US" dirty="0"/>
+          </a:p>
+          <a:p>
+            <a:r>
+              <a:rPr lang="en-US" dirty="0"/>
+              <a:t>Stryker actually reports both in plain text form, as we showed before, and as a handy html page.   Here is a piece of the html report, running on an 'overlaps' method from </a:t>
+            </a:r>
+            <a:r>
+              <a:rPr lang="en-US" dirty="0" err="1"/>
+              <a:t>Covey.town</a:t>
+            </a:r>
+            <a:r>
+              <a:rPr lang="en-US" dirty="0"/>
+              <a:t> (our project from last year). In this screenshot, we can see an undetected mutant, on line 137. The red highlighting (with the minus sign) shows how the line was before the mutation, and the green highlighting (with the plus sign) shows the line after the mutation. In this case, the mutation was to replace a &gt;= with a &gt; sign. </a:t>
+            </a:r>
+          </a:p>
+          <a:p>
+            <a:endParaRPr lang="en-US" dirty="0"/>
+          </a:p>
+          <a:p>
+            <a:r>
+              <a:rPr lang="en-US" dirty="0"/>
+              <a:t>There is also an undetected mutation on line 138, but it is not expanded (the red dot). When working through the report, you'll see them a single mutant at a time (because that’s what was run – one mutant at a time).</a:t>
+            </a:r>
+          </a:p>
+          <a:p>
+            <a:endParaRPr lang="en-US" dirty="0"/>
+          </a:p>
+          <a:p>
+            <a:r>
+              <a:rPr lang="en-US" dirty="0"/>
+              <a:t>Was this a bug?  I don't know, because I don't have enough context to decide </a:t>
+            </a:r>
+            <a:r>
+              <a:rPr lang="en-US" dirty="0">
+                <a:sym typeface="Wingdings" panose="05000000000000000000" pitchFamily="2" charset="2"/>
+              </a:rPr>
+              <a:t>.  But when you are running Stryker, you *will* know the context.</a:t>
+            </a:r>
+            <a:endParaRPr lang="en-US" dirty="0"/>
+          </a:p>
+        </p:txBody>
+      </p:sp>
+    </p:spTree>
+    <p:extLst>
+      <p:ext uri="{BB962C8B-B14F-4D97-AF65-F5344CB8AC3E}">
+        <p14:creationId xmlns:p14="http://schemas.microsoft.com/office/powerpoint/2010/main" val="421312046"/>
+      </p:ext>
+    </p:extLst>
+  </p:cSld>
+  <p:clrMapOvr>
+    <a:masterClrMapping/>
+  </p:clrMapOvr>
+</p:notes>
+</file>
+
+<file path=ppt/notesSlides/notesSlide32.xml><?xml version="1.0" encoding="utf-8"?>
+<p:notes xmlns:a="http://schemas.openxmlformats.org/drawingml/2006/main" xmlns:r="http://schemas.openxmlformats.org/officeDocument/2006/relationships" xmlns:p="http://schemas.openxmlformats.org/presentationml/2006/main">
+  <p:cSld>
+    <p:spTree>
+      <p:nvGrpSpPr>
+        <p:cNvPr id="1" name="">
+          <a:extLst>
+            <a:ext uri="{FF2B5EF4-FFF2-40B4-BE49-F238E27FC236}">
+              <a16:creationId xmlns:a16="http://schemas.microsoft.com/office/drawing/2014/main" id="{94105A32-CF27-6208-B335-532EE2A1F371}"/>
+            </a:ext>
+          </a:extLst>
+        </p:cNvPr>
+        <p:cNvGrpSpPr/>
+        <p:nvPr/>
+      </p:nvGrpSpPr>
+      <p:grpSpPr>
+        <a:xfrm>
+          <a:off x="0" y="0"/>
+          <a:ext cx="0" cy="0"/>
+          <a:chOff x="0" y="0"/>
+          <a:chExt cx="0" cy="0"/>
+        </a:xfrm>
+      </p:grpSpPr>
+      <p:sp>
+        <p:nvSpPr>
+          <p:cNvPr id="834" name="Shape 834">
+            <a:extLst>
+              <a:ext uri="{FF2B5EF4-FFF2-40B4-BE49-F238E27FC236}">
+                <a16:creationId xmlns:a16="http://schemas.microsoft.com/office/drawing/2014/main" id="{AF7354D2-CBDA-E105-4FAE-71A74BF56188}"/>
+              </a:ext>
+            </a:extLst>
+          </p:cNvPr>
+          <p:cNvSpPr>
+            <a:spLocks noGrp="1" noRot="1" noChangeAspect="1"/>
+          </p:cNvSpPr>
+          <p:nvPr>
+            <p:ph type="sldImg"/>
+          </p:nvPr>
+        </p:nvSpPr>
+        <p:spPr>
+          <a:xfrm>
+            <a:off x="381000" y="685800"/>
+            <a:ext cx="6096000" cy="3429000"/>
+          </a:xfrm>
+          <a:prstGeom prst="rect">
+            <a:avLst/>
+          </a:prstGeom>
+        </p:spPr>
+        <p:txBody>
+          <a:bodyPr/>
+          <a:lstStyle/>
+          <a:p>
+            <a:endParaRPr/>
+          </a:p>
+        </p:txBody>
+      </p:sp>
+      <p:sp>
+        <p:nvSpPr>
+          <p:cNvPr id="835" name="Shape 835">
+            <a:extLst>
+              <a:ext uri="{FF2B5EF4-FFF2-40B4-BE49-F238E27FC236}">
+                <a16:creationId xmlns:a16="http://schemas.microsoft.com/office/drawing/2014/main" id="{A2E9D587-82F1-3A4C-DC13-B23C2340E902}"/>
+              </a:ext>
+            </a:extLst>
+          </p:cNvPr>
+          <p:cNvSpPr>
+            <a:spLocks noGrp="1"/>
+          </p:cNvSpPr>
+          <p:nvPr>
+            <p:ph type="body" sz="quarter" idx="1"/>
+          </p:nvPr>
+        </p:nvSpPr>
+        <p:spPr>
+          <a:prstGeom prst="rect">
+            <a:avLst/>
+          </a:prstGeom>
+        </p:spPr>
+        <p:txBody>
+          <a:bodyPr/>
+          <a:lstStyle/>
+          <a:p>
+            <a:r>
+              <a:rPr lang="en-US" dirty="0"/>
+              <a:t>Adversarial testing is a game, and sometimes your adversary loses the game because the “mutant” isn’t a bug.</a:t>
+            </a:r>
+          </a:p>
+          <a:p>
+            <a:endParaRPr lang="en-US" dirty="0"/>
+          </a:p>
+          <a:p>
+            <a:r>
+              <a:rPr lang="en-US" dirty="0"/>
+              <a:t>If the spec is just “throw an error if the width or height is nonzero” then this change is fine.</a:t>
+            </a:r>
+          </a:p>
+          <a:p>
+            <a:endParaRPr lang="en-US" dirty="0"/>
+          </a:p>
+          <a:p>
+            <a:r>
+              <a:rPr lang="en-US" dirty="0"/>
+              <a:t>This is related to a real problem with tests: they can be </a:t>
+            </a:r>
+            <a:r>
+              <a:rPr lang="en-US" i="1" dirty="0"/>
+              <a:t>overspecified</a:t>
+            </a:r>
+            <a:r>
+              <a:rPr lang="en-US" i="0" dirty="0"/>
+              <a:t>, and can test properties of your program you don’t actually care about. In the Tic-Tac-Toe example in your homework, the tests have to be carefully written, because it doesn’t matter whether you describe a winning line as ([[0,0], [1,1], [2,2]]) or ([[1,1], [0,0], [2,2]]).</a:t>
+            </a:r>
+          </a:p>
+          <a:p>
+            <a:endParaRPr lang="en-US" i="0" dirty="0"/>
+          </a:p>
+          <a:p>
+            <a:r>
+              <a:rPr lang="en-US" i="0" dirty="0"/>
+              <a:t>Overly-specific tests aren’t generally a huge problem, but they can lead to </a:t>
+            </a:r>
+            <a:r>
+              <a:rPr lang="en-US" i="1" dirty="0"/>
+              <a:t>flaky </a:t>
+            </a:r>
+            <a:r>
+              <a:rPr lang="en-US" i="0" dirty="0"/>
+              <a:t>tests — imagine a tic-tac-toe program has randomness, and </a:t>
+            </a:r>
+            <a:r>
+              <a:rPr lang="en-US" i="1" dirty="0"/>
+              <a:t>some of the time</a:t>
+            </a:r>
+            <a:r>
+              <a:rPr lang="en-US" i="0" dirty="0"/>
+              <a:t> it reports solutions in a different order, so your fail… some of the time. (We’ll return to this idea in a later lecture.)</a:t>
+            </a:r>
+          </a:p>
+        </p:txBody>
+      </p:sp>
+    </p:spTree>
+    <p:extLst>
+      <p:ext uri="{BB962C8B-B14F-4D97-AF65-F5344CB8AC3E}">
+        <p14:creationId xmlns:p14="http://schemas.microsoft.com/office/powerpoint/2010/main" val="3105923274"/>
+      </p:ext>
+    </p:extLst>
+  </p:cSld>
+  <p:clrMapOvr>
+    <a:masterClrMapping/>
+  </p:clrMapOvr>
+</p:notes>
+</file>
+
+<file path=ppt/notesSlides/notesSlide33.xml><?xml version="1.0" encoding="utf-8"?>
+<p:notes xmlns:a="http://schemas.openxmlformats.org/drawingml/2006/main" xmlns:r="http://schemas.openxmlformats.org/officeDocument/2006/relationships" xmlns:p="http://schemas.openxmlformats.org/presentationml/2006/main">
+  <p:cSld>
+    <p:spTree>
+      <p:nvGrpSpPr>
+        <p:cNvPr id="1" name=""/>
+        <p:cNvGrpSpPr/>
+        <p:nvPr/>
+      </p:nvGrpSpPr>
+      <p:grpSpPr>
+        <a:xfrm>
+          <a:off x="0" y="0"/>
+          <a:ext cx="0" cy="0"/>
+          <a:chOff x="0" y="0"/>
+          <a:chExt cx="0" cy="0"/>
+        </a:xfrm>
+      </p:grpSpPr>
+      <p:sp>
+        <p:nvSpPr>
+          <p:cNvPr id="2" name="Slide Image Placeholder 1"/>
+          <p:cNvSpPr>
+            <a:spLocks noGrp="1" noRot="1" noChangeAspect="1"/>
+          </p:cNvSpPr>
+          <p:nvPr>
+            <p:ph type="sldImg"/>
+          </p:nvPr>
+        </p:nvSpPr>
+        <p:spPr>
+          <a:xfrm>
+            <a:off x="381000" y="685800"/>
+            <a:ext cx="6096000" cy="3429000"/>
+          </a:xfrm>
+        </p:spPr>
+      </p:sp>
+      <p:sp>
+        <p:nvSpPr>
+          <p:cNvPr id="3" name="Notes Placeholder 2"/>
+          <p:cNvSpPr>
+            <a:spLocks noGrp="1"/>
+          </p:cNvSpPr>
+          <p:nvPr>
+            <p:ph type="body" idx="1"/>
+          </p:nvPr>
+        </p:nvSpPr>
+        <p:spPr/>
+        <p:txBody>
+          <a:bodyPr/>
+          <a:lstStyle/>
+          <a:p>
+            <a:r>
+              <a:rPr lang="en-US" dirty="0"/>
               <a:t>You might look at these mutants, which are caused by such simple operations, and wonder: but do these one-line mutations really represent the kinds of bugs that occur in real software? Because ultimately, that is what we are looking to evaluate, right? Do our tests find real bugs?</a:t>
             </a:r>
           </a:p>
@@ -3385,7 +3687,7 @@
 </p:notes>
 </file>
 
-<file path=ppt/notesSlides/notesSlide32.xml><?xml version="1.0" encoding="utf-8"?>
+<file path=ppt/notesSlides/notesSlide34.xml><?xml version="1.0" encoding="utf-8"?>
 <p:notes xmlns:a="http://schemas.openxmlformats.org/drawingml/2006/main" xmlns:r="http://schemas.openxmlformats.org/officeDocument/2006/relationships" xmlns:p="http://schemas.openxmlformats.org/presentationml/2006/main">
   <p:cSld>
     <p:spTree>
@@ -3542,7 +3844,7 @@
                 <a:tabLst/>
                 <a:defRPr/>
               </a:pPr>
-              <a:t>43</a:t>
+              <a:t>44</a:t>
             </a:fld>
             <a:endParaRPr kumimoji="0" lang="en-US" sz="1200" b="0" i="0" u="none" strike="noStrike" kern="1200" cap="none" spc="0" normalizeH="0" baseline="0" noProof="0">
               <a:ln>
@@ -4895,7 +5197,7 @@
           <a:p>
             <a:fld id="{5D2A64DE-480B-420F-9649-4F8E696E08E0}" type="datetime1">
               <a:rPr lang="en-US" smtClean="0"/>
-              <a:t>9/11/2026</a:t>
+              <a:t>9/16/2026</a:t>
             </a:fld>
             <a:endParaRPr lang="en-US"/>
           </a:p>
@@ -5219,7 +5521,7 @@
           <a:p>
             <a:fld id="{EA476A42-A091-4468-A075-64A31BE59948}" type="datetime1">
               <a:rPr lang="en-US" smtClean="0"/>
-              <a:t>9/11/2026</a:t>
+              <a:t>9/16/2026</a:t>
             </a:fld>
             <a:endParaRPr lang="en-US"/>
           </a:p>
@@ -5417,7 +5719,7 @@
           <a:p>
             <a:fld id="{0D3616D0-8311-4107-9726-6B805E7D05BA}" type="datetime1">
               <a:rPr lang="en-US" smtClean="0"/>
-              <a:t>9/11/2026</a:t>
+              <a:t>9/16/2026</a:t>
             </a:fld>
             <a:endParaRPr lang="en-US"/>
           </a:p>
@@ -5625,7 +5927,7 @@
           <a:p>
             <a:fld id="{3BC2557A-5C88-417A-A763-5AC779462A5F}" type="datetime1">
               <a:rPr lang="en-US" smtClean="0"/>
-              <a:t>9/11/2026</a:t>
+              <a:t>9/16/2026</a:t>
             </a:fld>
             <a:endParaRPr lang="en-US"/>
           </a:p>
@@ -6047,7 +6349,7 @@
           <a:p>
             <a:fld id="{07C7BFD4-467E-4EDE-93EA-052F5B39A4E5}" type="datetime1">
               <a:rPr lang="en-US" smtClean="0"/>
-              <a:t>9/11/2026</a:t>
+              <a:t>9/16/2026</a:t>
             </a:fld>
             <a:endParaRPr lang="en-US"/>
           </a:p>
@@ -6297,7 +6599,7 @@
           <a:p>
             <a:fld id="{07C7BFD4-467E-4EDE-93EA-052F5B39A4E5}" type="datetime1">
               <a:rPr lang="en-US" smtClean="0"/>
-              <a:t>9/11/2026</a:t>
+              <a:t>9/16/2026</a:t>
             </a:fld>
             <a:endParaRPr lang="en-US"/>
           </a:p>
@@ -6479,7 +6781,7 @@
           <a:p>
             <a:fld id="{109E55A0-C911-4F03-82FC-7E5926047D46}" type="datetime1">
               <a:rPr lang="en-US" smtClean="0"/>
-              <a:t>9/11/2026</a:t>
+              <a:t>9/16/2026</a:t>
             </a:fld>
             <a:endParaRPr lang="en-US"/>
           </a:p>
@@ -6792,7 +7094,7 @@
           <a:p>
             <a:fld id="{A533CBE2-D5BE-47AC-ADC2-9CDFC1D0CF90}" type="datetime1">
               <a:rPr lang="en-US" smtClean="0"/>
-              <a:t>9/11/2026</a:t>
+              <a:t>9/16/2026</a:t>
             </a:fld>
             <a:endParaRPr lang="en-US"/>
           </a:p>
@@ -7093,7 +7395,7 @@
           <a:p>
             <a:fld id="{39B7EDB1-CE74-4951-85A2-0B01C2128E28}" type="datetime1">
               <a:rPr lang="en-US" smtClean="0"/>
-              <a:t>9/11/2026</a:t>
+              <a:t>9/16/2026</a:t>
             </a:fld>
             <a:endParaRPr lang="en-US"/>
           </a:p>
@@ -7541,7 +7843,7 @@
           <a:p>
             <a:fld id="{2BC7EB92-A5C2-4807-A9DC-9EDE6CBFB241}" type="datetime1">
               <a:rPr lang="en-US" smtClean="0"/>
-              <a:t>9/11/2026</a:t>
+              <a:t>9/16/2026</a:t>
             </a:fld>
             <a:endParaRPr lang="en-US"/>
           </a:p>
@@ -7654,7 +7956,7 @@
           <a:p>
             <a:fld id="{2B7B7EE0-7771-4CD5-9B2B-3550753A54A1}" type="datetime1">
               <a:rPr lang="en-US" smtClean="0"/>
-              <a:t>9/11/2026</a:t>
+              <a:t>9/16/2026</a:t>
             </a:fld>
             <a:endParaRPr lang="en-US"/>
           </a:p>
@@ -7965,7 +8267,7 @@
           <a:p>
             <a:fld id="{F8B318B3-0E87-4416-A9B8-D891968C2727}" type="datetime1">
               <a:rPr lang="en-US" smtClean="0"/>
-              <a:t>9/11/2026</a:t>
+              <a:t>9/16/2026</a:t>
             </a:fld>
             <a:endParaRPr lang="en-US"/>
           </a:p>
@@ -8206,7 +8508,7 @@
           <a:p>
             <a:fld id="{54D997E8-DDEE-43F1-8D9B-F8A1E11DE488}" type="datetime1">
               <a:rPr lang="en-US" smtClean="0"/>
-              <a:t>9/11/2026</a:t>
+              <a:t>9/16/2026</a:t>
             </a:fld>
             <a:endParaRPr lang="en-US"/>
           </a:p>
@@ -11100,7 +11402,7 @@
           <a:p>
             <a:r>
               <a:rPr lang="en-US" dirty="0"/>
-              <a:t>TypeScript Types Are Easily Circumvented (1)</a:t>
+              <a:t>TypeScript Types are easily Circumvented (1)</a:t>
             </a:r>
           </a:p>
         </p:txBody>
@@ -11992,7 +12294,7 @@
           <a:p>
             <a:r>
               <a:rPr lang="en-US" dirty="0"/>
-              <a:t>TypeScript Types Are Easily Circumvented (2)</a:t>
+              <a:t>TypeScript Types are easily Circumvented (2)</a:t>
             </a:r>
           </a:p>
         </p:txBody>
@@ -12381,6 +12683,2058 @@
         <p:cNvPr id="1" name="">
           <a:extLst>
             <a:ext uri="{FF2B5EF4-FFF2-40B4-BE49-F238E27FC236}">
+              <a16:creationId xmlns:a16="http://schemas.microsoft.com/office/drawing/2014/main" id="{AA8E99D1-3EFE-CC1D-4232-46A4B4731ED9}"/>
+            </a:ext>
+          </a:extLst>
+        </p:cNvPr>
+        <p:cNvGrpSpPr/>
+        <p:nvPr/>
+      </p:nvGrpSpPr>
+      <p:grpSpPr>
+        <a:xfrm>
+          <a:off x="0" y="0"/>
+          <a:ext cx="0" cy="0"/>
+          <a:chOff x="0" y="0"/>
+          <a:chExt cx="0" cy="0"/>
+        </a:xfrm>
+      </p:grpSpPr>
+      <p:sp>
+        <p:nvSpPr>
+          <p:cNvPr id="2" name="Title 1">
+            <a:extLst>
+              <a:ext uri="{FF2B5EF4-FFF2-40B4-BE49-F238E27FC236}">
+                <a16:creationId xmlns:a16="http://schemas.microsoft.com/office/drawing/2014/main" id="{57DCDC19-47F1-62C9-F77F-A3DD8994E0CF}"/>
+              </a:ext>
+            </a:extLst>
+          </p:cNvPr>
+          <p:cNvSpPr>
+            <a:spLocks noGrp="1"/>
+          </p:cNvSpPr>
+          <p:nvPr>
+            <p:ph type="title"/>
+          </p:nvPr>
+        </p:nvSpPr>
+        <p:spPr/>
+        <p:txBody>
+          <a:bodyPr/>
+          <a:lstStyle/>
+          <a:p>
+            <a:r>
+              <a:rPr lang="en-US" dirty="0"/>
+              <a:t>Where might an Untrusted Input come from?</a:t>
+            </a:r>
+          </a:p>
+        </p:txBody>
+      </p:sp>
+      <p:sp>
+        <p:nvSpPr>
+          <p:cNvPr id="7" name="Content Placeholder 6">
+            <a:extLst>
+              <a:ext uri="{FF2B5EF4-FFF2-40B4-BE49-F238E27FC236}">
+                <a16:creationId xmlns:a16="http://schemas.microsoft.com/office/drawing/2014/main" id="{B07DBF23-21C5-DE37-E827-58241A3AB489}"/>
+              </a:ext>
+            </a:extLst>
+          </p:cNvPr>
+          <p:cNvSpPr>
+            <a:spLocks noGrp="1"/>
+          </p:cNvSpPr>
+          <p:nvPr>
+            <p:ph idx="1"/>
+          </p:nvPr>
+        </p:nvSpPr>
+        <p:spPr/>
+        <p:txBody>
+          <a:bodyPr>
+            <a:normAutofit/>
+          </a:bodyPr>
+          <a:lstStyle/>
+          <a:p>
+            <a:pPr marL="0" indent="0">
+              <a:buNone/>
+            </a:pPr>
+            <a:r>
+              <a:rPr lang="en-US" dirty="0"/>
+              <a:t>Any input given to a web app</a:t>
+            </a:r>
+            <a:br>
+              <a:rPr lang="en-US" dirty="0"/>
+            </a:br>
+            <a:r>
+              <a:rPr lang="en-US" dirty="0"/>
+              <a:t>can also be given by other</a:t>
+            </a:r>
+            <a:br>
+              <a:rPr lang="en-US" dirty="0"/>
+            </a:br>
+            <a:r>
+              <a:rPr lang="en-US" dirty="0"/>
+              <a:t>means…</a:t>
+            </a:r>
+          </a:p>
+        </p:txBody>
+      </p:sp>
+      <p:sp>
+        <p:nvSpPr>
+          <p:cNvPr id="4" name="Slide Number Placeholder 3">
+            <a:extLst>
+              <a:ext uri="{FF2B5EF4-FFF2-40B4-BE49-F238E27FC236}">
+                <a16:creationId xmlns:a16="http://schemas.microsoft.com/office/drawing/2014/main" id="{49BF43A1-E0F6-792E-915A-F1EE88354758}"/>
+              </a:ext>
+            </a:extLst>
+          </p:cNvPr>
+          <p:cNvSpPr>
+            <a:spLocks noGrp="1"/>
+          </p:cNvSpPr>
+          <p:nvPr>
+            <p:ph type="sldNum" sz="quarter" idx="12"/>
+          </p:nvPr>
+        </p:nvSpPr>
+        <p:spPr/>
+        <p:txBody>
+          <a:bodyPr/>
+          <a:lstStyle/>
+          <a:p>
+            <a:fld id="{20F37917-FD3A-4669-9018-DA04BCDD3D75}" type="slidenum">
+              <a:rPr lang="en-US" smtClean="0"/>
+              <a:pPr/>
+              <a:t>14</a:t>
+            </a:fld>
+            <a:endParaRPr lang="en-US" dirty="0"/>
+          </a:p>
+        </p:txBody>
+      </p:sp>
+      <p:sp>
+        <p:nvSpPr>
+          <p:cNvPr id="3" name="TextBox 2">
+            <a:extLst>
+              <a:ext uri="{FF2B5EF4-FFF2-40B4-BE49-F238E27FC236}">
+                <a16:creationId xmlns:a16="http://schemas.microsoft.com/office/drawing/2014/main" id="{26933C7F-EDFD-7B22-60C3-822A5D294EDA}"/>
+              </a:ext>
+            </a:extLst>
+          </p:cNvPr>
+          <p:cNvSpPr txBox="1"/>
+          <p:nvPr/>
+        </p:nvSpPr>
+        <p:spPr>
+          <a:xfrm>
+            <a:off x="2151529" y="739588"/>
+            <a:ext cx="0" cy="0"/>
+          </a:xfrm>
+          <a:prstGeom prst="rect">
+            <a:avLst/>
+          </a:prstGeom>
+          <a:noFill/>
+          <a:ln>
+            <a:noFill/>
+          </a:ln>
+        </p:spPr>
+        <p:style>
+          <a:lnRef idx="2">
+            <a:schemeClr val="accent1">
+              <a:shade val="50000"/>
+            </a:schemeClr>
+          </a:lnRef>
+          <a:fillRef idx="1">
+            <a:schemeClr val="accent1"/>
+          </a:fillRef>
+          <a:effectRef idx="0">
+            <a:schemeClr val="accent1"/>
+          </a:effectRef>
+          <a:fontRef idx="minor">
+            <a:schemeClr val="lt1"/>
+          </a:fontRef>
+        </p:style>
+        <p:txBody>
+          <a:bodyPr rot="0" spcFirstLastPara="0" vertOverflow="overflow" horzOverflow="overflow" vert="horz" wrap="none" lIns="91440" tIns="45720" rIns="91440" bIns="45720" numCol="1" spcCol="0" rtlCol="0" fromWordArt="0" anchor="ctr" anchorCtr="0" forceAA="0" compatLnSpc="1">
+            <a:prstTxWarp prst="textNoShape">
+              <a:avLst/>
+            </a:prstTxWarp>
+            <a:noAutofit/>
+          </a:bodyPr>
+          <a:lstStyle/>
+          <a:p>
+            <a:pPr algn="l"/>
+            <a:endParaRPr lang="en-US" dirty="0">
+              <a:solidFill>
+                <a:schemeClr val="tx1"/>
+              </a:solidFill>
+            </a:endParaRPr>
+          </a:p>
+        </p:txBody>
+      </p:sp>
+      <p:sp>
+        <p:nvSpPr>
+          <p:cNvPr id="14" name="TextBox 13">
+            <a:extLst>
+              <a:ext uri="{FF2B5EF4-FFF2-40B4-BE49-F238E27FC236}">
+                <a16:creationId xmlns:a16="http://schemas.microsoft.com/office/drawing/2014/main" id="{1A5354DA-E2DB-A31F-8480-DB5EC910D95D}"/>
+              </a:ext>
+            </a:extLst>
+          </p:cNvPr>
+          <p:cNvSpPr txBox="1"/>
+          <p:nvPr/>
+        </p:nvSpPr>
+        <p:spPr>
+          <a:xfrm>
+            <a:off x="-3227294" y="-1169894"/>
+            <a:ext cx="0" cy="0"/>
+          </a:xfrm>
+          <a:prstGeom prst="rect">
+            <a:avLst/>
+          </a:prstGeom>
+          <a:noFill/>
+          <a:ln>
+            <a:noFill/>
+          </a:ln>
+        </p:spPr>
+        <p:style>
+          <a:lnRef idx="2">
+            <a:schemeClr val="accent1">
+              <a:shade val="50000"/>
+            </a:schemeClr>
+          </a:lnRef>
+          <a:fillRef idx="1">
+            <a:schemeClr val="accent1"/>
+          </a:fillRef>
+          <a:effectRef idx="0">
+            <a:schemeClr val="accent1"/>
+          </a:effectRef>
+          <a:fontRef idx="minor">
+            <a:schemeClr val="lt1"/>
+          </a:fontRef>
+        </p:style>
+        <p:txBody>
+          <a:bodyPr rot="0" spcFirstLastPara="0" vertOverflow="overflow" horzOverflow="overflow" vert="horz" wrap="none" lIns="91440" tIns="45720" rIns="91440" bIns="45720" numCol="1" spcCol="0" rtlCol="0" fromWordArt="0" anchor="ctr" anchorCtr="0" forceAA="0" compatLnSpc="1">
+            <a:prstTxWarp prst="textNoShape">
+              <a:avLst/>
+            </a:prstTxWarp>
+            <a:noAutofit/>
+          </a:bodyPr>
+          <a:lstStyle/>
+          <a:p>
+            <a:pPr algn="l"/>
+            <a:endParaRPr lang="en-US" dirty="0">
+              <a:solidFill>
+                <a:schemeClr val="tx1"/>
+              </a:solidFill>
+            </a:endParaRPr>
+          </a:p>
+        </p:txBody>
+      </p:sp>
+      <p:pic>
+        <p:nvPicPr>
+          <p:cNvPr id="8" name="Picture 7">
+            <a:extLst>
+              <a:ext uri="{FF2B5EF4-FFF2-40B4-BE49-F238E27FC236}">
+                <a16:creationId xmlns:a16="http://schemas.microsoft.com/office/drawing/2014/main" id="{A27C73C2-A36E-1690-B592-29A0DCEE9962}"/>
+              </a:ext>
+            </a:extLst>
+          </p:cNvPr>
+          <p:cNvPicPr>
+            <a:picLocks noChangeAspect="1"/>
+          </p:cNvPicPr>
+          <p:nvPr/>
+        </p:nvPicPr>
+        <p:blipFill>
+          <a:blip r:embed="rId3"/>
+          <a:stretch>
+            <a:fillRect/>
+          </a:stretch>
+        </p:blipFill>
+        <p:spPr>
+          <a:xfrm>
+            <a:off x="2623477" y="2533505"/>
+            <a:ext cx="3130123" cy="3096705"/>
+          </a:xfrm>
+          <a:prstGeom prst="rect">
+            <a:avLst/>
+          </a:prstGeom>
+        </p:spPr>
+        <p:style>
+          <a:lnRef idx="2">
+            <a:schemeClr val="accent2">
+              <a:shade val="15000"/>
+            </a:schemeClr>
+          </a:lnRef>
+          <a:fillRef idx="1">
+            <a:schemeClr val="accent2"/>
+          </a:fillRef>
+          <a:effectRef idx="0">
+            <a:schemeClr val="accent2"/>
+          </a:effectRef>
+          <a:fontRef idx="minor">
+            <a:schemeClr val="lt1"/>
+          </a:fontRef>
+        </p:style>
+      </p:pic>
+      <p:sp>
+        <p:nvSpPr>
+          <p:cNvPr id="9" name="TextBox 8">
+            <a:extLst>
+              <a:ext uri="{FF2B5EF4-FFF2-40B4-BE49-F238E27FC236}">
+                <a16:creationId xmlns:a16="http://schemas.microsoft.com/office/drawing/2014/main" id="{05900EFC-DE70-FBE8-2791-FB2B07B74AEB}"/>
+              </a:ext>
+            </a:extLst>
+          </p:cNvPr>
+          <p:cNvSpPr txBox="1"/>
+          <p:nvPr/>
+        </p:nvSpPr>
+        <p:spPr>
+          <a:xfrm>
+            <a:off x="354676" y="5630210"/>
+            <a:ext cx="11482647" cy="831182"/>
+          </a:xfrm>
+          <a:prstGeom prst="rect">
+            <a:avLst/>
+          </a:prstGeom>
+          <a:noFill/>
+          <a:ln>
+            <a:solidFill>
+              <a:schemeClr val="accent1"/>
+            </a:solidFill>
+          </a:ln>
+        </p:spPr>
+        <p:style>
+          <a:lnRef idx="2">
+            <a:schemeClr val="accent1">
+              <a:shade val="50000"/>
+            </a:schemeClr>
+          </a:lnRef>
+          <a:fillRef idx="1">
+            <a:schemeClr val="accent1"/>
+          </a:fillRef>
+          <a:effectRef idx="0">
+            <a:schemeClr val="accent1"/>
+          </a:effectRef>
+          <a:fontRef idx="minor">
+            <a:schemeClr val="lt1"/>
+          </a:fontRef>
+        </p:style>
+        <p:txBody>
+          <a:bodyPr rot="0" spcFirstLastPara="0" vertOverflow="overflow" horzOverflow="overflow" vert="horz" wrap="square" lIns="91440" tIns="45720" rIns="91440" bIns="45720" numCol="1" spcCol="0" rtlCol="0" fromWordArt="0" anchor="ctr" anchorCtr="0" forceAA="0" compatLnSpc="1">
+            <a:prstTxWarp prst="textNoShape">
+              <a:avLst/>
+            </a:prstTxWarp>
+            <a:noAutofit/>
+          </a:bodyPr>
+          <a:lstStyle/>
+          <a:p>
+            <a:r>
+              <a:rPr lang="en-US" sz="2000" dirty="0">
+                <a:solidFill>
+                  <a:schemeClr val="accent2">
+                    <a:lumMod val="50000"/>
+                  </a:schemeClr>
+                </a:solidFill>
+                <a:latin typeface="Consolas" panose="020B0609020204030204" pitchFamily="49" charset="0"/>
+                <a:ea typeface="Menlo" panose="020B0609030804020204" pitchFamily="49" charset="0"/>
+                <a:cs typeface="Consolas" panose="020B0609020204030204" pitchFamily="49" charset="0"/>
+              </a:rPr>
+              <a:t>curl https://</a:t>
+            </a:r>
+            <a:r>
+              <a:rPr lang="en-US" sz="2000" dirty="0" err="1">
+                <a:solidFill>
+                  <a:schemeClr val="accent2">
+                    <a:lumMod val="50000"/>
+                  </a:schemeClr>
+                </a:solidFill>
+                <a:latin typeface="Consolas" panose="020B0609020204030204" pitchFamily="49" charset="0"/>
+                <a:ea typeface="Menlo" panose="020B0609030804020204" pitchFamily="49" charset="0"/>
+                <a:cs typeface="Consolas" panose="020B0609020204030204" pitchFamily="49" charset="0"/>
+              </a:rPr>
+              <a:t>strategy.town</a:t>
+            </a:r>
+            <a:r>
+              <a:rPr lang="en-US" sz="2000" dirty="0">
+                <a:solidFill>
+                  <a:schemeClr val="accent2">
+                    <a:lumMod val="50000"/>
+                  </a:schemeClr>
+                </a:solidFill>
+                <a:latin typeface="Consolas" panose="020B0609020204030204" pitchFamily="49" charset="0"/>
+                <a:ea typeface="Menlo" panose="020B0609030804020204" pitchFamily="49" charset="0"/>
+                <a:cs typeface="Consolas" panose="020B0609020204030204" pitchFamily="49" charset="0"/>
+              </a:rPr>
+              <a:t>/</a:t>
+            </a:r>
+            <a:r>
+              <a:rPr lang="en-US" sz="2000" dirty="0" err="1">
+                <a:solidFill>
+                  <a:schemeClr val="accent2">
+                    <a:lumMod val="50000"/>
+                  </a:schemeClr>
+                </a:solidFill>
+                <a:latin typeface="Consolas" panose="020B0609020204030204" pitchFamily="49" charset="0"/>
+                <a:ea typeface="Menlo" panose="020B0609030804020204" pitchFamily="49" charset="0"/>
+                <a:cs typeface="Consolas" panose="020B0609020204030204" pitchFamily="49" charset="0"/>
+              </a:rPr>
+              <a:t>api</a:t>
+            </a:r>
+            <a:r>
+              <a:rPr lang="en-US" sz="2000" dirty="0">
+                <a:solidFill>
+                  <a:schemeClr val="accent2">
+                    <a:lumMod val="50000"/>
+                  </a:schemeClr>
+                </a:solidFill>
+                <a:latin typeface="Consolas" panose="020B0609020204030204" pitchFamily="49" charset="0"/>
+                <a:ea typeface="Menlo" panose="020B0609030804020204" pitchFamily="49" charset="0"/>
+                <a:cs typeface="Consolas" panose="020B0609020204030204" pitchFamily="49" charset="0"/>
+              </a:rPr>
+              <a:t>/user/signup -H 'Content-Type: application/</a:t>
+            </a:r>
+            <a:r>
+              <a:rPr lang="en-US" sz="2000" dirty="0" err="1">
+                <a:solidFill>
+                  <a:schemeClr val="accent2">
+                    <a:lumMod val="50000"/>
+                  </a:schemeClr>
+                </a:solidFill>
+                <a:latin typeface="Consolas" panose="020B0609020204030204" pitchFamily="49" charset="0"/>
+                <a:ea typeface="Menlo" panose="020B0609030804020204" pitchFamily="49" charset="0"/>
+                <a:cs typeface="Consolas" panose="020B0609020204030204" pitchFamily="49" charset="0"/>
+              </a:rPr>
+              <a:t>json</a:t>
+            </a:r>
+            <a:r>
+              <a:rPr lang="en-US" sz="2000" dirty="0">
+                <a:solidFill>
+                  <a:schemeClr val="accent2">
+                    <a:lumMod val="50000"/>
+                  </a:schemeClr>
+                </a:solidFill>
+                <a:latin typeface="Consolas" panose="020B0609020204030204" pitchFamily="49" charset="0"/>
+                <a:ea typeface="Menlo" panose="020B0609030804020204" pitchFamily="49" charset="0"/>
+                <a:cs typeface="Consolas" panose="020B0609020204030204" pitchFamily="49" charset="0"/>
+              </a:rPr>
+              <a:t>' \</a:t>
+            </a:r>
+          </a:p>
+          <a:p>
+            <a:r>
+              <a:rPr lang="en-US" sz="2000" dirty="0">
+                <a:solidFill>
+                  <a:schemeClr val="accent2">
+                    <a:lumMod val="50000"/>
+                  </a:schemeClr>
+                </a:solidFill>
+                <a:latin typeface="Consolas" panose="020B0609020204030204" pitchFamily="49" charset="0"/>
+                <a:ea typeface="Menlo" panose="020B0609030804020204" pitchFamily="49" charset="0"/>
+                <a:cs typeface="Consolas" panose="020B0609020204030204" pitchFamily="49" charset="0"/>
+              </a:rPr>
+              <a:t>  --data '{ "username": "</a:t>
+            </a:r>
+            <a:r>
+              <a:rPr lang="en-US" sz="2000" dirty="0" err="1">
+                <a:solidFill>
+                  <a:schemeClr val="accent2">
+                    <a:lumMod val="50000"/>
+                  </a:schemeClr>
+                </a:solidFill>
+                <a:latin typeface="Consolas" panose="020B0609020204030204" pitchFamily="49" charset="0"/>
+                <a:ea typeface="Menlo" panose="020B0609030804020204" pitchFamily="49" charset="0"/>
+                <a:cs typeface="Consolas" panose="020B0609020204030204" pitchFamily="49" charset="0"/>
+              </a:rPr>
+              <a:t>trugamer</a:t>
+            </a:r>
+            <a:r>
+              <a:rPr lang="en-US" sz="2000" dirty="0">
+                <a:solidFill>
+                  <a:schemeClr val="accent2">
+                    <a:lumMod val="50000"/>
+                  </a:schemeClr>
+                </a:solidFill>
+                <a:latin typeface="Consolas" panose="020B0609020204030204" pitchFamily="49" charset="0"/>
+                <a:ea typeface="Menlo" panose="020B0609030804020204" pitchFamily="49" charset="0"/>
+                <a:cs typeface="Consolas" panose="020B0609020204030204" pitchFamily="49" charset="0"/>
+              </a:rPr>
+              <a:t>", "password": "Hunter2" }'</a:t>
+            </a:r>
+          </a:p>
+        </p:txBody>
+      </p:sp>
+      <p:pic>
+        <p:nvPicPr>
+          <p:cNvPr id="10" name="Picture 9">
+            <a:extLst>
+              <a:ext uri="{FF2B5EF4-FFF2-40B4-BE49-F238E27FC236}">
+                <a16:creationId xmlns:a16="http://schemas.microsoft.com/office/drawing/2014/main" id="{4020EB59-7465-48E2-D307-42A460E296D6}"/>
+              </a:ext>
+            </a:extLst>
+          </p:cNvPr>
+          <p:cNvPicPr>
+            <a:picLocks noChangeAspect="1"/>
+          </p:cNvPicPr>
+          <p:nvPr/>
+        </p:nvPicPr>
+        <p:blipFill>
+          <a:blip r:embed="rId4"/>
+          <a:stretch>
+            <a:fillRect/>
+          </a:stretch>
+        </p:blipFill>
+        <p:spPr>
+          <a:xfrm>
+            <a:off x="5753600" y="1505653"/>
+            <a:ext cx="6083723" cy="4124557"/>
+          </a:xfrm>
+          <a:prstGeom prst="rect">
+            <a:avLst/>
+          </a:prstGeom>
+          <a:ln>
+            <a:solidFill>
+              <a:schemeClr val="accent1"/>
+            </a:solidFill>
+          </a:ln>
+        </p:spPr>
+      </p:pic>
+      <p:sp>
+        <p:nvSpPr>
+          <p:cNvPr id="12" name="TextBox 11">
+            <a:extLst>
+              <a:ext uri="{FF2B5EF4-FFF2-40B4-BE49-F238E27FC236}">
+                <a16:creationId xmlns:a16="http://schemas.microsoft.com/office/drawing/2014/main" id="{AF846D40-6CA3-FF19-8447-AC098381090C}"/>
+              </a:ext>
+            </a:extLst>
+          </p:cNvPr>
+          <p:cNvSpPr txBox="1"/>
+          <p:nvPr/>
+        </p:nvSpPr>
+        <p:spPr>
+          <a:xfrm>
+            <a:off x="1841157" y="2001795"/>
+            <a:ext cx="0" cy="0"/>
+          </a:xfrm>
+          <a:prstGeom prst="rect">
+            <a:avLst/>
+          </a:prstGeom>
+          <a:noFill/>
+          <a:ln>
+            <a:noFill/>
+          </a:ln>
+        </p:spPr>
+        <p:style>
+          <a:lnRef idx="2">
+            <a:schemeClr val="accent1">
+              <a:shade val="50000"/>
+            </a:schemeClr>
+          </a:lnRef>
+          <a:fillRef idx="1">
+            <a:schemeClr val="accent1"/>
+          </a:fillRef>
+          <a:effectRef idx="0">
+            <a:schemeClr val="accent1"/>
+          </a:effectRef>
+          <a:fontRef idx="minor">
+            <a:schemeClr val="lt1"/>
+          </a:fontRef>
+        </p:style>
+        <p:txBody>
+          <a:bodyPr rot="0" spcFirstLastPara="0" vertOverflow="overflow" horzOverflow="overflow" vert="horz" wrap="none" lIns="91440" tIns="45720" rIns="91440" bIns="45720" numCol="1" spcCol="0" rtlCol="0" fromWordArt="0" anchor="ctr" anchorCtr="0" forceAA="0" compatLnSpc="1">
+            <a:prstTxWarp prst="textNoShape">
+              <a:avLst/>
+            </a:prstTxWarp>
+            <a:noAutofit/>
+          </a:bodyPr>
+          <a:lstStyle/>
+          <a:p>
+            <a:pPr algn="l"/>
+            <a:endParaRPr lang="en-US" dirty="0">
+              <a:solidFill>
+                <a:schemeClr val="tx1"/>
+              </a:solidFill>
+            </a:endParaRPr>
+          </a:p>
+        </p:txBody>
+      </p:sp>
+      <p:sp>
+        <p:nvSpPr>
+          <p:cNvPr id="13" name="TextBox 12">
+            <a:extLst>
+              <a:ext uri="{FF2B5EF4-FFF2-40B4-BE49-F238E27FC236}">
+                <a16:creationId xmlns:a16="http://schemas.microsoft.com/office/drawing/2014/main" id="{A6AAFFBB-2531-3239-1536-926BA1CE3E55}"/>
+              </a:ext>
+            </a:extLst>
+          </p:cNvPr>
+          <p:cNvSpPr txBox="1"/>
+          <p:nvPr/>
+        </p:nvSpPr>
+        <p:spPr>
+          <a:xfrm>
+            <a:off x="3524865" y="1828800"/>
+            <a:ext cx="0" cy="0"/>
+          </a:xfrm>
+          <a:prstGeom prst="rect">
+            <a:avLst/>
+          </a:prstGeom>
+          <a:noFill/>
+          <a:ln>
+            <a:noFill/>
+          </a:ln>
+        </p:spPr>
+        <p:style>
+          <a:lnRef idx="2">
+            <a:schemeClr val="accent1">
+              <a:shade val="50000"/>
+            </a:schemeClr>
+          </a:lnRef>
+          <a:fillRef idx="1">
+            <a:schemeClr val="accent1"/>
+          </a:fillRef>
+          <a:effectRef idx="0">
+            <a:schemeClr val="accent1"/>
+          </a:effectRef>
+          <a:fontRef idx="minor">
+            <a:schemeClr val="lt1"/>
+          </a:fontRef>
+        </p:style>
+        <p:txBody>
+          <a:bodyPr rot="0" spcFirstLastPara="0" vertOverflow="overflow" horzOverflow="overflow" vert="horz" wrap="none" lIns="91440" tIns="45720" rIns="91440" bIns="45720" numCol="1" spcCol="0" rtlCol="0" fromWordArt="0" anchor="ctr" anchorCtr="0" forceAA="0" compatLnSpc="1">
+            <a:prstTxWarp prst="textNoShape">
+              <a:avLst/>
+            </a:prstTxWarp>
+            <a:noAutofit/>
+          </a:bodyPr>
+          <a:lstStyle/>
+          <a:p>
+            <a:pPr algn="l"/>
+            <a:endParaRPr lang="en-US" dirty="0">
+              <a:solidFill>
+                <a:schemeClr val="tx1"/>
+              </a:solidFill>
+            </a:endParaRPr>
+          </a:p>
+        </p:txBody>
+      </p:sp>
+    </p:spTree>
+    <p:extLst>
+      <p:ext uri="{BB962C8B-B14F-4D97-AF65-F5344CB8AC3E}">
+        <p14:creationId xmlns:p14="http://schemas.microsoft.com/office/powerpoint/2010/main" val="3569258405"/>
+      </p:ext>
+    </p:extLst>
+  </p:cSld>
+  <p:clrMapOvr>
+    <a:masterClrMapping/>
+  </p:clrMapOvr>
+</p:sld>
+</file>
+
+<file path=ppt/slides/slide15.xml><?xml version="1.0" encoding="utf-8"?>
+<p:sld xmlns:a="http://schemas.openxmlformats.org/drawingml/2006/main" xmlns:r="http://schemas.openxmlformats.org/officeDocument/2006/relationships" xmlns:p="http://schemas.openxmlformats.org/presentationml/2006/main">
+  <p:cSld>
+    <p:spTree>
+      <p:nvGrpSpPr>
+        <p:cNvPr id="1" name="">
+          <a:extLst>
+            <a:ext uri="{FF2B5EF4-FFF2-40B4-BE49-F238E27FC236}">
+              <a16:creationId xmlns:a16="http://schemas.microsoft.com/office/drawing/2014/main" id="{DE2C4F2E-07F2-D81B-66BA-BB4EF1E927FD}"/>
+            </a:ext>
+          </a:extLst>
+        </p:cNvPr>
+        <p:cNvGrpSpPr/>
+        <p:nvPr/>
+      </p:nvGrpSpPr>
+      <p:grpSpPr>
+        <a:xfrm>
+          <a:off x="0" y="0"/>
+          <a:ext cx="0" cy="0"/>
+          <a:chOff x="0" y="0"/>
+          <a:chExt cx="0" cy="0"/>
+        </a:xfrm>
+      </p:grpSpPr>
+      <p:sp>
+        <p:nvSpPr>
+          <p:cNvPr id="2" name="Title 1">
+            <a:extLst>
+              <a:ext uri="{FF2B5EF4-FFF2-40B4-BE49-F238E27FC236}">
+                <a16:creationId xmlns:a16="http://schemas.microsoft.com/office/drawing/2014/main" id="{08941892-B670-C220-0AC5-0F82ECC89AAE}"/>
+              </a:ext>
+            </a:extLst>
+          </p:cNvPr>
+          <p:cNvSpPr>
+            <a:spLocks noGrp="1"/>
+          </p:cNvSpPr>
+          <p:nvPr>
+            <p:ph type="title"/>
+          </p:nvPr>
+        </p:nvSpPr>
+        <p:spPr/>
+        <p:txBody>
+          <a:bodyPr>
+            <a:normAutofit/>
+          </a:bodyPr>
+          <a:lstStyle/>
+          <a:p>
+            <a:r>
+              <a:rPr lang="en-US" dirty="0"/>
+              <a:t>Untrusted Inputs should have type </a:t>
+            </a:r>
+            <a:r>
+              <a:rPr lang="en-US" dirty="0">
+                <a:solidFill>
+                  <a:srgbClr val="FF0000"/>
+                </a:solidFill>
+                <a:latin typeface="Consolas" panose="020B0609020204030204" pitchFamily="49" charset="0"/>
+                <a:ea typeface="Menlo" panose="020B0609030804020204" pitchFamily="49" charset="0"/>
+                <a:cs typeface="Consolas" panose="020B0609020204030204" pitchFamily="49" charset="0"/>
+              </a:rPr>
+              <a:t>unknown</a:t>
+            </a:r>
+          </a:p>
+        </p:txBody>
+      </p:sp>
+      <p:sp>
+        <p:nvSpPr>
+          <p:cNvPr id="6" name="Content Placeholder 5">
+            <a:extLst>
+              <a:ext uri="{FF2B5EF4-FFF2-40B4-BE49-F238E27FC236}">
+                <a16:creationId xmlns:a16="http://schemas.microsoft.com/office/drawing/2014/main" id="{45FD9428-A4EC-DE5B-666A-02FAA3D7F1C8}"/>
+              </a:ext>
+            </a:extLst>
+          </p:cNvPr>
+          <p:cNvSpPr>
+            <a:spLocks noGrp="1"/>
+          </p:cNvSpPr>
+          <p:nvPr>
+            <p:ph idx="1"/>
+          </p:nvPr>
+        </p:nvSpPr>
+        <p:spPr>
+          <a:xfrm>
+            <a:off x="838199" y="1500160"/>
+            <a:ext cx="10515599" cy="4856190"/>
+          </a:xfrm>
+        </p:spPr>
+        <p:txBody>
+          <a:bodyPr>
+            <a:normAutofit lnSpcReduction="10000"/>
+          </a:bodyPr>
+          <a:lstStyle/>
+          <a:p>
+            <a:r>
+              <a:rPr lang="en-US" dirty="0"/>
+              <a:t>The appropriate TypeScript type for an unknown value is </a:t>
+            </a:r>
+            <a:r>
+              <a:rPr lang="en-US" dirty="0">
+                <a:latin typeface="Menlo" panose="020B0609030804020204" pitchFamily="49" charset="0"/>
+                <a:ea typeface="Menlo" panose="020B0609030804020204" pitchFamily="49" charset="0"/>
+                <a:cs typeface="Menlo" panose="020B0609030804020204" pitchFamily="49" charset="0"/>
+              </a:rPr>
+              <a:t>unknown</a:t>
+            </a:r>
+          </a:p>
+          <a:p>
+            <a:pPr marL="0" indent="0">
+              <a:buNone/>
+            </a:pPr>
+            <a:endParaRPr lang="en-US" dirty="0">
+              <a:latin typeface="Menlo" panose="020B0609030804020204" pitchFamily="49" charset="0"/>
+              <a:ea typeface="Menlo" panose="020B0609030804020204" pitchFamily="49" charset="0"/>
+              <a:cs typeface="Menlo" panose="020B0609030804020204" pitchFamily="49" charset="0"/>
+            </a:endParaRPr>
+          </a:p>
+          <a:p>
+            <a:pPr marL="0" indent="0">
+              <a:buNone/>
+            </a:pPr>
+            <a:r>
+              <a:rPr lang="en-US" sz="2000" dirty="0">
+                <a:solidFill>
+                  <a:srgbClr val="002060"/>
+                </a:solidFill>
+                <a:latin typeface="Consolas" panose="020B0609020204030204" pitchFamily="49" charset="0"/>
+                <a:ea typeface="Menlo" panose="020B0609030804020204" pitchFamily="49" charset="0"/>
+                <a:cs typeface="Consolas" panose="020B0609020204030204" pitchFamily="49" charset="0"/>
+              </a:rPr>
+              <a:t>function</a:t>
+            </a:r>
+            <a:r>
+              <a:rPr lang="en-US" sz="2000" dirty="0">
+                <a:latin typeface="Consolas" panose="020B0609020204030204" pitchFamily="49" charset="0"/>
+                <a:ea typeface="Menlo" panose="020B0609030804020204" pitchFamily="49" charset="0"/>
+                <a:cs typeface="Consolas" panose="020B0609020204030204" pitchFamily="49" charset="0"/>
+              </a:rPr>
+              <a:t> </a:t>
+            </a:r>
+            <a:r>
+              <a:rPr lang="en-US" sz="2000" dirty="0" err="1">
+                <a:solidFill>
+                  <a:schemeClr val="accent4">
+                    <a:lumMod val="50000"/>
+                  </a:schemeClr>
+                </a:solidFill>
+                <a:latin typeface="Consolas" panose="020B0609020204030204" pitchFamily="49" charset="0"/>
+                <a:ea typeface="Menlo" panose="020B0609030804020204" pitchFamily="49" charset="0"/>
+                <a:cs typeface="Consolas" panose="020B0609020204030204" pitchFamily="49" charset="0"/>
+              </a:rPr>
+              <a:t>lookAtMe</a:t>
+            </a:r>
+            <a:r>
+              <a:rPr lang="en-US" sz="2000" dirty="0">
+                <a:latin typeface="Consolas" panose="020B0609020204030204" pitchFamily="49" charset="0"/>
+                <a:ea typeface="Menlo" panose="020B0609030804020204" pitchFamily="49" charset="0"/>
+                <a:cs typeface="Consolas" panose="020B0609020204030204" pitchFamily="49" charset="0"/>
+              </a:rPr>
+              <a:t>(</a:t>
+            </a:r>
+            <a:r>
+              <a:rPr lang="en-US" sz="2000" dirty="0">
+                <a:solidFill>
+                  <a:srgbClr val="002060"/>
+                </a:solidFill>
+                <a:latin typeface="Consolas" panose="020B0609020204030204" pitchFamily="49" charset="0"/>
+                <a:ea typeface="Menlo" panose="020B0609030804020204" pitchFamily="49" charset="0"/>
+                <a:cs typeface="Consolas" panose="020B0609020204030204" pitchFamily="49" charset="0"/>
+              </a:rPr>
+              <a:t>input</a:t>
+            </a:r>
+            <a:r>
+              <a:rPr lang="en-US" sz="2000" dirty="0">
+                <a:latin typeface="Consolas" panose="020B0609020204030204" pitchFamily="49" charset="0"/>
+                <a:ea typeface="Menlo" panose="020B0609030804020204" pitchFamily="49" charset="0"/>
+                <a:cs typeface="Consolas" panose="020B0609020204030204" pitchFamily="49" charset="0"/>
+              </a:rPr>
+              <a:t>: </a:t>
+            </a:r>
+            <a:r>
+              <a:rPr lang="en-US" sz="2000" dirty="0">
+                <a:solidFill>
+                  <a:srgbClr val="0070C0"/>
+                </a:solidFill>
+                <a:latin typeface="Consolas" panose="020B0609020204030204" pitchFamily="49" charset="0"/>
+                <a:ea typeface="Menlo" panose="020B0609030804020204" pitchFamily="49" charset="0"/>
+                <a:cs typeface="Consolas" panose="020B0609020204030204" pitchFamily="49" charset="0"/>
+              </a:rPr>
+              <a:t>unknown</a:t>
+            </a:r>
+            <a:r>
+              <a:rPr lang="en-US" sz="2000" dirty="0">
+                <a:latin typeface="Consolas" panose="020B0609020204030204" pitchFamily="49" charset="0"/>
+                <a:ea typeface="Menlo" panose="020B0609030804020204" pitchFamily="49" charset="0"/>
+                <a:cs typeface="Consolas" panose="020B0609020204030204" pitchFamily="49" charset="0"/>
+              </a:rPr>
+              <a:t>) {</a:t>
+            </a:r>
+          </a:p>
+          <a:p>
+            <a:pPr marL="0" indent="0">
+              <a:buNone/>
+            </a:pPr>
+            <a:r>
+              <a:rPr lang="en-US" sz="2000" dirty="0">
+                <a:latin typeface="Consolas" panose="020B0609020204030204" pitchFamily="49" charset="0"/>
+                <a:ea typeface="Menlo" panose="020B0609030804020204" pitchFamily="49" charset="0"/>
+                <a:cs typeface="Consolas" panose="020B0609020204030204" pitchFamily="49" charset="0"/>
+              </a:rPr>
+              <a:t>  </a:t>
+            </a:r>
+            <a:r>
+              <a:rPr lang="en-US" sz="2000" dirty="0" err="1">
+                <a:latin typeface="Consolas" panose="020B0609020204030204" pitchFamily="49" charset="0"/>
+                <a:ea typeface="Menlo" panose="020B0609030804020204" pitchFamily="49" charset="0"/>
+                <a:cs typeface="Consolas" panose="020B0609020204030204" pitchFamily="49" charset="0"/>
+              </a:rPr>
+              <a:t>console.log</a:t>
+            </a:r>
+            <a:r>
+              <a:rPr lang="en-US" sz="2000" dirty="0">
+                <a:latin typeface="Consolas" panose="020B0609020204030204" pitchFamily="49" charset="0"/>
+                <a:ea typeface="Menlo" panose="020B0609030804020204" pitchFamily="49" charset="0"/>
+                <a:cs typeface="Consolas" panose="020B0609020204030204" pitchFamily="49" charset="0"/>
+              </a:rPr>
+              <a:t>(</a:t>
+            </a:r>
+            <a:r>
+              <a:rPr lang="en-US" sz="2000" dirty="0" err="1">
+                <a:solidFill>
+                  <a:srgbClr val="002060"/>
+                </a:solidFill>
+                <a:latin typeface="Consolas" panose="020B0609020204030204" pitchFamily="49" charset="0"/>
+                <a:ea typeface="Menlo" panose="020B0609030804020204" pitchFamily="49" charset="0"/>
+                <a:cs typeface="Consolas" panose="020B0609020204030204" pitchFamily="49" charset="0"/>
+              </a:rPr>
+              <a:t>input</a:t>
+            </a:r>
+            <a:r>
+              <a:rPr lang="en-US" sz="2000" dirty="0" err="1">
+                <a:latin typeface="Consolas" panose="020B0609020204030204" pitchFamily="49" charset="0"/>
+                <a:ea typeface="Menlo" panose="020B0609030804020204" pitchFamily="49" charset="0"/>
+                <a:cs typeface="Consolas" panose="020B0609020204030204" pitchFamily="49" charset="0"/>
+              </a:rPr>
+              <a:t>.</a:t>
+            </a:r>
+            <a:r>
+              <a:rPr lang="en-US" sz="2000" dirty="0" err="1">
+                <a:solidFill>
+                  <a:schemeClr val="accent4">
+                    <a:lumMod val="50000"/>
+                  </a:schemeClr>
+                </a:solidFill>
+                <a:latin typeface="Consolas" panose="020B0609020204030204" pitchFamily="49" charset="0"/>
+                <a:ea typeface="Menlo" panose="020B0609030804020204" pitchFamily="49" charset="0"/>
+                <a:cs typeface="Consolas" panose="020B0609020204030204" pitchFamily="49" charset="0"/>
+              </a:rPr>
+              <a:t>toUpperCase</a:t>
+            </a:r>
+            <a:r>
+              <a:rPr lang="en-US" sz="2000" dirty="0">
+                <a:latin typeface="Consolas" panose="020B0609020204030204" pitchFamily="49" charset="0"/>
+                <a:ea typeface="Menlo" panose="020B0609030804020204" pitchFamily="49" charset="0"/>
+                <a:cs typeface="Consolas" panose="020B0609020204030204" pitchFamily="49" charset="0"/>
+              </a:rPr>
+              <a:t>());</a:t>
+            </a:r>
+          </a:p>
+          <a:p>
+            <a:pPr marL="0" indent="0">
+              <a:buNone/>
+            </a:pPr>
+            <a:r>
+              <a:rPr lang="en-US" sz="2000" dirty="0">
+                <a:latin typeface="Consolas" panose="020B0609020204030204" pitchFamily="49" charset="0"/>
+                <a:ea typeface="Menlo" panose="020B0609030804020204" pitchFamily="49" charset="0"/>
+                <a:cs typeface="Consolas" panose="020B0609020204030204" pitchFamily="49" charset="0"/>
+              </a:rPr>
+              <a:t> </a:t>
+            </a:r>
+            <a:r>
+              <a:rPr lang="en-US" sz="2000" dirty="0">
+                <a:solidFill>
+                  <a:srgbClr val="AF00DB"/>
+                </a:solidFill>
+                <a:latin typeface="Consolas" panose="020B0609020204030204" pitchFamily="49" charset="0"/>
+                <a:ea typeface="Menlo" panose="020B0609030804020204" pitchFamily="49" charset="0"/>
+                <a:cs typeface="Consolas" panose="020B0609020204030204" pitchFamily="49" charset="0"/>
+              </a:rPr>
+              <a:t> </a:t>
+            </a:r>
+            <a:r>
+              <a:rPr lang="en-US" sz="2000" dirty="0">
+                <a:solidFill>
+                  <a:srgbClr val="AF00DB"/>
+                </a:solidFill>
+                <a:latin typeface="Consolas" panose="020B0609020204030204" pitchFamily="49" charset="0"/>
+                <a:cs typeface="Consolas" panose="020B0609020204030204" pitchFamily="49" charset="0"/>
+              </a:rPr>
+              <a:t>if</a:t>
+            </a:r>
+            <a:r>
+              <a:rPr lang="en-US" sz="2000" dirty="0">
+                <a:latin typeface="Consolas" panose="020B0609020204030204" pitchFamily="49" charset="0"/>
+                <a:ea typeface="Menlo" panose="020B0609030804020204" pitchFamily="49" charset="0"/>
+                <a:cs typeface="Consolas" panose="020B0609020204030204" pitchFamily="49" charset="0"/>
+              </a:rPr>
+              <a:t> (</a:t>
+            </a:r>
+            <a:r>
+              <a:rPr lang="en-US" sz="2000" dirty="0" err="1">
+                <a:solidFill>
+                  <a:srgbClr val="002060"/>
+                </a:solidFill>
+                <a:latin typeface="Consolas" panose="020B0609020204030204" pitchFamily="49" charset="0"/>
+                <a:ea typeface="Menlo" panose="020B0609030804020204" pitchFamily="49" charset="0"/>
+                <a:cs typeface="Consolas" panose="020B0609020204030204" pitchFamily="49" charset="0"/>
+              </a:rPr>
+              <a:t>typeof</a:t>
+            </a:r>
+            <a:r>
+              <a:rPr lang="en-US" sz="2000" dirty="0">
+                <a:solidFill>
+                  <a:srgbClr val="002060"/>
+                </a:solidFill>
+                <a:latin typeface="Consolas" panose="020B0609020204030204" pitchFamily="49" charset="0"/>
+                <a:ea typeface="Menlo" panose="020B0609030804020204" pitchFamily="49" charset="0"/>
+                <a:cs typeface="Consolas" panose="020B0609020204030204" pitchFamily="49" charset="0"/>
+              </a:rPr>
+              <a:t> input </a:t>
+            </a:r>
+            <a:r>
+              <a:rPr lang="en-US" sz="2000" dirty="0">
+                <a:latin typeface="Consolas" panose="020B0609020204030204" pitchFamily="49" charset="0"/>
+                <a:ea typeface="Menlo" panose="020B0609030804020204" pitchFamily="49" charset="0"/>
+                <a:cs typeface="Consolas" panose="020B0609020204030204" pitchFamily="49" charset="0"/>
+              </a:rPr>
+              <a:t>=== </a:t>
+            </a:r>
+            <a:r>
+              <a:rPr lang="en-US" sz="2000" dirty="0">
+                <a:solidFill>
+                  <a:srgbClr val="C00000"/>
+                </a:solidFill>
+                <a:latin typeface="Consolas" panose="020B0609020204030204" pitchFamily="49" charset="0"/>
+                <a:ea typeface="Menlo" panose="020B0609030804020204" pitchFamily="49" charset="0"/>
+                <a:cs typeface="Consolas" panose="020B0609020204030204" pitchFamily="49" charset="0"/>
+              </a:rPr>
+              <a:t>"string"</a:t>
+            </a:r>
+            <a:r>
+              <a:rPr lang="en-US" sz="2000" dirty="0">
+                <a:latin typeface="Consolas" panose="020B0609020204030204" pitchFamily="49" charset="0"/>
+                <a:ea typeface="Menlo" panose="020B0609030804020204" pitchFamily="49" charset="0"/>
+                <a:cs typeface="Consolas" panose="020B0609020204030204" pitchFamily="49" charset="0"/>
+              </a:rPr>
+              <a:t>) {</a:t>
+            </a:r>
+          </a:p>
+          <a:p>
+            <a:pPr marL="0" indent="0">
+              <a:buNone/>
+            </a:pPr>
+            <a:r>
+              <a:rPr lang="en-US" sz="2000" dirty="0">
+                <a:latin typeface="Consolas" panose="020B0609020204030204" pitchFamily="49" charset="0"/>
+                <a:ea typeface="Menlo" panose="020B0609030804020204" pitchFamily="49" charset="0"/>
+                <a:cs typeface="Consolas" panose="020B0609020204030204" pitchFamily="49" charset="0"/>
+              </a:rPr>
+              <a:t>    </a:t>
+            </a:r>
+            <a:r>
+              <a:rPr lang="en-US" sz="2000" dirty="0" err="1">
+                <a:solidFill>
+                  <a:srgbClr val="002060"/>
+                </a:solidFill>
+                <a:latin typeface="Consolas" panose="020B0609020204030204" pitchFamily="49" charset="0"/>
+                <a:ea typeface="Menlo" panose="020B0609030804020204" pitchFamily="49" charset="0"/>
+                <a:cs typeface="Consolas" panose="020B0609020204030204" pitchFamily="49" charset="0"/>
+              </a:rPr>
+              <a:t>console</a:t>
+            </a:r>
+            <a:r>
+              <a:rPr lang="en-US" sz="2000" dirty="0" err="1">
+                <a:latin typeface="Consolas" panose="020B0609020204030204" pitchFamily="49" charset="0"/>
+                <a:ea typeface="Menlo" panose="020B0609030804020204" pitchFamily="49" charset="0"/>
+                <a:cs typeface="Consolas" panose="020B0609020204030204" pitchFamily="49" charset="0"/>
+              </a:rPr>
+              <a:t>.</a:t>
+            </a:r>
+            <a:r>
+              <a:rPr lang="en-US" sz="2000" dirty="0" err="1">
+                <a:solidFill>
+                  <a:schemeClr val="accent4">
+                    <a:lumMod val="50000"/>
+                  </a:schemeClr>
+                </a:solidFill>
+                <a:latin typeface="Consolas" panose="020B0609020204030204" pitchFamily="49" charset="0"/>
+                <a:ea typeface="Menlo" panose="020B0609030804020204" pitchFamily="49" charset="0"/>
+                <a:cs typeface="Consolas" panose="020B0609020204030204" pitchFamily="49" charset="0"/>
+              </a:rPr>
+              <a:t>log</a:t>
+            </a:r>
+            <a:r>
+              <a:rPr lang="en-US" sz="2000" dirty="0">
+                <a:latin typeface="Consolas" panose="020B0609020204030204" pitchFamily="49" charset="0"/>
+                <a:ea typeface="Menlo" panose="020B0609030804020204" pitchFamily="49" charset="0"/>
+                <a:cs typeface="Consolas" panose="020B0609020204030204" pitchFamily="49" charset="0"/>
+              </a:rPr>
+              <a:t>(</a:t>
+            </a:r>
+            <a:r>
+              <a:rPr lang="en-US" sz="2000" dirty="0" err="1">
+                <a:solidFill>
+                  <a:srgbClr val="002060"/>
+                </a:solidFill>
+                <a:latin typeface="Consolas" panose="020B0609020204030204" pitchFamily="49" charset="0"/>
+                <a:ea typeface="Menlo" panose="020B0609030804020204" pitchFamily="49" charset="0"/>
+                <a:cs typeface="Consolas" panose="020B0609020204030204" pitchFamily="49" charset="0"/>
+              </a:rPr>
+              <a:t>input</a:t>
+            </a:r>
+            <a:r>
+              <a:rPr lang="en-US" sz="2000" dirty="0" err="1">
+                <a:latin typeface="Consolas" panose="020B0609020204030204" pitchFamily="49" charset="0"/>
+                <a:ea typeface="Menlo" panose="020B0609030804020204" pitchFamily="49" charset="0"/>
+                <a:cs typeface="Consolas" panose="020B0609020204030204" pitchFamily="49" charset="0"/>
+              </a:rPr>
+              <a:t>.</a:t>
+            </a:r>
+            <a:r>
+              <a:rPr lang="en-US" sz="2000" dirty="0" err="1">
+                <a:solidFill>
+                  <a:schemeClr val="accent4">
+                    <a:lumMod val="50000"/>
+                  </a:schemeClr>
+                </a:solidFill>
+                <a:latin typeface="Consolas" panose="020B0609020204030204" pitchFamily="49" charset="0"/>
+                <a:ea typeface="Menlo" panose="020B0609030804020204" pitchFamily="49" charset="0"/>
+                <a:cs typeface="Consolas" panose="020B0609020204030204" pitchFamily="49" charset="0"/>
+              </a:rPr>
+              <a:t>toUpperCase</a:t>
+            </a:r>
+            <a:r>
+              <a:rPr lang="en-US" sz="2000" dirty="0">
+                <a:latin typeface="Consolas" panose="020B0609020204030204" pitchFamily="49" charset="0"/>
+                <a:ea typeface="Menlo" panose="020B0609030804020204" pitchFamily="49" charset="0"/>
+                <a:cs typeface="Consolas" panose="020B0609020204030204" pitchFamily="49" charset="0"/>
+              </a:rPr>
+              <a:t>());</a:t>
+            </a:r>
+          </a:p>
+          <a:p>
+            <a:pPr marL="0" indent="0">
+              <a:buNone/>
+            </a:pPr>
+            <a:r>
+              <a:rPr lang="en-US" sz="2000" dirty="0">
+                <a:latin typeface="Consolas" panose="020B0609020204030204" pitchFamily="49" charset="0"/>
+                <a:ea typeface="Menlo" panose="020B0609030804020204" pitchFamily="49" charset="0"/>
+                <a:cs typeface="Consolas" panose="020B0609020204030204" pitchFamily="49" charset="0"/>
+              </a:rPr>
+              <a:t>  }</a:t>
+            </a:r>
+          </a:p>
+          <a:p>
+            <a:pPr marL="0" indent="0">
+              <a:buNone/>
+            </a:pPr>
+            <a:r>
+              <a:rPr lang="en-US" sz="2000" dirty="0">
+                <a:latin typeface="Consolas" panose="020B0609020204030204" pitchFamily="49" charset="0"/>
+                <a:ea typeface="Menlo" panose="020B0609030804020204" pitchFamily="49" charset="0"/>
+                <a:cs typeface="Consolas" panose="020B0609020204030204" pitchFamily="49" charset="0"/>
+              </a:rPr>
+              <a:t>}</a:t>
+            </a:r>
+            <a:br>
+              <a:rPr lang="en-US" sz="2100" dirty="0">
+                <a:latin typeface="Consolas" panose="020B0609020204030204" pitchFamily="49" charset="0"/>
+                <a:ea typeface="Menlo" panose="020B0609030804020204" pitchFamily="49" charset="0"/>
+                <a:cs typeface="Consolas" panose="020B0609020204030204" pitchFamily="49" charset="0"/>
+              </a:rPr>
+            </a:br>
+            <a:endParaRPr lang="en-US" sz="2100" dirty="0">
+              <a:latin typeface="Consolas" panose="020B0609020204030204" pitchFamily="49" charset="0"/>
+              <a:ea typeface="Menlo" panose="020B0609030804020204" pitchFamily="49" charset="0"/>
+              <a:cs typeface="Consolas" panose="020B0609020204030204" pitchFamily="49" charset="0"/>
+            </a:endParaRPr>
+          </a:p>
+          <a:p>
+            <a:r>
+              <a:rPr lang="en-US" dirty="0">
+                <a:latin typeface="Calibri" panose="020F0502020204030204" pitchFamily="34" charset="0"/>
+                <a:ea typeface="Menlo" panose="020B0609030804020204" pitchFamily="49" charset="0"/>
+                <a:cs typeface="Calibri" panose="020F0502020204030204" pitchFamily="34" charset="0"/>
+              </a:rPr>
+              <a:t>If you use the </a:t>
+            </a:r>
+            <a:r>
+              <a:rPr lang="en-US" dirty="0">
+                <a:solidFill>
+                  <a:srgbClr val="FF0000"/>
+                </a:solidFill>
+                <a:latin typeface="Consolas" panose="020B0609020204030204" pitchFamily="49" charset="0"/>
+                <a:ea typeface="Menlo" panose="020B0609030804020204" pitchFamily="49" charset="0"/>
+                <a:cs typeface="Consolas" panose="020B0609020204030204" pitchFamily="49" charset="0"/>
+              </a:rPr>
+              <a:t>any</a:t>
+            </a:r>
+            <a:r>
+              <a:rPr lang="en-US" dirty="0">
+                <a:latin typeface="Calibri" panose="020F0502020204030204" pitchFamily="34" charset="0"/>
+                <a:ea typeface="Menlo" panose="020B0609030804020204" pitchFamily="49" charset="0"/>
+                <a:cs typeface="Calibri" panose="020F0502020204030204" pitchFamily="34" charset="0"/>
+              </a:rPr>
+              <a:t> type instead, TypeScript will just say “ok, I guess you know what you’re doing”</a:t>
+            </a:r>
+          </a:p>
+          <a:p>
+            <a:pPr marL="0" indent="0">
+              <a:buNone/>
+            </a:pPr>
+            <a:endParaRPr lang="en-US" dirty="0">
+              <a:latin typeface="Menlo" panose="020B0609030804020204" pitchFamily="49" charset="0"/>
+              <a:ea typeface="Menlo" panose="020B0609030804020204" pitchFamily="49" charset="0"/>
+              <a:cs typeface="Menlo" panose="020B0609030804020204" pitchFamily="49" charset="0"/>
+            </a:endParaRPr>
+          </a:p>
+          <a:p>
+            <a:endParaRPr lang="en-US" dirty="0">
+              <a:latin typeface="Menlo" panose="020B0609030804020204" pitchFamily="49" charset="0"/>
+              <a:ea typeface="Menlo" panose="020B0609030804020204" pitchFamily="49" charset="0"/>
+              <a:cs typeface="Menlo" panose="020B0609030804020204" pitchFamily="49" charset="0"/>
+            </a:endParaRPr>
+          </a:p>
+        </p:txBody>
+      </p:sp>
+      <p:sp>
+        <p:nvSpPr>
+          <p:cNvPr id="4" name="Slide Number Placeholder 3">
+            <a:extLst>
+              <a:ext uri="{FF2B5EF4-FFF2-40B4-BE49-F238E27FC236}">
+                <a16:creationId xmlns:a16="http://schemas.microsoft.com/office/drawing/2014/main" id="{789D95B4-F24B-7C04-70AB-3D4867516548}"/>
+              </a:ext>
+            </a:extLst>
+          </p:cNvPr>
+          <p:cNvSpPr>
+            <a:spLocks noGrp="1"/>
+          </p:cNvSpPr>
+          <p:nvPr>
+            <p:ph type="sldNum" sz="quarter" idx="12"/>
+          </p:nvPr>
+        </p:nvSpPr>
+        <p:spPr/>
+        <p:txBody>
+          <a:bodyPr/>
+          <a:lstStyle/>
+          <a:p>
+            <a:fld id="{20F37917-FD3A-4669-9018-DA04BCDD3D75}" type="slidenum">
+              <a:rPr lang="en-US" smtClean="0"/>
+              <a:pPr/>
+              <a:t>15</a:t>
+            </a:fld>
+            <a:endParaRPr lang="en-US" dirty="0"/>
+          </a:p>
+        </p:txBody>
+      </p:sp>
+      <p:sp>
+        <p:nvSpPr>
+          <p:cNvPr id="3" name="TextBox 2">
+            <a:extLst>
+              <a:ext uri="{FF2B5EF4-FFF2-40B4-BE49-F238E27FC236}">
+                <a16:creationId xmlns:a16="http://schemas.microsoft.com/office/drawing/2014/main" id="{CAB67779-0FD8-1EDF-670B-3D3FBE19B5F4}"/>
+              </a:ext>
+            </a:extLst>
+          </p:cNvPr>
+          <p:cNvSpPr txBox="1"/>
+          <p:nvPr/>
+        </p:nvSpPr>
+        <p:spPr>
+          <a:xfrm>
+            <a:off x="2151529" y="739588"/>
+            <a:ext cx="0" cy="0"/>
+          </a:xfrm>
+          <a:prstGeom prst="rect">
+            <a:avLst/>
+          </a:prstGeom>
+          <a:noFill/>
+          <a:ln>
+            <a:noFill/>
+          </a:ln>
+        </p:spPr>
+        <p:style>
+          <a:lnRef idx="2">
+            <a:schemeClr val="accent1">
+              <a:shade val="50000"/>
+            </a:schemeClr>
+          </a:lnRef>
+          <a:fillRef idx="1">
+            <a:schemeClr val="accent1"/>
+          </a:fillRef>
+          <a:effectRef idx="0">
+            <a:schemeClr val="accent1"/>
+          </a:effectRef>
+          <a:fontRef idx="minor">
+            <a:schemeClr val="lt1"/>
+          </a:fontRef>
+        </p:style>
+        <p:txBody>
+          <a:bodyPr rot="0" spcFirstLastPara="0" vertOverflow="overflow" horzOverflow="overflow" vert="horz" wrap="none" lIns="91440" tIns="45720" rIns="91440" bIns="45720" numCol="1" spcCol="0" rtlCol="0" fromWordArt="0" anchor="ctr" anchorCtr="0" forceAA="0" compatLnSpc="1">
+            <a:prstTxWarp prst="textNoShape">
+              <a:avLst/>
+            </a:prstTxWarp>
+            <a:noAutofit/>
+          </a:bodyPr>
+          <a:lstStyle/>
+          <a:p>
+            <a:pPr algn="l"/>
+            <a:endParaRPr lang="en-US" dirty="0">
+              <a:solidFill>
+                <a:schemeClr val="tx1"/>
+              </a:solidFill>
+            </a:endParaRPr>
+          </a:p>
+        </p:txBody>
+      </p:sp>
+      <p:sp>
+        <p:nvSpPr>
+          <p:cNvPr id="14" name="TextBox 13">
+            <a:extLst>
+              <a:ext uri="{FF2B5EF4-FFF2-40B4-BE49-F238E27FC236}">
+                <a16:creationId xmlns:a16="http://schemas.microsoft.com/office/drawing/2014/main" id="{24032205-46D0-6F87-1E21-A5DECCF9C4C9}"/>
+              </a:ext>
+            </a:extLst>
+          </p:cNvPr>
+          <p:cNvSpPr txBox="1"/>
+          <p:nvPr/>
+        </p:nvSpPr>
+        <p:spPr>
+          <a:xfrm>
+            <a:off x="-3227294" y="-1169894"/>
+            <a:ext cx="0" cy="0"/>
+          </a:xfrm>
+          <a:prstGeom prst="rect">
+            <a:avLst/>
+          </a:prstGeom>
+          <a:noFill/>
+          <a:ln>
+            <a:noFill/>
+          </a:ln>
+        </p:spPr>
+        <p:style>
+          <a:lnRef idx="2">
+            <a:schemeClr val="accent1">
+              <a:shade val="50000"/>
+            </a:schemeClr>
+          </a:lnRef>
+          <a:fillRef idx="1">
+            <a:schemeClr val="accent1"/>
+          </a:fillRef>
+          <a:effectRef idx="0">
+            <a:schemeClr val="accent1"/>
+          </a:effectRef>
+          <a:fontRef idx="minor">
+            <a:schemeClr val="lt1"/>
+          </a:fontRef>
+        </p:style>
+        <p:txBody>
+          <a:bodyPr rot="0" spcFirstLastPara="0" vertOverflow="overflow" horzOverflow="overflow" vert="horz" wrap="none" lIns="91440" tIns="45720" rIns="91440" bIns="45720" numCol="1" spcCol="0" rtlCol="0" fromWordArt="0" anchor="ctr" anchorCtr="0" forceAA="0" compatLnSpc="1">
+            <a:prstTxWarp prst="textNoShape">
+              <a:avLst/>
+            </a:prstTxWarp>
+            <a:noAutofit/>
+          </a:bodyPr>
+          <a:lstStyle/>
+          <a:p>
+            <a:pPr algn="l"/>
+            <a:endParaRPr lang="en-US" dirty="0">
+              <a:solidFill>
+                <a:schemeClr val="tx1"/>
+              </a:solidFill>
+            </a:endParaRPr>
+          </a:p>
+        </p:txBody>
+      </p:sp>
+      <p:sp>
+        <p:nvSpPr>
+          <p:cNvPr id="11" name="AutoShape 9">
+            <a:extLst>
+              <a:ext uri="{FF2B5EF4-FFF2-40B4-BE49-F238E27FC236}">
+                <a16:creationId xmlns:a16="http://schemas.microsoft.com/office/drawing/2014/main" id="{AB28CA65-9D21-D22A-CFE2-BC1D530FA211}"/>
+              </a:ext>
+            </a:extLst>
+          </p:cNvPr>
+          <p:cNvSpPr>
+            <a:spLocks/>
+          </p:cNvSpPr>
+          <p:nvPr/>
+        </p:nvSpPr>
+        <p:spPr bwMode="auto">
+          <a:xfrm>
+            <a:off x="8043888" y="2301189"/>
+            <a:ext cx="3096061" cy="861245"/>
+          </a:xfrm>
+          <a:prstGeom prst="roundRect">
+            <a:avLst>
+              <a:gd name="adj" fmla="val 16667"/>
+            </a:avLst>
+          </a:prstGeom>
+          <a:solidFill>
+            <a:srgbClr val="00B050"/>
+          </a:solidFill>
+          <a:ln w="9525" cap="flat" cmpd="sng">
+            <a:solidFill>
+              <a:srgbClr val="C70000"/>
+            </a:solidFill>
+            <a:prstDash val="solid"/>
+            <a:round/>
+            <a:headEnd type="none" w="med" len="med"/>
+            <a:tailEnd type="triangle" w="med" len="med"/>
+          </a:ln>
+          <a:effectLst>
+            <a:outerShdw blurRad="38100" dist="23000" dir="5400000" algn="ctr" rotWithShape="0">
+              <a:srgbClr val="000000">
+                <a:alpha val="34999"/>
+              </a:srgbClr>
+            </a:outerShdw>
+          </a:effectLst>
+        </p:spPr>
+        <p:txBody>
+          <a:bodyPr lIns="32146" tIns="32146" rIns="32146" bIns="32146" anchor="ctr"/>
+          <a:lstStyle>
+            <a:lvl1pPr defTabSz="457200">
+              <a:defRPr sz="3600">
+                <a:solidFill>
+                  <a:srgbClr val="000000"/>
+                </a:solidFill>
+                <a:latin typeface="Helvetica Neue Light" charset="0"/>
+                <a:ea typeface="Helvetica Neue Light" charset="0"/>
+                <a:cs typeface="Helvetica Neue Light" charset="0"/>
+                <a:sym typeface="Helvetica Neue Light" charset="0"/>
+              </a:defRPr>
+            </a:lvl1pPr>
+            <a:lvl2pPr defTabSz="457200">
+              <a:defRPr sz="3600">
+                <a:solidFill>
+                  <a:srgbClr val="000000"/>
+                </a:solidFill>
+                <a:latin typeface="Helvetica Neue Light" charset="0"/>
+                <a:ea typeface="Helvetica Neue Light" charset="0"/>
+                <a:cs typeface="Helvetica Neue Light" charset="0"/>
+                <a:sym typeface="Helvetica Neue Light" charset="0"/>
+              </a:defRPr>
+            </a:lvl2pPr>
+            <a:lvl3pPr defTabSz="457200">
+              <a:defRPr sz="3600">
+                <a:solidFill>
+                  <a:srgbClr val="000000"/>
+                </a:solidFill>
+                <a:latin typeface="Helvetica Neue Light" charset="0"/>
+                <a:ea typeface="Helvetica Neue Light" charset="0"/>
+                <a:cs typeface="Helvetica Neue Light" charset="0"/>
+                <a:sym typeface="Helvetica Neue Light" charset="0"/>
+              </a:defRPr>
+            </a:lvl3pPr>
+            <a:lvl4pPr defTabSz="457200">
+              <a:defRPr sz="3600">
+                <a:solidFill>
+                  <a:srgbClr val="000000"/>
+                </a:solidFill>
+                <a:latin typeface="Helvetica Neue Light" charset="0"/>
+                <a:ea typeface="Helvetica Neue Light" charset="0"/>
+                <a:cs typeface="Helvetica Neue Light" charset="0"/>
+                <a:sym typeface="Helvetica Neue Light" charset="0"/>
+              </a:defRPr>
+            </a:lvl4pPr>
+            <a:lvl5pPr defTabSz="457200">
+              <a:defRPr sz="3600">
+                <a:solidFill>
+                  <a:srgbClr val="000000"/>
+                </a:solidFill>
+                <a:latin typeface="Helvetica Neue Light" charset="0"/>
+                <a:ea typeface="Helvetica Neue Light" charset="0"/>
+                <a:cs typeface="Helvetica Neue Light" charset="0"/>
+                <a:sym typeface="Helvetica Neue Light" charset="0"/>
+              </a:defRPr>
+            </a:lvl5pPr>
+            <a:lvl6pPr marL="457200" algn="ctr" defTabSz="457200" fontAlgn="base" hangingPunct="0">
+              <a:spcBef>
+                <a:spcPct val="0"/>
+              </a:spcBef>
+              <a:spcAft>
+                <a:spcPct val="0"/>
+              </a:spcAft>
+              <a:defRPr sz="3600">
+                <a:solidFill>
+                  <a:srgbClr val="000000"/>
+                </a:solidFill>
+                <a:latin typeface="Helvetica Neue Light" charset="0"/>
+                <a:ea typeface="Helvetica Neue Light" charset="0"/>
+                <a:cs typeface="Helvetica Neue Light" charset="0"/>
+                <a:sym typeface="Helvetica Neue Light" charset="0"/>
+              </a:defRPr>
+            </a:lvl6pPr>
+            <a:lvl7pPr marL="914400" algn="ctr" defTabSz="457200" fontAlgn="base" hangingPunct="0">
+              <a:spcBef>
+                <a:spcPct val="0"/>
+              </a:spcBef>
+              <a:spcAft>
+                <a:spcPct val="0"/>
+              </a:spcAft>
+              <a:defRPr sz="3600">
+                <a:solidFill>
+                  <a:srgbClr val="000000"/>
+                </a:solidFill>
+                <a:latin typeface="Helvetica Neue Light" charset="0"/>
+                <a:ea typeface="Helvetica Neue Light" charset="0"/>
+                <a:cs typeface="Helvetica Neue Light" charset="0"/>
+                <a:sym typeface="Helvetica Neue Light" charset="0"/>
+              </a:defRPr>
+            </a:lvl7pPr>
+            <a:lvl8pPr marL="1371600" algn="ctr" defTabSz="457200" fontAlgn="base" hangingPunct="0">
+              <a:spcBef>
+                <a:spcPct val="0"/>
+              </a:spcBef>
+              <a:spcAft>
+                <a:spcPct val="0"/>
+              </a:spcAft>
+              <a:defRPr sz="3600">
+                <a:solidFill>
+                  <a:srgbClr val="000000"/>
+                </a:solidFill>
+                <a:latin typeface="Helvetica Neue Light" charset="0"/>
+                <a:ea typeface="Helvetica Neue Light" charset="0"/>
+                <a:cs typeface="Helvetica Neue Light" charset="0"/>
+                <a:sym typeface="Helvetica Neue Light" charset="0"/>
+              </a:defRPr>
+            </a:lvl8pPr>
+            <a:lvl9pPr marL="1828800" algn="ctr" defTabSz="457200" fontAlgn="base" hangingPunct="0">
+              <a:spcBef>
+                <a:spcPct val="0"/>
+              </a:spcBef>
+              <a:spcAft>
+                <a:spcPct val="0"/>
+              </a:spcAft>
+              <a:defRPr sz="3600">
+                <a:solidFill>
+                  <a:srgbClr val="000000"/>
+                </a:solidFill>
+                <a:latin typeface="Helvetica Neue Light" charset="0"/>
+                <a:ea typeface="Helvetica Neue Light" charset="0"/>
+                <a:cs typeface="Helvetica Neue Light" charset="0"/>
+                <a:sym typeface="Helvetica Neue Light" charset="0"/>
+              </a:defRPr>
+            </a:lvl9pPr>
+          </a:lstStyle>
+          <a:p>
+            <a:r>
+              <a:rPr lang="en-US" altLang="en-US" sz="2400" dirty="0">
+                <a:solidFill>
+                  <a:srgbClr val="FFFFFF"/>
+                </a:solidFill>
+                <a:latin typeface="Calibri" panose="020F0502020204030204" pitchFamily="34" charset="0"/>
+                <a:ea typeface="Helvetica" panose="020B0604020202020204" pitchFamily="34" charset="0"/>
+                <a:cs typeface="Calibri" panose="020F0502020204030204" pitchFamily="34" charset="0"/>
+                <a:sym typeface="Helvetica" panose="020B0604020202020204" pitchFamily="34" charset="0"/>
+              </a:rPr>
+              <a:t>TypeScript error here!</a:t>
+            </a:r>
+          </a:p>
+        </p:txBody>
+      </p:sp>
+      <p:cxnSp>
+        <p:nvCxnSpPr>
+          <p:cNvPr id="15" name="Straight Arrow Connector 14">
+            <a:extLst>
+              <a:ext uri="{FF2B5EF4-FFF2-40B4-BE49-F238E27FC236}">
+                <a16:creationId xmlns:a16="http://schemas.microsoft.com/office/drawing/2014/main" id="{8254D0C4-B77E-A70A-08B5-496BD696E952}"/>
+              </a:ext>
+            </a:extLst>
+          </p:cNvPr>
+          <p:cNvCxnSpPr>
+            <a:cxnSpLocks/>
+            <a:stCxn id="11" idx="1"/>
+          </p:cNvCxnSpPr>
+          <p:nvPr/>
+        </p:nvCxnSpPr>
+        <p:spPr>
+          <a:xfrm flipH="1">
+            <a:off x="6341806" y="2731812"/>
+            <a:ext cx="1702082" cy="262111"/>
+          </a:xfrm>
+          <a:prstGeom prst="straightConnector1">
+            <a:avLst/>
+          </a:prstGeom>
+          <a:ln w="127000">
+            <a:solidFill>
+              <a:srgbClr val="00B050"/>
+            </a:solidFill>
+            <a:tailEnd type="triangle"/>
+          </a:ln>
+        </p:spPr>
+        <p:style>
+          <a:lnRef idx="1">
+            <a:schemeClr val="accent1"/>
+          </a:lnRef>
+          <a:fillRef idx="0">
+            <a:schemeClr val="accent1"/>
+          </a:fillRef>
+          <a:effectRef idx="0">
+            <a:schemeClr val="accent1"/>
+          </a:effectRef>
+          <a:fontRef idx="minor">
+            <a:schemeClr val="tx1"/>
+          </a:fontRef>
+        </p:style>
+      </p:cxnSp>
+      <p:cxnSp>
+        <p:nvCxnSpPr>
+          <p:cNvPr id="17" name="Straight Arrow Connector 16">
+            <a:extLst>
+              <a:ext uri="{FF2B5EF4-FFF2-40B4-BE49-F238E27FC236}">
+                <a16:creationId xmlns:a16="http://schemas.microsoft.com/office/drawing/2014/main" id="{5BA6B0B8-7851-E694-4E67-ADC772252335}"/>
+              </a:ext>
+            </a:extLst>
+          </p:cNvPr>
+          <p:cNvCxnSpPr>
+            <a:cxnSpLocks/>
+          </p:cNvCxnSpPr>
+          <p:nvPr/>
+        </p:nvCxnSpPr>
+        <p:spPr>
+          <a:xfrm flipH="1" flipV="1">
+            <a:off x="6341806" y="3928255"/>
+            <a:ext cx="1623423" cy="174801"/>
+          </a:xfrm>
+          <a:prstGeom prst="straightConnector1">
+            <a:avLst/>
+          </a:prstGeom>
+          <a:ln w="127000">
+            <a:solidFill>
+              <a:srgbClr val="00B050"/>
+            </a:solidFill>
+            <a:tailEnd type="triangle"/>
+          </a:ln>
+        </p:spPr>
+        <p:style>
+          <a:lnRef idx="1">
+            <a:schemeClr val="accent1"/>
+          </a:lnRef>
+          <a:fillRef idx="0">
+            <a:schemeClr val="accent1"/>
+          </a:fillRef>
+          <a:effectRef idx="0">
+            <a:schemeClr val="accent1"/>
+          </a:effectRef>
+          <a:fontRef idx="minor">
+            <a:schemeClr val="tx1"/>
+          </a:fontRef>
+        </p:style>
+      </p:cxnSp>
+      <p:sp>
+        <p:nvSpPr>
+          <p:cNvPr id="16" name="AutoShape 9">
+            <a:extLst>
+              <a:ext uri="{FF2B5EF4-FFF2-40B4-BE49-F238E27FC236}">
+                <a16:creationId xmlns:a16="http://schemas.microsoft.com/office/drawing/2014/main" id="{40F315DA-B79C-C615-3DE7-EC73AF2C91A4}"/>
+              </a:ext>
+            </a:extLst>
+          </p:cNvPr>
+          <p:cNvSpPr>
+            <a:spLocks/>
+          </p:cNvSpPr>
+          <p:nvPr/>
+        </p:nvSpPr>
+        <p:spPr bwMode="auto">
+          <a:xfrm>
+            <a:off x="7894753" y="3695566"/>
+            <a:ext cx="1697166" cy="948286"/>
+          </a:xfrm>
+          <a:prstGeom prst="roundRect">
+            <a:avLst>
+              <a:gd name="adj" fmla="val 16667"/>
+            </a:avLst>
+          </a:prstGeom>
+          <a:solidFill>
+            <a:srgbClr val="00B050"/>
+          </a:solidFill>
+          <a:ln w="9525" cap="flat" cmpd="sng">
+            <a:solidFill>
+              <a:srgbClr val="C70000"/>
+            </a:solidFill>
+            <a:prstDash val="solid"/>
+            <a:round/>
+            <a:headEnd type="none" w="med" len="med"/>
+            <a:tailEnd type="triangle" w="med" len="med"/>
+          </a:ln>
+          <a:effectLst>
+            <a:outerShdw blurRad="38100" dist="23000" dir="5400000" algn="ctr" rotWithShape="0">
+              <a:srgbClr val="000000">
+                <a:alpha val="34999"/>
+              </a:srgbClr>
+            </a:outerShdw>
+          </a:effectLst>
+        </p:spPr>
+        <p:txBody>
+          <a:bodyPr lIns="32146" tIns="32146" rIns="32146" bIns="32146" anchor="ctr"/>
+          <a:lstStyle>
+            <a:lvl1pPr defTabSz="457200">
+              <a:defRPr sz="3600">
+                <a:solidFill>
+                  <a:srgbClr val="000000"/>
+                </a:solidFill>
+                <a:latin typeface="Helvetica Neue Light" charset="0"/>
+                <a:ea typeface="Helvetica Neue Light" charset="0"/>
+                <a:cs typeface="Helvetica Neue Light" charset="0"/>
+                <a:sym typeface="Helvetica Neue Light" charset="0"/>
+              </a:defRPr>
+            </a:lvl1pPr>
+            <a:lvl2pPr defTabSz="457200">
+              <a:defRPr sz="3600">
+                <a:solidFill>
+                  <a:srgbClr val="000000"/>
+                </a:solidFill>
+                <a:latin typeface="Helvetica Neue Light" charset="0"/>
+                <a:ea typeface="Helvetica Neue Light" charset="0"/>
+                <a:cs typeface="Helvetica Neue Light" charset="0"/>
+                <a:sym typeface="Helvetica Neue Light" charset="0"/>
+              </a:defRPr>
+            </a:lvl2pPr>
+            <a:lvl3pPr defTabSz="457200">
+              <a:defRPr sz="3600">
+                <a:solidFill>
+                  <a:srgbClr val="000000"/>
+                </a:solidFill>
+                <a:latin typeface="Helvetica Neue Light" charset="0"/>
+                <a:ea typeface="Helvetica Neue Light" charset="0"/>
+                <a:cs typeface="Helvetica Neue Light" charset="0"/>
+                <a:sym typeface="Helvetica Neue Light" charset="0"/>
+              </a:defRPr>
+            </a:lvl3pPr>
+            <a:lvl4pPr defTabSz="457200">
+              <a:defRPr sz="3600">
+                <a:solidFill>
+                  <a:srgbClr val="000000"/>
+                </a:solidFill>
+                <a:latin typeface="Helvetica Neue Light" charset="0"/>
+                <a:ea typeface="Helvetica Neue Light" charset="0"/>
+                <a:cs typeface="Helvetica Neue Light" charset="0"/>
+                <a:sym typeface="Helvetica Neue Light" charset="0"/>
+              </a:defRPr>
+            </a:lvl4pPr>
+            <a:lvl5pPr defTabSz="457200">
+              <a:defRPr sz="3600">
+                <a:solidFill>
+                  <a:srgbClr val="000000"/>
+                </a:solidFill>
+                <a:latin typeface="Helvetica Neue Light" charset="0"/>
+                <a:ea typeface="Helvetica Neue Light" charset="0"/>
+                <a:cs typeface="Helvetica Neue Light" charset="0"/>
+                <a:sym typeface="Helvetica Neue Light" charset="0"/>
+              </a:defRPr>
+            </a:lvl5pPr>
+            <a:lvl6pPr marL="457200" algn="ctr" defTabSz="457200" fontAlgn="base" hangingPunct="0">
+              <a:spcBef>
+                <a:spcPct val="0"/>
+              </a:spcBef>
+              <a:spcAft>
+                <a:spcPct val="0"/>
+              </a:spcAft>
+              <a:defRPr sz="3600">
+                <a:solidFill>
+                  <a:srgbClr val="000000"/>
+                </a:solidFill>
+                <a:latin typeface="Helvetica Neue Light" charset="0"/>
+                <a:ea typeface="Helvetica Neue Light" charset="0"/>
+                <a:cs typeface="Helvetica Neue Light" charset="0"/>
+                <a:sym typeface="Helvetica Neue Light" charset="0"/>
+              </a:defRPr>
+            </a:lvl6pPr>
+            <a:lvl7pPr marL="914400" algn="ctr" defTabSz="457200" fontAlgn="base" hangingPunct="0">
+              <a:spcBef>
+                <a:spcPct val="0"/>
+              </a:spcBef>
+              <a:spcAft>
+                <a:spcPct val="0"/>
+              </a:spcAft>
+              <a:defRPr sz="3600">
+                <a:solidFill>
+                  <a:srgbClr val="000000"/>
+                </a:solidFill>
+                <a:latin typeface="Helvetica Neue Light" charset="0"/>
+                <a:ea typeface="Helvetica Neue Light" charset="0"/>
+                <a:cs typeface="Helvetica Neue Light" charset="0"/>
+                <a:sym typeface="Helvetica Neue Light" charset="0"/>
+              </a:defRPr>
+            </a:lvl7pPr>
+            <a:lvl8pPr marL="1371600" algn="ctr" defTabSz="457200" fontAlgn="base" hangingPunct="0">
+              <a:spcBef>
+                <a:spcPct val="0"/>
+              </a:spcBef>
+              <a:spcAft>
+                <a:spcPct val="0"/>
+              </a:spcAft>
+              <a:defRPr sz="3600">
+                <a:solidFill>
+                  <a:srgbClr val="000000"/>
+                </a:solidFill>
+                <a:latin typeface="Helvetica Neue Light" charset="0"/>
+                <a:ea typeface="Helvetica Neue Light" charset="0"/>
+                <a:cs typeface="Helvetica Neue Light" charset="0"/>
+                <a:sym typeface="Helvetica Neue Light" charset="0"/>
+              </a:defRPr>
+            </a:lvl8pPr>
+            <a:lvl9pPr marL="1828800" algn="ctr" defTabSz="457200" fontAlgn="base" hangingPunct="0">
+              <a:spcBef>
+                <a:spcPct val="0"/>
+              </a:spcBef>
+              <a:spcAft>
+                <a:spcPct val="0"/>
+              </a:spcAft>
+              <a:defRPr sz="3600">
+                <a:solidFill>
+                  <a:srgbClr val="000000"/>
+                </a:solidFill>
+                <a:latin typeface="Helvetica Neue Light" charset="0"/>
+                <a:ea typeface="Helvetica Neue Light" charset="0"/>
+                <a:cs typeface="Helvetica Neue Light" charset="0"/>
+                <a:sym typeface="Helvetica Neue Light" charset="0"/>
+              </a:defRPr>
+            </a:lvl9pPr>
+          </a:lstStyle>
+          <a:p>
+            <a:r>
+              <a:rPr lang="en-US" altLang="en-US" sz="2400" dirty="0">
+                <a:solidFill>
+                  <a:srgbClr val="FFFFFF"/>
+                </a:solidFill>
+                <a:latin typeface="Calibri" panose="020F0502020204030204" pitchFamily="34" charset="0"/>
+                <a:ea typeface="Helvetica" panose="020B0604020202020204" pitchFamily="34" charset="0"/>
+                <a:cs typeface="Calibri" panose="020F0502020204030204" pitchFamily="34" charset="0"/>
+                <a:sym typeface="Helvetica" panose="020B0604020202020204" pitchFamily="34" charset="0"/>
+              </a:rPr>
+              <a:t>it’s ok here!</a:t>
+            </a:r>
+            <a:endParaRPr lang="en-US" altLang="en-US" sz="2400" i="1" dirty="0">
+              <a:solidFill>
+                <a:srgbClr val="FFFFFF"/>
+              </a:solidFill>
+              <a:latin typeface="Calibri" panose="020F0502020204030204" pitchFamily="34" charset="0"/>
+              <a:ea typeface="Helvetica" panose="020B0604020202020204" pitchFamily="34" charset="0"/>
+              <a:cs typeface="Calibri" panose="020F0502020204030204" pitchFamily="34" charset="0"/>
+              <a:sym typeface="Helvetica" panose="020B0604020202020204" pitchFamily="34" charset="0"/>
+            </a:endParaRPr>
+          </a:p>
+        </p:txBody>
+      </p:sp>
+      <p:sp>
+        <p:nvSpPr>
+          <p:cNvPr id="5" name="TextBox 4">
+            <a:extLst>
+              <a:ext uri="{FF2B5EF4-FFF2-40B4-BE49-F238E27FC236}">
+                <a16:creationId xmlns:a16="http://schemas.microsoft.com/office/drawing/2014/main" id="{0A1FF862-8A7D-3FBB-64E0-B244D7C4022C}"/>
+              </a:ext>
+            </a:extLst>
+          </p:cNvPr>
+          <p:cNvSpPr txBox="1"/>
+          <p:nvPr/>
+        </p:nvSpPr>
+        <p:spPr>
+          <a:xfrm>
+            <a:off x="10621108" y="773723"/>
+            <a:ext cx="0" cy="0"/>
+          </a:xfrm>
+          <a:prstGeom prst="rect">
+            <a:avLst/>
+          </a:prstGeom>
+          <a:noFill/>
+          <a:ln>
+            <a:noFill/>
+          </a:ln>
+        </p:spPr>
+        <p:style>
+          <a:lnRef idx="2">
+            <a:schemeClr val="accent1">
+              <a:shade val="50000"/>
+            </a:schemeClr>
+          </a:lnRef>
+          <a:fillRef idx="1">
+            <a:schemeClr val="accent1"/>
+          </a:fillRef>
+          <a:effectRef idx="0">
+            <a:schemeClr val="accent1"/>
+          </a:effectRef>
+          <a:fontRef idx="minor">
+            <a:schemeClr val="lt1"/>
+          </a:fontRef>
+        </p:style>
+        <p:txBody>
+          <a:bodyPr rot="0" spcFirstLastPara="0" vertOverflow="overflow" horzOverflow="overflow" vert="horz" wrap="none" lIns="91440" tIns="45720" rIns="91440" bIns="45720" numCol="1" spcCol="0" rtlCol="0" fromWordArt="0" anchor="ctr" anchorCtr="0" forceAA="0" compatLnSpc="1">
+            <a:prstTxWarp prst="textNoShape">
+              <a:avLst/>
+            </a:prstTxWarp>
+            <a:noAutofit/>
+          </a:bodyPr>
+          <a:lstStyle/>
+          <a:p>
+            <a:pPr algn="l"/>
+            <a:endParaRPr lang="en-US" dirty="0">
+              <a:solidFill>
+                <a:schemeClr val="tx1"/>
+              </a:solidFill>
+            </a:endParaRPr>
+          </a:p>
+        </p:txBody>
+      </p:sp>
+    </p:spTree>
+    <p:extLst>
+      <p:ext uri="{BB962C8B-B14F-4D97-AF65-F5344CB8AC3E}">
+        <p14:creationId xmlns:p14="http://schemas.microsoft.com/office/powerpoint/2010/main" val="1960269477"/>
+      </p:ext>
+    </p:extLst>
+  </p:cSld>
+  <p:clrMapOvr>
+    <a:masterClrMapping/>
+  </p:clrMapOvr>
+  <p:timing>
+    <p:tnLst>
+      <p:par>
+        <p:cTn id="1" dur="indefinite" restart="never" nodeType="tmRoot">
+          <p:childTnLst>
+            <p:seq concurrent="1" nextAc="seek">
+              <p:cTn id="2" dur="indefinite" nodeType="mainSeq">
+                <p:childTnLst>
+                  <p:par>
+                    <p:cTn id="3" fill="hold">
+                      <p:stCondLst>
+                        <p:cond delay="indefinite"/>
+                      </p:stCondLst>
+                      <p:childTnLst>
+                        <p:par>
+                          <p:cTn id="4" fill="hold">
+                            <p:stCondLst>
+                              <p:cond delay="0"/>
+                            </p:stCondLst>
+                            <p:childTnLst>
+                              <p:par>
+                                <p:cTn id="5" presetID="1" presetClass="entr" presetSubtype="0" fill="hold" grpId="0" nodeType="clickEffect">
+                                  <p:stCondLst>
+                                    <p:cond delay="0"/>
+                                  </p:stCondLst>
+                                  <p:childTnLst>
+                                    <p:set>
+                                      <p:cBhvr>
+                                        <p:cTn id="6" dur="1" fill="hold">
+                                          <p:stCondLst>
+                                            <p:cond delay="0"/>
+                                          </p:stCondLst>
+                                        </p:cTn>
+                                        <p:tgtEl>
+                                          <p:spTgt spid="11"/>
+                                        </p:tgtEl>
+                                        <p:attrNameLst>
+                                          <p:attrName>style.visibility</p:attrName>
+                                        </p:attrNameLst>
+                                      </p:cBhvr>
+                                      <p:to>
+                                        <p:strVal val="visible"/>
+                                      </p:to>
+                                    </p:set>
+                                  </p:childTnLst>
+                                </p:cTn>
+                              </p:par>
+                              <p:par>
+                                <p:cTn id="7" presetID="1" presetClass="entr" presetSubtype="0" fill="hold" nodeType="withEffect">
+                                  <p:stCondLst>
+                                    <p:cond delay="0"/>
+                                  </p:stCondLst>
+                                  <p:childTnLst>
+                                    <p:set>
+                                      <p:cBhvr>
+                                        <p:cTn id="8" dur="1" fill="hold">
+                                          <p:stCondLst>
+                                            <p:cond delay="0"/>
+                                          </p:stCondLst>
+                                        </p:cTn>
+                                        <p:tgtEl>
+                                          <p:spTgt spid="15"/>
+                                        </p:tgtEl>
+                                        <p:attrNameLst>
+                                          <p:attrName>style.visibility</p:attrName>
+                                        </p:attrNameLst>
+                                      </p:cBhvr>
+                                      <p:to>
+                                        <p:strVal val="visible"/>
+                                      </p:to>
+                                    </p:set>
+                                  </p:childTnLst>
+                                </p:cTn>
+                              </p:par>
+                            </p:childTnLst>
+                          </p:cTn>
+                        </p:par>
+                      </p:childTnLst>
+                    </p:cTn>
+                  </p:par>
+                  <p:par>
+                    <p:cTn id="9" fill="hold">
+                      <p:stCondLst>
+                        <p:cond delay="indefinite"/>
+                      </p:stCondLst>
+                      <p:childTnLst>
+                        <p:par>
+                          <p:cTn id="10" fill="hold">
+                            <p:stCondLst>
+                              <p:cond delay="0"/>
+                            </p:stCondLst>
+                            <p:childTnLst>
+                              <p:par>
+                                <p:cTn id="11" presetID="1" presetClass="entr" presetSubtype="0" fill="hold" grpId="0" nodeType="clickEffect">
+                                  <p:stCondLst>
+                                    <p:cond delay="0"/>
+                                  </p:stCondLst>
+                                  <p:childTnLst>
+                                    <p:set>
+                                      <p:cBhvr>
+                                        <p:cTn id="12" dur="1" fill="hold">
+                                          <p:stCondLst>
+                                            <p:cond delay="0"/>
+                                          </p:stCondLst>
+                                        </p:cTn>
+                                        <p:tgtEl>
+                                          <p:spTgt spid="16"/>
+                                        </p:tgtEl>
+                                        <p:attrNameLst>
+                                          <p:attrName>style.visibility</p:attrName>
+                                        </p:attrNameLst>
+                                      </p:cBhvr>
+                                      <p:to>
+                                        <p:strVal val="visible"/>
+                                      </p:to>
+                                    </p:set>
+                                  </p:childTnLst>
+                                </p:cTn>
+                              </p:par>
+                              <p:par>
+                                <p:cTn id="13" presetID="1" presetClass="entr" presetSubtype="0" fill="hold" nodeType="withEffect">
+                                  <p:stCondLst>
+                                    <p:cond delay="0"/>
+                                  </p:stCondLst>
+                                  <p:childTnLst>
+                                    <p:set>
+                                      <p:cBhvr>
+                                        <p:cTn id="14" dur="1" fill="hold">
+                                          <p:stCondLst>
+                                            <p:cond delay="0"/>
+                                          </p:stCondLst>
+                                        </p:cTn>
+                                        <p:tgtEl>
+                                          <p:spTgt spid="17"/>
+                                        </p:tgtEl>
+                                        <p:attrNameLst>
+                                          <p:attrName>style.visibility</p:attrName>
+                                        </p:attrNameLst>
+                                      </p:cBhvr>
+                                      <p:to>
+                                        <p:strVal val="visible"/>
+                                      </p:to>
+                                    </p:set>
+                                  </p:childTnLst>
+                                </p:cTn>
+                              </p:par>
+                            </p:childTnLst>
+                          </p:cTn>
+                        </p:par>
+                      </p:childTnLst>
+                    </p:cTn>
+                  </p:par>
+                </p:childTnLst>
+              </p:cTn>
+              <p:prevCondLst>
+                <p:cond evt="onPrev" delay="0">
+                  <p:tgtEl>
+                    <p:sldTgt/>
+                  </p:tgtEl>
+                </p:cond>
+              </p:prevCondLst>
+              <p:nextCondLst>
+                <p:cond evt="onNext" delay="0">
+                  <p:tgtEl>
+                    <p:sldTgt/>
+                  </p:tgtEl>
+                </p:cond>
+              </p:nextCondLst>
+            </p:seq>
+          </p:childTnLst>
+        </p:cTn>
+      </p:par>
+    </p:tnLst>
+    <p:bldLst>
+      <p:bldP spid="11" grpId="0" animBg="1"/>
+      <p:bldP spid="16" grpId="0" animBg="1"/>
+    </p:bldLst>
+  </p:timing>
+</p:sld>
+</file>
+
+<file path=ppt/slides/slide16.xml><?xml version="1.0" encoding="utf-8"?>
+<p:sld xmlns:a="http://schemas.openxmlformats.org/drawingml/2006/main" xmlns:r="http://schemas.openxmlformats.org/officeDocument/2006/relationships" xmlns:p="http://schemas.openxmlformats.org/presentationml/2006/main">
+  <p:cSld>
+    <p:spTree>
+      <p:nvGrpSpPr>
+        <p:cNvPr id="1" name="">
+          <a:extLst>
+            <a:ext uri="{FF2B5EF4-FFF2-40B4-BE49-F238E27FC236}">
               <a16:creationId xmlns:a16="http://schemas.microsoft.com/office/drawing/2014/main" id="{52DA1C12-5A51-3F91-C2D4-5A72137FA76C}"/>
             </a:ext>
           </a:extLst>
@@ -12419,7 +14773,7 @@
           <a:p>
             <a:r>
               <a:rPr lang="en-US" dirty="0"/>
-              <a:t>Some Libraries Use </a:t>
+              <a:t>Some libraries use </a:t>
             </a:r>
             <a:r>
               <a:rPr lang="en-US" dirty="0">
@@ -12433,7 +14787,7 @@
             </a:r>
             <a:r>
               <a:rPr lang="en-US" dirty="0"/>
-              <a:t>: Common But Dangerous</a:t>
+              <a:t>: Common but dangerous</a:t>
             </a:r>
           </a:p>
         </p:txBody>
@@ -12462,7 +14816,7 @@
             <a:fld id="{20F37917-FD3A-4669-9018-DA04BCDD3D75}" type="slidenum">
               <a:rPr lang="en-US" smtClean="0"/>
               <a:pPr/>
-              <a:t>14</a:t>
+              <a:t>16</a:t>
             </a:fld>
             <a:endParaRPr lang="en-US"/>
           </a:p>
@@ -14264,7 +16618,7 @@
 </p:sld>
 </file>
 
-<file path=ppt/slides/slide15.xml><?xml version="1.0" encoding="utf-8"?>
+<file path=ppt/slides/slide17.xml><?xml version="1.0" encoding="utf-8"?>
 <p:sld xmlns:a="http://schemas.openxmlformats.org/drawingml/2006/main" xmlns:r="http://schemas.openxmlformats.org/officeDocument/2006/relationships" xmlns:p="http://schemas.openxmlformats.org/presentationml/2006/main">
   <p:cSld>
     <p:spTree>
@@ -14334,7 +16688,7 @@
           <a:p>
             <a:fld id="{20F37917-FD3A-4669-9018-DA04BCDD3D75}" type="slidenum">
               <a:rPr lang="en-US" smtClean="0"/>
-              <a:t>15</a:t>
+              <a:t>17</a:t>
             </a:fld>
             <a:endParaRPr lang="en-US"/>
           </a:p>
@@ -15759,6 +18113,199 @@
           </a:p>
         </p:txBody>
       </p:sp>
+      <p:sp>
+        <p:nvSpPr>
+          <p:cNvPr id="3" name="AutoShape 9">
+            <a:extLst>
+              <a:ext uri="{FF2B5EF4-FFF2-40B4-BE49-F238E27FC236}">
+                <a16:creationId xmlns:a16="http://schemas.microsoft.com/office/drawing/2014/main" id="{C6EEDF77-9A68-18CA-1920-9D3DB97FC7D2}"/>
+              </a:ext>
+            </a:extLst>
+          </p:cNvPr>
+          <p:cNvSpPr>
+            <a:spLocks/>
+          </p:cNvSpPr>
+          <p:nvPr/>
+        </p:nvSpPr>
+        <p:spPr bwMode="auto">
+          <a:xfrm>
+            <a:off x="6862117" y="1563799"/>
+            <a:ext cx="4275812" cy="4357500"/>
+          </a:xfrm>
+          <a:prstGeom prst="roundRect">
+            <a:avLst>
+              <a:gd name="adj" fmla="val 16667"/>
+            </a:avLst>
+          </a:prstGeom>
+          <a:solidFill>
+            <a:srgbClr val="00B050"/>
+          </a:solidFill>
+          <a:ln w="9525" cap="flat" cmpd="sng">
+            <a:solidFill>
+              <a:srgbClr val="C70000"/>
+            </a:solidFill>
+            <a:prstDash val="solid"/>
+            <a:round/>
+            <a:headEnd type="none" w="med" len="med"/>
+            <a:tailEnd type="triangle" w="med" len="med"/>
+          </a:ln>
+          <a:effectLst>
+            <a:outerShdw blurRad="38100" dist="23000" dir="5400000" algn="ctr" rotWithShape="0">
+              <a:srgbClr val="000000">
+                <a:alpha val="34999"/>
+              </a:srgbClr>
+            </a:outerShdw>
+          </a:effectLst>
+        </p:spPr>
+        <p:txBody>
+          <a:bodyPr lIns="32146" tIns="32146" rIns="32146" bIns="32146" anchor="ctr"/>
+          <a:lstStyle>
+            <a:lvl1pPr defTabSz="457200">
+              <a:defRPr sz="3600">
+                <a:solidFill>
+                  <a:srgbClr val="000000"/>
+                </a:solidFill>
+                <a:latin typeface="Calibri" charset="0"/>
+                <a:cs typeface="Calibri" charset="0"/>
+              </a:defRPr>
+            </a:lvl1pPr>
+            <a:lvl2pPr defTabSz="457200">
+              <a:defRPr sz="3600">
+                <a:solidFill>
+                  <a:srgbClr val="000000"/>
+                </a:solidFill>
+                <a:latin typeface="Calibri" charset="0"/>
+                <a:cs typeface="Calibri" charset="0"/>
+              </a:defRPr>
+            </a:lvl2pPr>
+            <a:lvl3pPr defTabSz="457200">
+              <a:defRPr sz="3600">
+                <a:solidFill>
+                  <a:srgbClr val="000000"/>
+                </a:solidFill>
+                <a:latin typeface="Calibri" charset="0"/>
+                <a:cs typeface="Calibri" charset="0"/>
+              </a:defRPr>
+            </a:lvl3pPr>
+            <a:lvl4pPr defTabSz="457200">
+              <a:defRPr sz="3600">
+                <a:solidFill>
+                  <a:srgbClr val="000000"/>
+                </a:solidFill>
+                <a:latin typeface="Calibri" charset="0"/>
+                <a:cs typeface="Calibri" charset="0"/>
+              </a:defRPr>
+            </a:lvl4pPr>
+            <a:lvl5pPr defTabSz="457200">
+              <a:defRPr sz="3600">
+                <a:solidFill>
+                  <a:srgbClr val="000000"/>
+                </a:solidFill>
+                <a:latin typeface="Calibri" charset="0"/>
+                <a:cs typeface="Calibri" charset="0"/>
+              </a:defRPr>
+            </a:lvl5pPr>
+            <a:lvl6pPr marL="457200" algn="ctr" defTabSz="457200" fontAlgn="base" hangingPunct="0">
+              <a:spcBef>
+                <a:spcPct val="0"/>
+              </a:spcBef>
+              <a:spcAft>
+                <a:spcPct val="0"/>
+              </a:spcAft>
+              <a:defRPr sz="3600">
+                <a:solidFill>
+                  <a:srgbClr val="000000"/>
+                </a:solidFill>
+                <a:latin typeface="Calibri" charset="0"/>
+                <a:cs typeface="Calibri" charset="0"/>
+              </a:defRPr>
+            </a:lvl6pPr>
+            <a:lvl7pPr marL="914400" algn="ctr" defTabSz="457200" fontAlgn="base" hangingPunct="0">
+              <a:spcBef>
+                <a:spcPct val="0"/>
+              </a:spcBef>
+              <a:spcAft>
+                <a:spcPct val="0"/>
+              </a:spcAft>
+              <a:defRPr sz="3600">
+                <a:solidFill>
+                  <a:srgbClr val="000000"/>
+                </a:solidFill>
+                <a:latin typeface="Calibri" charset="0"/>
+                <a:cs typeface="Calibri" charset="0"/>
+              </a:defRPr>
+            </a:lvl7pPr>
+            <a:lvl8pPr marL="1371600" algn="ctr" defTabSz="457200" fontAlgn="base" hangingPunct="0">
+              <a:spcBef>
+                <a:spcPct val="0"/>
+              </a:spcBef>
+              <a:spcAft>
+                <a:spcPct val="0"/>
+              </a:spcAft>
+              <a:defRPr sz="3600">
+                <a:solidFill>
+                  <a:srgbClr val="000000"/>
+                </a:solidFill>
+                <a:latin typeface="Calibri" charset="0"/>
+                <a:cs typeface="Calibri" charset="0"/>
+              </a:defRPr>
+            </a:lvl8pPr>
+            <a:lvl9pPr marL="1828800" algn="ctr" defTabSz="457200" fontAlgn="base" hangingPunct="0">
+              <a:spcBef>
+                <a:spcPct val="0"/>
+              </a:spcBef>
+              <a:spcAft>
+                <a:spcPct val="0"/>
+              </a:spcAft>
+              <a:defRPr sz="3600">
+                <a:solidFill>
+                  <a:srgbClr val="000000"/>
+                </a:solidFill>
+                <a:latin typeface="Calibri" charset="0"/>
+                <a:cs typeface="Calibri" charset="0"/>
+              </a:defRPr>
+            </a:lvl9pPr>
+          </a:lstStyle>
+          <a:p>
+            <a:r>
+              <a:rPr lang="en-US" altLang="en-US" sz="2400" dirty="0">
+                <a:solidFill>
+                  <a:srgbClr val="FFFFFF"/>
+                </a:solidFill>
+                <a:latin typeface="Calibri" panose="020F0502020204030204" pitchFamily="34" charset="0"/>
+                <a:cs typeface="Calibri" panose="020F0502020204030204" pitchFamily="34" charset="0"/>
+              </a:rPr>
+              <a:t>Allows you to define rules or invariants that your code must always satisfy. Framework will generate hundreds of randomized inputs itself.</a:t>
+            </a:r>
+            <a:br>
+              <a:rPr lang="en-US" altLang="en-US" sz="2400" dirty="0">
+                <a:solidFill>
+                  <a:srgbClr val="FFFFFF"/>
+                </a:solidFill>
+                <a:latin typeface="Calibri" panose="020F0502020204030204" pitchFamily="34" charset="0"/>
+                <a:cs typeface="Calibri" panose="020F0502020204030204" pitchFamily="34" charset="0"/>
+              </a:rPr>
+            </a:br>
+            <a:r>
+              <a:rPr lang="en-US" altLang="en-US" sz="2400" dirty="0">
+                <a:solidFill>
+                  <a:srgbClr val="FFFFFF"/>
+                </a:solidFill>
+                <a:latin typeface="Calibri" panose="020F0502020204030204" pitchFamily="34" charset="0"/>
+                <a:cs typeface="Calibri" panose="020F0502020204030204" pitchFamily="34" charset="0"/>
+              </a:rPr>
+              <a:t>Example: instead of writing tests like “if input is 2 and 3, return 5”, you would write rules like “sum must always be larger than or equal to both inputs if both are positive”</a:t>
+            </a:r>
+            <a:endParaRPr lang="en-US" altLang="en-US" sz="2400" dirty="0">
+              <a:solidFill>
+                <a:srgbClr val="FFC000"/>
+              </a:solidFill>
+              <a:latin typeface="Calibri" panose="020F0502020204030204" pitchFamily="34" charset="0"/>
+              <a:cs typeface="Calibri" panose="020F0502020204030204" pitchFamily="34" charset="0"/>
+            </a:endParaRPr>
+          </a:p>
+        </p:txBody>
+      </p:sp>
     </p:spTree>
     <p:extLst>
       <p:ext uri="{BB962C8B-B14F-4D97-AF65-F5344CB8AC3E}">
@@ -15769,94 +18316,88 @@
   <p:clrMapOvr>
     <a:masterClrMapping/>
   </p:clrMapOvr>
+  <p:timing>
+    <p:tnLst>
+      <p:par>
+        <p:cTn id="1" dur="indefinite" restart="never" nodeType="tmRoot">
+          <p:childTnLst>
+            <p:seq concurrent="1" nextAc="seek">
+              <p:cTn id="2" dur="indefinite" nodeType="mainSeq">
+                <p:childTnLst>
+                  <p:par>
+                    <p:cTn id="3" fill="hold">
+                      <p:stCondLst>
+                        <p:cond delay="indefinite"/>
+                      </p:stCondLst>
+                      <p:childTnLst>
+                        <p:par>
+                          <p:cTn id="4" fill="hold">
+                            <p:stCondLst>
+                              <p:cond delay="0"/>
+                            </p:stCondLst>
+                            <p:childTnLst>
+                              <p:par>
+                                <p:cTn id="5" presetID="1" presetClass="entr" presetSubtype="0" fill="hold" grpId="0" nodeType="clickEffect">
+                                  <p:stCondLst>
+                                    <p:cond delay="0"/>
+                                  </p:stCondLst>
+                                  <p:childTnLst>
+                                    <p:set>
+                                      <p:cBhvr>
+                                        <p:cTn id="6" dur="1" fill="hold">
+                                          <p:stCondLst>
+                                            <p:cond delay="0"/>
+                                          </p:stCondLst>
+                                        </p:cTn>
+                                        <p:tgtEl>
+                                          <p:spTgt spid="3"/>
+                                        </p:tgtEl>
+                                        <p:attrNameLst>
+                                          <p:attrName>style.visibility</p:attrName>
+                                        </p:attrNameLst>
+                                      </p:cBhvr>
+                                      <p:to>
+                                        <p:strVal val="visible"/>
+                                      </p:to>
+                                    </p:set>
+                                  </p:childTnLst>
+                                </p:cTn>
+                              </p:par>
+                            </p:childTnLst>
+                          </p:cTn>
+                        </p:par>
+                      </p:childTnLst>
+                    </p:cTn>
+                  </p:par>
+                </p:childTnLst>
+              </p:cTn>
+              <p:prevCondLst>
+                <p:cond evt="onPrev" delay="0">
+                  <p:tgtEl>
+                    <p:sldTgt/>
+                  </p:tgtEl>
+                </p:cond>
+              </p:prevCondLst>
+              <p:nextCondLst>
+                <p:cond evt="onNext" delay="0">
+                  <p:tgtEl>
+                    <p:sldTgt/>
+                  </p:tgtEl>
+                </p:cond>
+              </p:nextCondLst>
+            </p:seq>
+          </p:childTnLst>
+        </p:cTn>
+      </p:par>
+    </p:tnLst>
+    <p:bldLst>
+      <p:bldP spid="3" grpId="0" animBg="1"/>
+    </p:bldLst>
+  </p:timing>
 </p:sld>
 </file>
 
-<file path=ppt/slides/slide16.xml><?xml version="1.0" encoding="utf-8"?>
-<p:sld xmlns:a="http://schemas.openxmlformats.org/drawingml/2006/main" xmlns:r="http://schemas.openxmlformats.org/officeDocument/2006/relationships" xmlns:p="http://schemas.openxmlformats.org/presentationml/2006/main">
-  <p:cSld>
-    <p:spTree>
-      <p:nvGrpSpPr>
-        <p:cNvPr id="1" name=""/>
-        <p:cNvGrpSpPr/>
-        <p:nvPr/>
-      </p:nvGrpSpPr>
-      <p:grpSpPr>
-        <a:xfrm>
-          <a:off x="0" y="0"/>
-          <a:ext cx="0" cy="0"/>
-          <a:chOff x="0" y="0"/>
-          <a:chExt cx="0" cy="0"/>
-        </a:xfrm>
-      </p:grpSpPr>
-      <p:sp>
-        <p:nvSpPr>
-          <p:cNvPr id="2" name="Title 1">
-            <a:extLst>
-              <a:ext uri="{FF2B5EF4-FFF2-40B4-BE49-F238E27FC236}">
-                <a16:creationId xmlns:a16="http://schemas.microsoft.com/office/drawing/2014/main" id="{34AF0F7C-58CC-2B40-78B5-099AA5496639}"/>
-              </a:ext>
-            </a:extLst>
-          </p:cNvPr>
-          <p:cNvSpPr>
-            <a:spLocks noGrp="1"/>
-          </p:cNvSpPr>
-          <p:nvPr>
-            <p:ph type="title"/>
-          </p:nvPr>
-        </p:nvSpPr>
-        <p:spPr/>
-        <p:txBody>
-          <a:bodyPr/>
-          <a:lstStyle/>
-          <a:p>
-            <a:endParaRPr lang="en-US"/>
-          </a:p>
-        </p:txBody>
-      </p:sp>
-      <p:sp>
-        <p:nvSpPr>
-          <p:cNvPr id="3" name="Slide Number Placeholder 2">
-            <a:extLst>
-              <a:ext uri="{FF2B5EF4-FFF2-40B4-BE49-F238E27FC236}">
-                <a16:creationId xmlns:a16="http://schemas.microsoft.com/office/drawing/2014/main" id="{64FA60E0-0FF8-360D-FB88-0D0BC5A52220}"/>
-              </a:ext>
-            </a:extLst>
-          </p:cNvPr>
-          <p:cNvSpPr>
-            <a:spLocks noGrp="1"/>
-          </p:cNvSpPr>
-          <p:nvPr>
-            <p:ph type="sldNum" sz="quarter" idx="12"/>
-          </p:nvPr>
-        </p:nvSpPr>
-        <p:spPr/>
-        <p:txBody>
-          <a:bodyPr/>
-          <a:lstStyle/>
-          <a:p>
-            <a:fld id="{20F37917-FD3A-4669-9018-DA04BCDD3D75}" type="slidenum">
-              <a:rPr lang="en-US" smtClean="0"/>
-              <a:t>16</a:t>
-            </a:fld>
-            <a:endParaRPr lang="en-US"/>
-          </a:p>
-        </p:txBody>
-      </p:sp>
-    </p:spTree>
-    <p:extLst>
-      <p:ext uri="{BB962C8B-B14F-4D97-AF65-F5344CB8AC3E}">
-        <p14:creationId xmlns:p14="http://schemas.microsoft.com/office/powerpoint/2010/main" val="341489238"/>
-      </p:ext>
-    </p:extLst>
-  </p:cSld>
-  <p:clrMapOvr>
-    <a:masterClrMapping/>
-  </p:clrMapOvr>
-</p:sld>
-</file>
-
-<file path=ppt/slides/slide17.xml><?xml version="1.0" encoding="utf-8"?>
+<file path=ppt/slides/slide18.xml><?xml version="1.0" encoding="utf-8"?>
 <p:sld xmlns:a="http://schemas.openxmlformats.org/drawingml/2006/main" xmlns:r="http://schemas.openxmlformats.org/officeDocument/2006/relationships" xmlns:p="http://schemas.openxmlformats.org/presentationml/2006/main">
   <p:cSld>
     <p:spTree>
@@ -15931,7 +18472,7 @@
             <a:fld id="{20F37917-FD3A-4669-9018-DA04BCDD3D75}" type="slidenum">
               <a:rPr lang="en-US" smtClean="0"/>
               <a:pPr/>
-              <a:t>17</a:t>
+              <a:t>18</a:t>
             </a:fld>
             <a:endParaRPr lang="en-US"/>
           </a:p>
@@ -16091,7 +18632,15 @@
             </a:r>
             <a:r>
               <a:rPr lang="en-US" dirty="0"/>
-              <a:t> checking, the contracts (preconditions and postconditions) of your code</a:t>
+              <a:t> checking, the contracts (preconditions and postconditions) of your code. Using it with </a:t>
+            </a:r>
+            <a:r>
+              <a:rPr lang="en-US" dirty="0" err="1"/>
+              <a:t>ESLint</a:t>
+            </a:r>
+            <a:r>
+              <a:rPr lang="en-US" dirty="0"/>
+              <a:t> rules helps!</a:t>
             </a:r>
           </a:p>
           <a:p>
@@ -16121,7 +18670,7 @@
 </p:sld>
 </file>
 
-<file path=ppt/slides/slide18.xml><?xml version="1.0" encoding="utf-8"?>
+<file path=ppt/slides/slide19.xml><?xml version="1.0" encoding="utf-8"?>
 <p:sld xmlns:a="http://schemas.openxmlformats.org/drawingml/2006/main" xmlns:r="http://schemas.openxmlformats.org/officeDocument/2006/relationships" xmlns:p="http://schemas.openxmlformats.org/presentationml/2006/main">
   <p:cSld>
     <p:spTree>
@@ -16234,7 +18783,7 @@
           <a:p>
             <a:fld id="{20F37917-FD3A-4669-9018-DA04BCDD3D75}" type="slidenum">
               <a:rPr lang="en-US" smtClean="0"/>
-              <a:t>18</a:t>
+              <a:t>19</a:t>
             </a:fld>
             <a:endParaRPr lang="en-US"/>
           </a:p>
@@ -16244,168 +18793,6 @@
     <p:extLst>
       <p:ext uri="{BB962C8B-B14F-4D97-AF65-F5344CB8AC3E}">
         <p14:creationId xmlns:p14="http://schemas.microsoft.com/office/powerpoint/2010/main" val="166692002"/>
-      </p:ext>
-    </p:extLst>
-  </p:cSld>
-  <p:clrMapOvr>
-    <a:masterClrMapping/>
-  </p:clrMapOvr>
-</p:sld>
-</file>
-
-<file path=ppt/slides/slide19.xml><?xml version="1.0" encoding="utf-8"?>
-<p:sld xmlns:a="http://schemas.openxmlformats.org/drawingml/2006/main" xmlns:r="http://schemas.openxmlformats.org/officeDocument/2006/relationships" xmlns:p="http://schemas.openxmlformats.org/presentationml/2006/main">
-  <p:cSld>
-    <p:spTree>
-      <p:nvGrpSpPr>
-        <p:cNvPr id="1" name="">
-          <a:extLst>
-            <a:ext uri="{FF2B5EF4-FFF2-40B4-BE49-F238E27FC236}">
-              <a16:creationId xmlns:a16="http://schemas.microsoft.com/office/drawing/2014/main" id="{3CE139C2-5471-E61B-A6FD-8D2422B399FD}"/>
-            </a:ext>
-          </a:extLst>
-        </p:cNvPr>
-        <p:cNvGrpSpPr/>
-        <p:nvPr/>
-      </p:nvGrpSpPr>
-      <p:grpSpPr>
-        <a:xfrm>
-          <a:off x="0" y="0"/>
-          <a:ext cx="0" cy="0"/>
-          <a:chOff x="0" y="0"/>
-          <a:chExt cx="0" cy="0"/>
-        </a:xfrm>
-      </p:grpSpPr>
-      <p:sp>
-        <p:nvSpPr>
-          <p:cNvPr id="2" name="Title 1">
-            <a:extLst>
-              <a:ext uri="{FF2B5EF4-FFF2-40B4-BE49-F238E27FC236}">
-                <a16:creationId xmlns:a16="http://schemas.microsoft.com/office/drawing/2014/main" id="{6C17E5B9-5FCF-FEA0-EF85-C7492DA19659}"/>
-              </a:ext>
-            </a:extLst>
-          </p:cNvPr>
-          <p:cNvSpPr>
-            <a:spLocks noGrp="1"/>
-          </p:cNvSpPr>
-          <p:nvPr>
-            <p:ph type="title"/>
-          </p:nvPr>
-        </p:nvSpPr>
-        <p:spPr>
-          <a:xfrm>
-            <a:off x="838200" y="18255"/>
-            <a:ext cx="10515600" cy="1325563"/>
-          </a:xfrm>
-        </p:spPr>
-        <p:txBody>
-          <a:bodyPr/>
-          <a:lstStyle/>
-          <a:p>
-            <a:r>
-              <a:rPr lang="en-US"/>
-              <a:t>Code Coverage</a:t>
-            </a:r>
-          </a:p>
-        </p:txBody>
-      </p:sp>
-      <p:sp>
-        <p:nvSpPr>
-          <p:cNvPr id="4" name="Slide Number Placeholder 3">
-            <a:extLst>
-              <a:ext uri="{FF2B5EF4-FFF2-40B4-BE49-F238E27FC236}">
-                <a16:creationId xmlns:a16="http://schemas.microsoft.com/office/drawing/2014/main" id="{0A29A8B9-A610-C4FD-2926-B7BD4F00E298}"/>
-              </a:ext>
-            </a:extLst>
-          </p:cNvPr>
-          <p:cNvSpPr>
-            <a:spLocks noGrp="1"/>
-          </p:cNvSpPr>
-          <p:nvPr>
-            <p:ph type="sldNum" sz="quarter" idx="12"/>
-          </p:nvPr>
-        </p:nvSpPr>
-        <p:spPr>
-          <a:xfrm>
-            <a:off x="8610600" y="6356350"/>
-            <a:ext cx="2743200" cy="365125"/>
-          </a:xfrm>
-        </p:spPr>
-        <p:txBody>
-          <a:bodyPr/>
-          <a:lstStyle/>
-          <a:p>
-            <a:fld id="{20F37917-FD3A-4669-9018-DA04BCDD3D75}" type="slidenum">
-              <a:rPr lang="en-US" smtClean="0"/>
-              <a:pPr/>
-              <a:t>19</a:t>
-            </a:fld>
-            <a:endParaRPr lang="en-US"/>
-          </a:p>
-        </p:txBody>
-      </p:sp>
-      <p:sp>
-        <p:nvSpPr>
-          <p:cNvPr id="10" name="Content Placeholder 9">
-            <a:extLst>
-              <a:ext uri="{FF2B5EF4-FFF2-40B4-BE49-F238E27FC236}">
-                <a16:creationId xmlns:a16="http://schemas.microsoft.com/office/drawing/2014/main" id="{5BA32395-303A-EA3B-B383-3B063412234B}"/>
-              </a:ext>
-            </a:extLst>
-          </p:cNvPr>
-          <p:cNvSpPr>
-            <a:spLocks noGrp="1"/>
-          </p:cNvSpPr>
-          <p:nvPr>
-            <p:ph idx="1"/>
-          </p:nvPr>
-        </p:nvSpPr>
-        <p:spPr>
-          <a:xfrm>
-            <a:off x="838200" y="1500159"/>
-            <a:ext cx="7887346" cy="5221316"/>
-          </a:xfrm>
-        </p:spPr>
-        <p:txBody>
-          <a:bodyPr>
-            <a:normAutofit/>
-          </a:bodyPr>
-          <a:lstStyle/>
-          <a:p>
-            <a:r>
-              <a:rPr lang="en-US" dirty="0"/>
-              <a:t>The industry standard answer for “have I written enough tests”</a:t>
-            </a:r>
-          </a:p>
-          <a:p>
-            <a:r>
-              <a:rPr lang="en-US" dirty="0"/>
-              <a:t>Measures “how much of your code” is exercised by your tests</a:t>
-            </a:r>
-          </a:p>
-          <a:p>
-            <a:r>
-              <a:rPr lang="en-US" dirty="0"/>
-              <a:t>If none of your test even </a:t>
-            </a:r>
-            <a:r>
-              <a:rPr lang="en-US" i="1" dirty="0"/>
-              <a:t>execute</a:t>
-            </a:r>
-            <a:r>
-              <a:rPr lang="en-US" dirty="0"/>
-              <a:t> a piece of code, it’s not being tested!</a:t>
-            </a:r>
-          </a:p>
-          <a:p>
-            <a:endParaRPr lang="en-US" dirty="0"/>
-          </a:p>
-        </p:txBody>
-      </p:sp>
-    </p:spTree>
-    <p:extLst>
-      <p:ext uri="{BB962C8B-B14F-4D97-AF65-F5344CB8AC3E}">
-        <p14:creationId xmlns:p14="http://schemas.microsoft.com/office/powerpoint/2010/main" val="1563341513"/>
       </p:ext>
     </p:extLst>
   </p:cSld>
@@ -16603,6 +18990,168 @@
         <p:cNvPr id="1" name="">
           <a:extLst>
             <a:ext uri="{FF2B5EF4-FFF2-40B4-BE49-F238E27FC236}">
+              <a16:creationId xmlns:a16="http://schemas.microsoft.com/office/drawing/2014/main" id="{3CE139C2-5471-E61B-A6FD-8D2422B399FD}"/>
+            </a:ext>
+          </a:extLst>
+        </p:cNvPr>
+        <p:cNvGrpSpPr/>
+        <p:nvPr/>
+      </p:nvGrpSpPr>
+      <p:grpSpPr>
+        <a:xfrm>
+          <a:off x="0" y="0"/>
+          <a:ext cx="0" cy="0"/>
+          <a:chOff x="0" y="0"/>
+          <a:chExt cx="0" cy="0"/>
+        </a:xfrm>
+      </p:grpSpPr>
+      <p:sp>
+        <p:nvSpPr>
+          <p:cNvPr id="2" name="Title 1">
+            <a:extLst>
+              <a:ext uri="{FF2B5EF4-FFF2-40B4-BE49-F238E27FC236}">
+                <a16:creationId xmlns:a16="http://schemas.microsoft.com/office/drawing/2014/main" id="{6C17E5B9-5FCF-FEA0-EF85-C7492DA19659}"/>
+              </a:ext>
+            </a:extLst>
+          </p:cNvPr>
+          <p:cNvSpPr>
+            <a:spLocks noGrp="1"/>
+          </p:cNvSpPr>
+          <p:nvPr>
+            <p:ph type="title"/>
+          </p:nvPr>
+        </p:nvSpPr>
+        <p:spPr>
+          <a:xfrm>
+            <a:off x="838200" y="18255"/>
+            <a:ext cx="10515600" cy="1325563"/>
+          </a:xfrm>
+        </p:spPr>
+        <p:txBody>
+          <a:bodyPr/>
+          <a:lstStyle/>
+          <a:p>
+            <a:r>
+              <a:rPr lang="en-US"/>
+              <a:t>Code Coverage</a:t>
+            </a:r>
+          </a:p>
+        </p:txBody>
+      </p:sp>
+      <p:sp>
+        <p:nvSpPr>
+          <p:cNvPr id="4" name="Slide Number Placeholder 3">
+            <a:extLst>
+              <a:ext uri="{FF2B5EF4-FFF2-40B4-BE49-F238E27FC236}">
+                <a16:creationId xmlns:a16="http://schemas.microsoft.com/office/drawing/2014/main" id="{0A29A8B9-A610-C4FD-2926-B7BD4F00E298}"/>
+              </a:ext>
+            </a:extLst>
+          </p:cNvPr>
+          <p:cNvSpPr>
+            <a:spLocks noGrp="1"/>
+          </p:cNvSpPr>
+          <p:nvPr>
+            <p:ph type="sldNum" sz="quarter" idx="12"/>
+          </p:nvPr>
+        </p:nvSpPr>
+        <p:spPr>
+          <a:xfrm>
+            <a:off x="8610600" y="6356350"/>
+            <a:ext cx="2743200" cy="365125"/>
+          </a:xfrm>
+        </p:spPr>
+        <p:txBody>
+          <a:bodyPr/>
+          <a:lstStyle/>
+          <a:p>
+            <a:fld id="{20F37917-FD3A-4669-9018-DA04BCDD3D75}" type="slidenum">
+              <a:rPr lang="en-US" smtClean="0"/>
+              <a:pPr/>
+              <a:t>20</a:t>
+            </a:fld>
+            <a:endParaRPr lang="en-US"/>
+          </a:p>
+        </p:txBody>
+      </p:sp>
+      <p:sp>
+        <p:nvSpPr>
+          <p:cNvPr id="10" name="Content Placeholder 9">
+            <a:extLst>
+              <a:ext uri="{FF2B5EF4-FFF2-40B4-BE49-F238E27FC236}">
+                <a16:creationId xmlns:a16="http://schemas.microsoft.com/office/drawing/2014/main" id="{5BA32395-303A-EA3B-B383-3B063412234B}"/>
+              </a:ext>
+            </a:extLst>
+          </p:cNvPr>
+          <p:cNvSpPr>
+            <a:spLocks noGrp="1"/>
+          </p:cNvSpPr>
+          <p:nvPr>
+            <p:ph idx="1"/>
+          </p:nvPr>
+        </p:nvSpPr>
+        <p:spPr>
+          <a:xfrm>
+            <a:off x="838200" y="1500159"/>
+            <a:ext cx="7887346" cy="5221316"/>
+          </a:xfrm>
+        </p:spPr>
+        <p:txBody>
+          <a:bodyPr>
+            <a:normAutofit/>
+          </a:bodyPr>
+          <a:lstStyle/>
+          <a:p>
+            <a:r>
+              <a:rPr lang="en-US" dirty="0"/>
+              <a:t>The industry standard answer for “have I written enough tests”</a:t>
+            </a:r>
+          </a:p>
+          <a:p>
+            <a:r>
+              <a:rPr lang="en-US" dirty="0"/>
+              <a:t>Measures “how much of your code” is exercised by your tests</a:t>
+            </a:r>
+          </a:p>
+          <a:p>
+            <a:r>
+              <a:rPr lang="en-US" dirty="0"/>
+              <a:t>If none of your test even </a:t>
+            </a:r>
+            <a:r>
+              <a:rPr lang="en-US" i="1" dirty="0"/>
+              <a:t>execute</a:t>
+            </a:r>
+            <a:r>
+              <a:rPr lang="en-US" dirty="0"/>
+              <a:t> a piece of code, it’s not being tested!</a:t>
+            </a:r>
+          </a:p>
+          <a:p>
+            <a:endParaRPr lang="en-US" dirty="0"/>
+          </a:p>
+        </p:txBody>
+      </p:sp>
+    </p:spTree>
+    <p:extLst>
+      <p:ext uri="{BB962C8B-B14F-4D97-AF65-F5344CB8AC3E}">
+        <p14:creationId xmlns:p14="http://schemas.microsoft.com/office/powerpoint/2010/main" val="1563341513"/>
+      </p:ext>
+    </p:extLst>
+  </p:cSld>
+  <p:clrMapOvr>
+    <a:masterClrMapping/>
+  </p:clrMapOvr>
+</p:sld>
+</file>
+
+<file path=ppt/slides/slide21.xml><?xml version="1.0" encoding="utf-8"?>
+<p:sld xmlns:a="http://schemas.openxmlformats.org/drawingml/2006/main" xmlns:r="http://schemas.openxmlformats.org/officeDocument/2006/relationships" xmlns:p="http://schemas.openxmlformats.org/presentationml/2006/main">
+  <p:cSld>
+    <p:spTree>
+      <p:nvGrpSpPr>
+        <p:cNvPr id="1" name="">
+          <a:extLst>
+            <a:ext uri="{FF2B5EF4-FFF2-40B4-BE49-F238E27FC236}">
               <a16:creationId xmlns:a16="http://schemas.microsoft.com/office/drawing/2014/main" id="{10C68DFF-D7BB-13BF-CA3C-2866BE9B07A1}"/>
             </a:ext>
           </a:extLst>
@@ -16680,7 +19229,7 @@
             <a:fld id="{20F37917-FD3A-4669-9018-DA04BCDD3D75}" type="slidenum">
               <a:rPr lang="en-US" smtClean="0"/>
               <a:pPr/>
-              <a:t>20</a:t>
+              <a:t>21</a:t>
             </a:fld>
             <a:endParaRPr lang="en-US"/>
           </a:p>
@@ -17828,7 +20377,7 @@
 </p:sld>
 </file>
 
-<file path=ppt/slides/slide21.xml><?xml version="1.0" encoding="utf-8"?>
+<file path=ppt/slides/slide22.xml><?xml version="1.0" encoding="utf-8"?>
 <p:sld xmlns:a="http://schemas.openxmlformats.org/drawingml/2006/main" xmlns:r="http://schemas.openxmlformats.org/officeDocument/2006/relationships" xmlns:p="http://schemas.openxmlformats.org/presentationml/2006/main">
   <p:cSld>
     <p:spTree>
@@ -17913,7 +20462,7 @@
             <a:fld id="{20F37917-FD3A-4669-9018-DA04BCDD3D75}" type="slidenum">
               <a:rPr lang="en-US" smtClean="0"/>
               <a:pPr/>
-              <a:t>21</a:t>
+              <a:t>22</a:t>
             </a:fld>
             <a:endParaRPr lang="en-US"/>
           </a:p>
@@ -18966,7 +21515,7 @@
 </p:sld>
 </file>
 
-<file path=ppt/slides/slide22.xml><?xml version="1.0" encoding="utf-8"?>
+<file path=ppt/slides/slide23.xml><?xml version="1.0" encoding="utf-8"?>
 <p:sld xmlns:a="http://schemas.openxmlformats.org/drawingml/2006/main" xmlns:r="http://schemas.openxmlformats.org/officeDocument/2006/relationships" xmlns:p="http://schemas.openxmlformats.org/presentationml/2006/main">
   <p:cSld>
     <p:spTree>
@@ -19051,7 +21600,7 @@
             <a:fld id="{20F37917-FD3A-4669-9018-DA04BCDD3D75}" type="slidenum">
               <a:rPr lang="en-US" smtClean="0"/>
               <a:pPr/>
-              <a:t>22</a:t>
+              <a:t>23</a:t>
             </a:fld>
             <a:endParaRPr lang="en-US"/>
           </a:p>
@@ -20116,7 +22665,7 @@
 </p:sld>
 </file>
 
-<file path=ppt/slides/slide23.xml><?xml version="1.0" encoding="utf-8"?>
+<file path=ppt/slides/slide24.xml><?xml version="1.0" encoding="utf-8"?>
 <p:sld xmlns:a="http://schemas.openxmlformats.org/drawingml/2006/main" xmlns:r="http://schemas.openxmlformats.org/officeDocument/2006/relationships" xmlns:p="http://schemas.openxmlformats.org/presentationml/2006/main">
   <p:cSld>
     <p:spTree>
@@ -20215,7 +22764,7 @@
           <a:p>
             <a:fld id="{20F37917-FD3A-4669-9018-DA04BCDD3D75}" type="slidenum">
               <a:rPr lang="en-US" smtClean="0"/>
-              <a:t>23</a:t>
+              <a:t>24</a:t>
             </a:fld>
             <a:endParaRPr lang="en-US"/>
           </a:p>
@@ -20949,7 +23498,7 @@
 </p:sld>
 </file>
 
-<file path=ppt/slides/slide24.xml><?xml version="1.0" encoding="utf-8"?>
+<file path=ppt/slides/slide25.xml><?xml version="1.0" encoding="utf-8"?>
 <p:sld xmlns:a="http://schemas.openxmlformats.org/drawingml/2006/main" xmlns:r="http://schemas.openxmlformats.org/officeDocument/2006/relationships" xmlns:p="http://schemas.openxmlformats.org/presentationml/2006/main">
   <p:cSld>
     <p:spTree>
@@ -21054,7 +23603,7 @@
           <a:p>
             <a:fld id="{20F37917-FD3A-4669-9018-DA04BCDD3D75}" type="slidenum">
               <a:rPr lang="en-US" smtClean="0"/>
-              <a:t>24</a:t>
+              <a:t>25</a:t>
             </a:fld>
             <a:endParaRPr lang="en-US"/>
           </a:p>
@@ -22218,7 +24767,7 @@
 </p:sld>
 </file>
 
-<file path=ppt/slides/slide25.xml><?xml version="1.0" encoding="utf-8"?>
+<file path=ppt/slides/slide26.xml><?xml version="1.0" encoding="utf-8"?>
 <p:sld xmlns:a="http://schemas.openxmlformats.org/drawingml/2006/main" xmlns:r="http://schemas.openxmlformats.org/officeDocument/2006/relationships" xmlns:p="http://schemas.openxmlformats.org/presentationml/2006/main">
   <p:cSld>
     <p:spTree>
@@ -22264,7 +24813,7 @@
           <a:p>
             <a:r>
               <a:rPr lang="en-US" dirty="0"/>
-              <a:t>Code Coverage and “edge” cases can be related</a:t>
+              <a:t>Code Coverage and “edge” cases are two dimensions of software quality</a:t>
             </a:r>
           </a:p>
         </p:txBody>
@@ -22368,7 +24917,7 @@
           <a:p>
             <a:fld id="{20F37917-FD3A-4669-9018-DA04BCDD3D75}" type="slidenum">
               <a:rPr lang="en-US" smtClean="0"/>
-              <a:t>25</a:t>
+              <a:t>26</a:t>
             </a:fld>
             <a:endParaRPr lang="en-US"/>
           </a:p>
@@ -22387,7 +24936,7 @@
 </p:sld>
 </file>
 
-<file path=ppt/slides/slide26.xml><?xml version="1.0" encoding="utf-8"?>
+<file path=ppt/slides/slide27.xml><?xml version="1.0" encoding="utf-8"?>
 <p:sld xmlns:a="http://schemas.openxmlformats.org/drawingml/2006/main" xmlns:r="http://schemas.openxmlformats.org/officeDocument/2006/relationships" xmlns:p="http://schemas.openxmlformats.org/presentationml/2006/main">
   <p:cSld>
     <p:spTree>
@@ -22509,7 +25058,7 @@
           <a:p>
             <a:fld id="{20F37917-FD3A-4669-9018-DA04BCDD3D75}" type="slidenum">
               <a:rPr lang="en-US" smtClean="0"/>
-              <a:t>26</a:t>
+              <a:t>27</a:t>
             </a:fld>
             <a:endParaRPr lang="en-US"/>
           </a:p>
@@ -22731,176 +25280,6 @@
 </p:sld>
 </file>
 
-<file path=ppt/slides/slide27.xml><?xml version="1.0" encoding="utf-8"?>
-<p:sld xmlns:a="http://schemas.openxmlformats.org/drawingml/2006/main" xmlns:r="http://schemas.openxmlformats.org/officeDocument/2006/relationships" xmlns:p="http://schemas.openxmlformats.org/presentationml/2006/main">
-  <p:cSld>
-    <p:spTree>
-      <p:nvGrpSpPr>
-        <p:cNvPr id="1" name=""/>
-        <p:cNvGrpSpPr/>
-        <p:nvPr/>
-      </p:nvGrpSpPr>
-      <p:grpSpPr>
-        <a:xfrm>
-          <a:off x="0" y="0"/>
-          <a:ext cx="0" cy="0"/>
-          <a:chOff x="0" y="0"/>
-          <a:chExt cx="0" cy="0"/>
-        </a:xfrm>
-      </p:grpSpPr>
-      <p:sp>
-        <p:nvSpPr>
-          <p:cNvPr id="2" name="Title 1">
-            <a:extLst>
-              <a:ext uri="{FF2B5EF4-FFF2-40B4-BE49-F238E27FC236}">
-                <a16:creationId xmlns:a16="http://schemas.microsoft.com/office/drawing/2014/main" id="{10548484-5B0A-1F40-24B6-FB972E693B90}"/>
-              </a:ext>
-            </a:extLst>
-          </p:cNvPr>
-          <p:cNvSpPr>
-            <a:spLocks noGrp="1"/>
-          </p:cNvSpPr>
-          <p:nvPr>
-            <p:ph type="title"/>
-          </p:nvPr>
-        </p:nvSpPr>
-        <p:spPr/>
-        <p:txBody>
-          <a:bodyPr/>
-          <a:lstStyle/>
-          <a:p>
-            <a:r>
-              <a:rPr lang="en-US" dirty="0"/>
-              <a:t>Review of Section 3.2</a:t>
-            </a:r>
-          </a:p>
-        </p:txBody>
-      </p:sp>
-      <p:sp>
-        <p:nvSpPr>
-          <p:cNvPr id="3" name="Content Placeholder 2">
-            <a:extLst>
-              <a:ext uri="{FF2B5EF4-FFF2-40B4-BE49-F238E27FC236}">
-                <a16:creationId xmlns:a16="http://schemas.microsoft.com/office/drawing/2014/main" id="{F4C18F65-A0D1-5B6E-005B-4E64E3D6AC8D}"/>
-              </a:ext>
-            </a:extLst>
-          </p:cNvPr>
-          <p:cNvSpPr>
-            <a:spLocks noGrp="1"/>
-          </p:cNvSpPr>
-          <p:nvPr>
-            <p:ph idx="1"/>
-          </p:nvPr>
-        </p:nvSpPr>
-        <p:spPr>
-          <a:xfrm>
-            <a:off x="838200" y="1500160"/>
-            <a:ext cx="7887346" cy="4856190"/>
-          </a:xfrm>
-        </p:spPr>
-        <p:txBody>
-          <a:bodyPr>
-            <a:normAutofit/>
-          </a:bodyPr>
-          <a:lstStyle/>
-          <a:p>
-            <a:r>
-              <a:rPr lang="en-US" dirty="0"/>
-              <a:t>Total code coverage — by any metric — does not mean no bugs</a:t>
-            </a:r>
-          </a:p>
-          <a:p>
-            <a:pPr lvl="1"/>
-            <a:r>
-              <a:rPr lang="en-US" dirty="0"/>
-              <a:t>Running code doesn’t mean checking that it’s doing the right thing! (important to Assemble/Act/</a:t>
-            </a:r>
-            <a:r>
-              <a:rPr lang="en-US" u="sng" dirty="0"/>
-              <a:t>Assess</a:t>
-            </a:r>
-            <a:r>
-              <a:rPr lang="en-US" dirty="0"/>
-              <a:t>)</a:t>
-            </a:r>
-          </a:p>
-          <a:p>
-            <a:pPr lvl="1"/>
-            <a:r>
-              <a:rPr lang="en-US" dirty="0"/>
-              <a:t>“Coverage is no substitute for thought” — Rob Pike</a:t>
-            </a:r>
-          </a:p>
-          <a:p>
-            <a:r>
-              <a:rPr lang="en-US" dirty="0"/>
-              <a:t>Coverage checking can be invaluable at identifying when you </a:t>
-            </a:r>
-            <a:r>
-              <a:rPr lang="en-US" i="1" dirty="0"/>
-              <a:t>think</a:t>
-            </a:r>
-            <a:r>
-              <a:rPr lang="en-US" dirty="0"/>
-              <a:t> you’re testing something but you’re not, which is a real problem in practice.</a:t>
-            </a:r>
-          </a:p>
-          <a:p>
-            <a:pPr lvl="1"/>
-            <a:r>
-              <a:rPr lang="en-US" dirty="0"/>
-              <a:t>Test-Driven Development also valuable for this problem: it’s important that tests switch from failing to succeeding </a:t>
-            </a:r>
-            <a:r>
-              <a:rPr lang="en-US" i="1" dirty="0"/>
-              <a:t>when you expect them to</a:t>
-            </a:r>
-            <a:endParaRPr lang="en-US" dirty="0"/>
-          </a:p>
-        </p:txBody>
-      </p:sp>
-      <p:sp>
-        <p:nvSpPr>
-          <p:cNvPr id="4" name="Slide Number Placeholder 3">
-            <a:extLst>
-              <a:ext uri="{FF2B5EF4-FFF2-40B4-BE49-F238E27FC236}">
-                <a16:creationId xmlns:a16="http://schemas.microsoft.com/office/drawing/2014/main" id="{C1201568-6786-E28A-30B8-99E8FBE3C531}"/>
-              </a:ext>
-            </a:extLst>
-          </p:cNvPr>
-          <p:cNvSpPr>
-            <a:spLocks noGrp="1"/>
-          </p:cNvSpPr>
-          <p:nvPr>
-            <p:ph type="sldNum" sz="quarter" idx="12"/>
-          </p:nvPr>
-        </p:nvSpPr>
-        <p:spPr/>
-        <p:txBody>
-          <a:bodyPr/>
-          <a:lstStyle/>
-          <a:p>
-            <a:fld id="{20F37917-FD3A-4669-9018-DA04BCDD3D75}" type="slidenum">
-              <a:rPr lang="en-US" smtClean="0"/>
-              <a:t>27</a:t>
-            </a:fld>
-            <a:endParaRPr lang="en-US"/>
-          </a:p>
-        </p:txBody>
-      </p:sp>
-    </p:spTree>
-    <p:extLst>
-      <p:ext uri="{BB962C8B-B14F-4D97-AF65-F5344CB8AC3E}">
-        <p14:creationId xmlns:p14="http://schemas.microsoft.com/office/powerpoint/2010/main" val="299220953"/>
-      </p:ext>
-    </p:extLst>
-  </p:cSld>
-  <p:clrMapOvr>
-    <a:masterClrMapping/>
-  </p:clrMapOvr>
-</p:sld>
-</file>
-
 <file path=ppt/slides/slide28.xml><?xml version="1.0" encoding="utf-8"?>
 <p:sld xmlns:a="http://schemas.openxmlformats.org/drawingml/2006/main" xmlns:r="http://schemas.openxmlformats.org/officeDocument/2006/relationships" xmlns:p="http://schemas.openxmlformats.org/presentationml/2006/main">
   <p:cSld>
@@ -23052,13 +25431,7 @@
   <p:cSld>
     <p:spTree>
       <p:nvGrpSpPr>
-        <p:cNvPr id="1" name="">
-          <a:extLst>
-            <a:ext uri="{FF2B5EF4-FFF2-40B4-BE49-F238E27FC236}">
-              <a16:creationId xmlns:a16="http://schemas.microsoft.com/office/drawing/2014/main" id="{5A722644-B5FB-87DD-7327-566E6CDA85B4}"/>
-            </a:ext>
-          </a:extLst>
-        </p:cNvPr>
+        <p:cNvPr id="1" name=""/>
         <p:cNvGrpSpPr/>
         <p:nvPr/>
       </p:nvGrpSpPr>
@@ -23072,10 +25445,10 @@
       </p:grpSpPr>
       <p:sp>
         <p:nvSpPr>
-          <p:cNvPr id="3" name="Title 2">
+          <p:cNvPr id="2" name="Title 1">
             <a:extLst>
               <a:ext uri="{FF2B5EF4-FFF2-40B4-BE49-F238E27FC236}">
-                <a16:creationId xmlns:a16="http://schemas.microsoft.com/office/drawing/2014/main" id="{4D6EE248-8404-AF54-23B7-64E2E86E1735}"/>
+                <a16:creationId xmlns:a16="http://schemas.microsoft.com/office/drawing/2014/main" id="{10548484-5B0A-1F40-24B6-FB972E693B90}"/>
               </a:ext>
             </a:extLst>
           </p:cNvPr>
@@ -23093,17 +25466,17 @@
           <a:p>
             <a:r>
               <a:rPr lang="en-US" dirty="0"/>
-              <a:t>3.3 Are our tests sensitive enough to detect likely bugs?</a:t>
+              <a:t>Review of Section 3.2</a:t>
             </a:r>
           </a:p>
         </p:txBody>
       </p:sp>
       <p:sp>
         <p:nvSpPr>
-          <p:cNvPr id="4" name="Content Placeholder 3">
+          <p:cNvPr id="3" name="Content Placeholder 2">
             <a:extLst>
               <a:ext uri="{FF2B5EF4-FFF2-40B4-BE49-F238E27FC236}">
-                <a16:creationId xmlns:a16="http://schemas.microsoft.com/office/drawing/2014/main" id="{A3D2C918-230B-0B27-FE2F-5795D82B6F40}"/>
+                <a16:creationId xmlns:a16="http://schemas.microsoft.com/office/drawing/2014/main" id="{F4C18F65-A0D1-5B6E-005B-4E64E3D6AC8D}"/>
               </a:ext>
             </a:extLst>
           </p:cNvPr>
@@ -23114,21 +25487,79 @@
             <p:ph idx="1"/>
           </p:nvPr>
         </p:nvSpPr>
-        <p:spPr/>
+        <p:spPr>
+          <a:xfrm>
+            <a:off x="838200" y="1500160"/>
+            <a:ext cx="7887346" cy="4856190"/>
+          </a:xfrm>
+        </p:spPr>
         <p:txBody>
-          <a:bodyPr/>
+          <a:bodyPr>
+            <a:normAutofit/>
+          </a:bodyPr>
           <a:lstStyle/>
           <a:p>
-            <a:endParaRPr lang="en-US" b="1" dirty="0"/>
+            <a:r>
+              <a:rPr lang="en-US" dirty="0"/>
+              <a:t>Total code coverage — by any metric — does not mean no bugs</a:t>
+            </a:r>
+          </a:p>
+          <a:p>
+            <a:pPr lvl="1"/>
+            <a:r>
+              <a:rPr lang="en-US" dirty="0"/>
+              <a:t>Running code doesn’t mean checking that it’s doing the right thing! (important to Assemble/Act/</a:t>
+            </a:r>
+            <a:r>
+              <a:rPr lang="en-US" u="sng" dirty="0"/>
+              <a:t>Assess</a:t>
+            </a:r>
+            <a:r>
+              <a:rPr lang="en-US" dirty="0"/>
+              <a:t>)</a:t>
+            </a:r>
+          </a:p>
+          <a:p>
+            <a:pPr lvl="1"/>
+            <a:r>
+              <a:rPr lang="en-US" dirty="0"/>
+              <a:t>“Coverage is no substitute for thought” — Rob Pike</a:t>
+            </a:r>
+          </a:p>
+          <a:p>
+            <a:r>
+              <a:rPr lang="en-US" dirty="0"/>
+              <a:t>Coverage checking can be invaluable at identifying when you </a:t>
+            </a:r>
+            <a:r>
+              <a:rPr lang="en-US" i="1" dirty="0"/>
+              <a:t>think</a:t>
+            </a:r>
+            <a:r>
+              <a:rPr lang="en-US" dirty="0"/>
+              <a:t> you’re testing something but you’re not, which is a real problem in practice.</a:t>
+            </a:r>
+          </a:p>
+          <a:p>
+            <a:pPr lvl="1"/>
+            <a:r>
+              <a:rPr lang="en-US" dirty="0"/>
+              <a:t>Test-Driven Development also valuable for this problem: it’s important that tests switch from failing to succeeding </a:t>
+            </a:r>
+            <a:r>
+              <a:rPr lang="en-US" i="1" dirty="0"/>
+              <a:t>when you expect them to</a:t>
+            </a:r>
+            <a:endParaRPr lang="en-US" dirty="0"/>
           </a:p>
         </p:txBody>
       </p:sp>
       <p:sp>
         <p:nvSpPr>
-          <p:cNvPr id="2" name="Slide Number Placeholder 1">
+          <p:cNvPr id="4" name="Slide Number Placeholder 3">
             <a:extLst>
               <a:ext uri="{FF2B5EF4-FFF2-40B4-BE49-F238E27FC236}">
-                <a16:creationId xmlns:a16="http://schemas.microsoft.com/office/drawing/2014/main" id="{6D216215-8B5E-2743-EF4B-CB9FBB32047A}"/>
+                <a16:creationId xmlns:a16="http://schemas.microsoft.com/office/drawing/2014/main" id="{C1201568-6786-E28A-30B8-99E8FBE3C531}"/>
               </a:ext>
             </a:extLst>
           </p:cNvPr>
@@ -23155,7 +25586,7 @@
     </p:spTree>
     <p:extLst>
       <p:ext uri="{BB962C8B-B14F-4D97-AF65-F5344CB8AC3E}">
-        <p14:creationId xmlns:p14="http://schemas.microsoft.com/office/powerpoint/2010/main" val="3882772932"/>
+        <p14:creationId xmlns:p14="http://schemas.microsoft.com/office/powerpoint/2010/main" val="299220953"/>
       </p:ext>
     </p:extLst>
   </p:cSld>
@@ -23297,6 +25728,124 @@
   <p:cSld>
     <p:spTree>
       <p:nvGrpSpPr>
+        <p:cNvPr id="1" name="">
+          <a:extLst>
+            <a:ext uri="{FF2B5EF4-FFF2-40B4-BE49-F238E27FC236}">
+              <a16:creationId xmlns:a16="http://schemas.microsoft.com/office/drawing/2014/main" id="{5A722644-B5FB-87DD-7327-566E6CDA85B4}"/>
+            </a:ext>
+          </a:extLst>
+        </p:cNvPr>
+        <p:cNvGrpSpPr/>
+        <p:nvPr/>
+      </p:nvGrpSpPr>
+      <p:grpSpPr>
+        <a:xfrm>
+          <a:off x="0" y="0"/>
+          <a:ext cx="0" cy="0"/>
+          <a:chOff x="0" y="0"/>
+          <a:chExt cx="0" cy="0"/>
+        </a:xfrm>
+      </p:grpSpPr>
+      <p:sp>
+        <p:nvSpPr>
+          <p:cNvPr id="3" name="Title 2">
+            <a:extLst>
+              <a:ext uri="{FF2B5EF4-FFF2-40B4-BE49-F238E27FC236}">
+                <a16:creationId xmlns:a16="http://schemas.microsoft.com/office/drawing/2014/main" id="{4D6EE248-8404-AF54-23B7-64E2E86E1735}"/>
+              </a:ext>
+            </a:extLst>
+          </p:cNvPr>
+          <p:cNvSpPr>
+            <a:spLocks noGrp="1"/>
+          </p:cNvSpPr>
+          <p:nvPr>
+            <p:ph type="title"/>
+          </p:nvPr>
+        </p:nvSpPr>
+        <p:spPr/>
+        <p:txBody>
+          <a:bodyPr/>
+          <a:lstStyle/>
+          <a:p>
+            <a:r>
+              <a:rPr lang="en-US" dirty="0"/>
+              <a:t>3.3 Are our tests sensitive enough to detect likely bugs?</a:t>
+            </a:r>
+          </a:p>
+        </p:txBody>
+      </p:sp>
+      <p:sp>
+        <p:nvSpPr>
+          <p:cNvPr id="4" name="Content Placeholder 3">
+            <a:extLst>
+              <a:ext uri="{FF2B5EF4-FFF2-40B4-BE49-F238E27FC236}">
+                <a16:creationId xmlns:a16="http://schemas.microsoft.com/office/drawing/2014/main" id="{A3D2C918-230B-0B27-FE2F-5795D82B6F40}"/>
+              </a:ext>
+            </a:extLst>
+          </p:cNvPr>
+          <p:cNvSpPr>
+            <a:spLocks noGrp="1"/>
+          </p:cNvSpPr>
+          <p:nvPr>
+            <p:ph idx="1"/>
+          </p:nvPr>
+        </p:nvSpPr>
+        <p:spPr/>
+        <p:txBody>
+          <a:bodyPr/>
+          <a:lstStyle/>
+          <a:p>
+            <a:endParaRPr lang="en-US" b="1" dirty="0"/>
+          </a:p>
+        </p:txBody>
+      </p:sp>
+      <p:sp>
+        <p:nvSpPr>
+          <p:cNvPr id="2" name="Slide Number Placeholder 1">
+            <a:extLst>
+              <a:ext uri="{FF2B5EF4-FFF2-40B4-BE49-F238E27FC236}">
+                <a16:creationId xmlns:a16="http://schemas.microsoft.com/office/drawing/2014/main" id="{6D216215-8B5E-2743-EF4B-CB9FBB32047A}"/>
+              </a:ext>
+            </a:extLst>
+          </p:cNvPr>
+          <p:cNvSpPr>
+            <a:spLocks noGrp="1"/>
+          </p:cNvSpPr>
+          <p:nvPr>
+            <p:ph type="sldNum" sz="quarter" idx="12"/>
+          </p:nvPr>
+        </p:nvSpPr>
+        <p:spPr/>
+        <p:txBody>
+          <a:bodyPr/>
+          <a:lstStyle/>
+          <a:p>
+            <a:fld id="{20F37917-FD3A-4669-9018-DA04BCDD3D75}" type="slidenum">
+              <a:rPr lang="en-US" smtClean="0"/>
+              <a:t>30</a:t>
+            </a:fld>
+            <a:endParaRPr lang="en-US"/>
+          </a:p>
+        </p:txBody>
+      </p:sp>
+    </p:spTree>
+    <p:extLst>
+      <p:ext uri="{BB962C8B-B14F-4D97-AF65-F5344CB8AC3E}">
+        <p14:creationId xmlns:p14="http://schemas.microsoft.com/office/powerpoint/2010/main" val="3882772932"/>
+      </p:ext>
+    </p:extLst>
+  </p:cSld>
+  <p:clrMapOvr>
+    <a:masterClrMapping/>
+  </p:clrMapOvr>
+</p:sld>
+</file>
+
+<file path=ppt/slides/slide31.xml><?xml version="1.0" encoding="utf-8"?>
+<p:sld xmlns:a="http://schemas.openxmlformats.org/drawingml/2006/main" xmlns:r="http://schemas.openxmlformats.org/officeDocument/2006/relationships" xmlns:p="http://schemas.openxmlformats.org/presentationml/2006/main">
+  <p:cSld>
+    <p:spTree>
+      <p:nvGrpSpPr>
         <p:cNvPr id="1" name=""/>
         <p:cNvGrpSpPr/>
         <p:nvPr/>
@@ -23375,15 +25924,7 @@
             <a:pPr lvl="1"/>
             <a:r>
               <a:rPr lang="en-US" dirty="0"/>
-              <a:t>Some of these may change the behavior of your system in acceptable ways, and some of these introduce actual </a:t>
-            </a:r>
-            <a:r>
-              <a:rPr lang="en-US" dirty="0" err="1"/>
-              <a:t>ugs</a:t>
-            </a:r>
-            <a:r>
-              <a:rPr lang="en-US" dirty="0"/>
-              <a:t>.</a:t>
+              <a:t>Some of these may change the behavior of your system in acceptable ways, and some of these introduce actual bugs.</a:t>
             </a:r>
           </a:p>
           <a:p>
@@ -23431,7 +25972,7 @@
           <a:p>
             <a:fld id="{20F37917-FD3A-4669-9018-DA04BCDD3D75}" type="slidenum">
               <a:rPr lang="en-US" smtClean="0"/>
-              <a:t>30</a:t>
+              <a:t>31</a:t>
             </a:fld>
             <a:endParaRPr lang="en-US"/>
           </a:p>
@@ -23450,7 +25991,7 @@
 </p:sld>
 </file>
 
-<file path=ppt/slides/slide31.xml><?xml version="1.0" encoding="utf-8"?>
+<file path=ppt/slides/slide32.xml><?xml version="1.0" encoding="utf-8"?>
 <p:sld xmlns:a="http://schemas.openxmlformats.org/drawingml/2006/main" xmlns:r="http://schemas.openxmlformats.org/officeDocument/2006/relationships" xmlns:p="http://schemas.openxmlformats.org/presentationml/2006/main">
   <p:cSld>
     <p:spTree>
@@ -23552,7 +26093,7 @@
           <a:p>
             <a:fld id="{20F37917-FD3A-4669-9018-DA04BCDD3D75}" type="slidenum">
               <a:rPr lang="en-US" smtClean="0"/>
-              <a:t>31</a:t>
+              <a:t>32</a:t>
             </a:fld>
             <a:endParaRPr lang="en-US"/>
           </a:p>
@@ -23571,7 +26112,7 @@
 </p:sld>
 </file>
 
-<file path=ppt/slides/slide32.xml><?xml version="1.0" encoding="utf-8"?>
+<file path=ppt/slides/slide33.xml><?xml version="1.0" encoding="utf-8"?>
 <p:sld xmlns:a="http://schemas.openxmlformats.org/drawingml/2006/main" xmlns:r="http://schemas.openxmlformats.org/officeDocument/2006/relationships" xmlns:p="http://schemas.openxmlformats.org/presentationml/2006/main">
   <p:cSld>
     <p:spTree>
@@ -23631,7 +26172,7 @@
           </a:ln>
           <a:extLst>
             <a:ext uri="{C572A759-6A51-4108-AA02-DFA0A04FC94B}">
-              <ma14:wrappingTextBoxFlag xmlns:ma14="http://schemas.microsoft.com/office/mac/drawingml/2011/main" xmlns:a14="http://schemas.microsoft.com/office/drawing/2010/main" xmlns:m="http://schemas.openxmlformats.org/officeDocument/2006/math" xmlns="" val="1"/>
+              <ma14:wrappingTextBoxFlag xmlns="" xmlns:m="http://schemas.openxmlformats.org/officeDocument/2006/math" xmlns:a14="http://schemas.microsoft.com/office/drawing/2010/main" xmlns:ma14="http://schemas.microsoft.com/office/mac/drawingml/2011/main" val="1"/>
             </a:ext>
           </a:extLst>
         </p:spPr>
@@ -23941,7 +26482,7 @@
             <a:fld id="{86CB4B4D-7CA3-9044-876B-883B54F8677D}" type="slidenum">
               <a:rPr lang="en-US" smtClean="0"/>
               <a:pPr/>
-              <a:t>32</a:t>
+              <a:t>33</a:t>
             </a:fld>
             <a:endParaRPr/>
           </a:p>
@@ -23969,7 +26510,7 @@
           </a:ln>
           <a:extLst>
             <a:ext uri="{C572A759-6A51-4108-AA02-DFA0A04FC94B}">
-              <ma14:wrappingTextBoxFlag xmlns:ma14="http://schemas.microsoft.com/office/mac/drawingml/2011/main" xmlns:a14="http://schemas.microsoft.com/office/drawing/2010/main" xmlns:m="http://schemas.openxmlformats.org/officeDocument/2006/math" xmlns="" val="1"/>
+              <ma14:wrappingTextBoxFlag xmlns="" xmlns:m="http://schemas.openxmlformats.org/officeDocument/2006/math" xmlns:a14="http://schemas.microsoft.com/office/drawing/2010/main" xmlns:ma14="http://schemas.microsoft.com/office/mac/drawingml/2011/main" val="1"/>
             </a:ext>
           </a:extLst>
         </p:spPr>
@@ -24394,7 +26935,7 @@
           </a:ln>
           <a:extLst>
             <a:ext uri="{C572A759-6A51-4108-AA02-DFA0A04FC94B}">
-              <ma14:wrappingTextBoxFlag xmlns:ma14="http://schemas.microsoft.com/office/mac/drawingml/2011/main" xmlns:a14="http://schemas.microsoft.com/office/drawing/2010/main" xmlns:m="http://schemas.openxmlformats.org/officeDocument/2006/math" xmlns="" val="1"/>
+              <ma14:wrappingTextBoxFlag xmlns="" xmlns:m="http://schemas.openxmlformats.org/officeDocument/2006/math" xmlns:a14="http://schemas.microsoft.com/office/drawing/2010/main" xmlns:ma14="http://schemas.microsoft.com/office/mac/drawingml/2011/main" val="1"/>
             </a:ext>
           </a:extLst>
         </p:spPr>
@@ -24431,7 +26972,7 @@
           </a:ln>
           <a:extLst>
             <a:ext uri="{C572A759-6A51-4108-AA02-DFA0A04FC94B}">
-              <ma14:wrappingTextBoxFlag xmlns:ma14="http://schemas.microsoft.com/office/mac/drawingml/2011/main" xmlns:a14="http://schemas.microsoft.com/office/drawing/2010/main" xmlns:m="http://schemas.openxmlformats.org/officeDocument/2006/math" xmlns="" val="1"/>
+              <ma14:wrappingTextBoxFlag xmlns="" xmlns:m="http://schemas.openxmlformats.org/officeDocument/2006/math" xmlns:a14="http://schemas.microsoft.com/office/drawing/2010/main" xmlns:ma14="http://schemas.microsoft.com/office/mac/drawingml/2011/main" val="1"/>
             </a:ext>
           </a:extLst>
         </p:spPr>
@@ -24494,7 +27035,7 @@
             </a:ln>
             <a:extLst>
               <a:ext uri="{C572A759-6A51-4108-AA02-DFA0A04FC94B}">
-                <ma14:wrappingTextBoxFlag xmlns:ma14="http://schemas.microsoft.com/office/mac/drawingml/2011/main" xmlns:a14="http://schemas.microsoft.com/office/drawing/2010/main" xmlns:m="http://schemas.openxmlformats.org/officeDocument/2006/math" xmlns="" val="1"/>
+                <ma14:wrappingTextBoxFlag xmlns="" xmlns:m="http://schemas.openxmlformats.org/officeDocument/2006/math" xmlns:a14="http://schemas.microsoft.com/office/drawing/2010/main" xmlns:ma14="http://schemas.microsoft.com/office/mac/drawingml/2011/main" val="1"/>
               </a:ext>
             </a:extLst>
           </p:spPr>
@@ -25003,7 +27544,7 @@
 </p:sld>
 </file>
 
-<file path=ppt/slides/slide33.xml><?xml version="1.0" encoding="utf-8"?>
+<file path=ppt/slides/slide34.xml><?xml version="1.0" encoding="utf-8"?>
 <p:sld xmlns:a="http://schemas.openxmlformats.org/drawingml/2006/main" xmlns:r="http://schemas.openxmlformats.org/officeDocument/2006/relationships" xmlns:p="http://schemas.openxmlformats.org/presentationml/2006/main">
   <p:cSld>
     <p:spTree>
@@ -25412,7 +27953,7 @@
               <a:pPr defTabSz="457200" hangingPunct="1">
                 <a:defRPr/>
               </a:pPr>
-              <a:t>33</a:t>
+              <a:t>34</a:t>
             </a:fld>
             <a:endParaRPr lang="en-US" sz="1200">
               <a:solidFill>
@@ -25438,7 +27979,7 @@
 </p:sld>
 </file>
 
-<file path=ppt/slides/slide34.xml><?xml version="1.0" encoding="utf-8"?>
+<file path=ppt/slides/slide35.xml><?xml version="1.0" encoding="utf-8"?>
 <p:sld xmlns:a="http://schemas.openxmlformats.org/drawingml/2006/main" xmlns:r="http://schemas.openxmlformats.org/officeDocument/2006/relationships" xmlns:p="http://schemas.openxmlformats.org/presentationml/2006/main">
   <p:cSld>
     <p:spTree>
@@ -26046,7 +28587,7 @@
 </p:sld>
 </file>
 
-<file path=ppt/slides/slide35.xml><?xml version="1.0" encoding="utf-8"?>
+<file path=ppt/slides/slide36.xml><?xml version="1.0" encoding="utf-8"?>
 <p:sld xmlns:a="http://schemas.openxmlformats.org/drawingml/2006/main" xmlns:r="http://schemas.openxmlformats.org/officeDocument/2006/relationships" xmlns:p="http://schemas.openxmlformats.org/presentationml/2006/main">
   <p:cSld>
     <p:spTree>
@@ -26897,7 +29438,7 @@
 </p:sld>
 </file>
 
-<file path=ppt/slides/slide36.xml><?xml version="1.0" encoding="utf-8"?>
+<file path=ppt/slides/slide37.xml><?xml version="1.0" encoding="utf-8"?>
 <p:sld xmlns:a="http://schemas.openxmlformats.org/drawingml/2006/main" xmlns:r="http://schemas.openxmlformats.org/officeDocument/2006/relationships" xmlns:p="http://schemas.openxmlformats.org/presentationml/2006/main">
   <p:cSld>
     <p:spTree>
@@ -27555,7 +30096,7 @@
 </p:sld>
 </file>
 
-<file path=ppt/slides/slide37.xml><?xml version="1.0" encoding="utf-8"?>
+<file path=ppt/slides/slide38.xml><?xml version="1.0" encoding="utf-8"?>
 <p:sld xmlns:a="http://schemas.openxmlformats.org/drawingml/2006/main" xmlns:r="http://schemas.openxmlformats.org/officeDocument/2006/relationships" xmlns:p="http://schemas.openxmlformats.org/presentationml/2006/main">
   <p:cSld>
     <p:spTree>
@@ -27903,7 +30444,7 @@
 </p:sld>
 </file>
 
-<file path=ppt/slides/slide38.xml><?xml version="1.0" encoding="utf-8"?>
+<file path=ppt/slides/slide39.xml><?xml version="1.0" encoding="utf-8"?>
 <p:sld xmlns:a="http://schemas.openxmlformats.org/drawingml/2006/main" xmlns:r="http://schemas.openxmlformats.org/officeDocument/2006/relationships" xmlns:p="http://schemas.openxmlformats.org/presentationml/2006/main">
   <p:cSld>
     <p:spTree>
@@ -28574,333 +31115,6 @@
 </p:sld>
 </file>
 
-<file path=ppt/slides/slide39.xml><?xml version="1.0" encoding="utf-8"?>
-<p:sld xmlns:a="http://schemas.openxmlformats.org/drawingml/2006/main" xmlns:r="http://schemas.openxmlformats.org/officeDocument/2006/relationships" xmlns:p="http://schemas.openxmlformats.org/presentationml/2006/main">
-  <p:cSld>
-    <p:spTree>
-      <p:nvGrpSpPr>
-        <p:cNvPr id="1" name=""/>
-        <p:cNvGrpSpPr/>
-        <p:nvPr/>
-      </p:nvGrpSpPr>
-      <p:grpSpPr>
-        <a:xfrm>
-          <a:off x="0" y="0"/>
-          <a:ext cx="0" cy="0"/>
-          <a:chOff x="0" y="0"/>
-          <a:chExt cx="0" cy="0"/>
-        </a:xfrm>
-      </p:grpSpPr>
-      <p:sp>
-        <p:nvSpPr>
-          <p:cNvPr id="2" name="Title 1">
-            <a:extLst>
-              <a:ext uri="{FF2B5EF4-FFF2-40B4-BE49-F238E27FC236}">
-                <a16:creationId xmlns:a16="http://schemas.microsoft.com/office/drawing/2014/main" id="{D059E186-D46D-AB72-2799-EF993F03EF44}"/>
-              </a:ext>
-            </a:extLst>
-          </p:cNvPr>
-          <p:cNvSpPr>
-            <a:spLocks noGrp="1"/>
-          </p:cNvSpPr>
-          <p:nvPr>
-            <p:ph type="title"/>
-          </p:nvPr>
-        </p:nvSpPr>
-        <p:spPr/>
-        <p:txBody>
-          <a:bodyPr/>
-          <a:lstStyle/>
-          <a:p>
-            <a:r>
-              <a:rPr lang="en-US" dirty="0"/>
-              <a:t>Here's one test that will catch that mutant</a:t>
-            </a:r>
-          </a:p>
-        </p:txBody>
-      </p:sp>
-      <p:sp>
-        <p:nvSpPr>
-          <p:cNvPr id="4" name="TextBox 3">
-            <a:extLst>
-              <a:ext uri="{FF2B5EF4-FFF2-40B4-BE49-F238E27FC236}">
-                <a16:creationId xmlns:a16="http://schemas.microsoft.com/office/drawing/2014/main" id="{3E229CB5-D4EF-EC3D-16E3-6CFCCBA2A754}"/>
-              </a:ext>
-            </a:extLst>
-          </p:cNvPr>
-          <p:cNvSpPr txBox="1"/>
-          <p:nvPr/>
-        </p:nvSpPr>
-        <p:spPr>
-          <a:xfrm>
-            <a:off x="838200" y="2163627"/>
-            <a:ext cx="10515600" cy="1107996"/>
-          </a:xfrm>
-          <a:prstGeom prst="rect">
-            <a:avLst/>
-          </a:prstGeom>
-          <a:noFill/>
-          <a:ln w="25400" cap="flat">
-            <a:noFill/>
-            <a:miter lim="400000"/>
-          </a:ln>
-          <a:effectLst/>
-          <a:sp3d/>
-        </p:spPr>
-        <p:style>
-          <a:lnRef idx="0">
-            <a:scrgbClr r="0" g="0" b="0"/>
-          </a:lnRef>
-          <a:fillRef idx="0">
-            <a:scrgbClr r="0" g="0" b="0"/>
-          </a:fillRef>
-          <a:effectRef idx="0">
-            <a:scrgbClr r="0" g="0" b="0"/>
-          </a:effectRef>
-          <a:fontRef idx="none"/>
-        </p:style>
-        <p:txBody>
-          <a:bodyPr wrap="square">
-            <a:spAutoFit/>
-          </a:bodyPr>
-          <a:lstStyle/>
-          <a:p>
-            <a:r>
-              <a:rPr lang="en-US" sz="2200" dirty="0">
-                <a:solidFill>
-                  <a:srgbClr val="795E26"/>
-                </a:solidFill>
-                <a:latin typeface="Consolas" panose="020B0609020204030204" pitchFamily="49" charset="0"/>
-              </a:rPr>
-              <a:t>test</a:t>
-            </a:r>
-            <a:r>
-              <a:rPr lang="en-US" sz="2200" dirty="0">
-                <a:solidFill>
-                  <a:srgbClr val="3B3B3B"/>
-                </a:solidFill>
-                <a:latin typeface="Consolas" panose="020B0609020204030204" pitchFamily="49" charset="0"/>
-              </a:rPr>
-              <a:t>(</a:t>
-            </a:r>
-            <a:r>
-              <a:rPr lang="en-US" sz="2200" dirty="0">
-                <a:solidFill>
-                  <a:srgbClr val="A31515"/>
-                </a:solidFill>
-                <a:latin typeface="Consolas" panose="020B0609020204030204" pitchFamily="49" charset="0"/>
-              </a:rPr>
-              <a:t>"try target that is equal to some item in the list"</a:t>
-            </a:r>
-            <a:r>
-              <a:rPr lang="en-US" sz="2200" dirty="0">
-                <a:solidFill>
-                  <a:srgbClr val="3B3B3B"/>
-                </a:solidFill>
-                <a:latin typeface="Consolas" panose="020B0609020204030204" pitchFamily="49" charset="0"/>
-              </a:rPr>
-              <a:t>, () </a:t>
-            </a:r>
-            <a:r>
-              <a:rPr lang="en-US" sz="2200" dirty="0">
-                <a:solidFill>
-                  <a:srgbClr val="0000FF"/>
-                </a:solidFill>
-                <a:latin typeface="Consolas" panose="020B0609020204030204" pitchFamily="49" charset="0"/>
-              </a:rPr>
-              <a:t>=&gt;</a:t>
-            </a:r>
-            <a:r>
-              <a:rPr lang="en-US" sz="2200" dirty="0">
-                <a:solidFill>
-                  <a:srgbClr val="3B3B3B"/>
-                </a:solidFill>
-                <a:latin typeface="Consolas" panose="020B0609020204030204" pitchFamily="49" charset="0"/>
-              </a:rPr>
-              <a:t> {</a:t>
-            </a:r>
-          </a:p>
-          <a:p>
-            <a:r>
-              <a:rPr lang="en-US" sz="2200" dirty="0">
-                <a:solidFill>
-                  <a:srgbClr val="3B3B3B"/>
-                </a:solidFill>
-                <a:latin typeface="Consolas" panose="020B0609020204030204" pitchFamily="49" charset="0"/>
-              </a:rPr>
-              <a:t>    </a:t>
-            </a:r>
-            <a:r>
-              <a:rPr lang="en-US" sz="2200" dirty="0">
-                <a:solidFill>
-                  <a:srgbClr val="795E26"/>
-                </a:solidFill>
-                <a:latin typeface="Consolas" panose="020B0609020204030204" pitchFamily="49" charset="0"/>
-              </a:rPr>
-              <a:t>expect</a:t>
-            </a:r>
-            <a:r>
-              <a:rPr lang="en-US" sz="2200" dirty="0">
-                <a:solidFill>
-                  <a:srgbClr val="3B3B3B"/>
-                </a:solidFill>
-                <a:latin typeface="Consolas" panose="020B0609020204030204" pitchFamily="49" charset="0"/>
-              </a:rPr>
-              <a:t>(</a:t>
-            </a:r>
-            <a:r>
-              <a:rPr lang="en-US" sz="2200" dirty="0">
-                <a:solidFill>
-                  <a:srgbClr val="795E26"/>
-                </a:solidFill>
-                <a:latin typeface="Consolas" panose="020B0609020204030204" pitchFamily="49" charset="0"/>
-              </a:rPr>
-              <a:t>search</a:t>
-            </a:r>
-            <a:r>
-              <a:rPr lang="en-US" sz="2200" dirty="0">
-                <a:solidFill>
-                  <a:srgbClr val="3B3B3B"/>
-                </a:solidFill>
-                <a:latin typeface="Consolas" panose="020B0609020204030204" pitchFamily="49" charset="0"/>
-              </a:rPr>
-              <a:t>([</a:t>
-            </a:r>
-            <a:r>
-              <a:rPr lang="en-US" sz="2200" dirty="0">
-                <a:solidFill>
-                  <a:srgbClr val="098658"/>
-                </a:solidFill>
-                <a:latin typeface="Consolas" panose="020B0609020204030204" pitchFamily="49" charset="0"/>
-              </a:rPr>
-              <a:t>5</a:t>
-            </a:r>
-            <a:r>
-              <a:rPr lang="en-US" sz="2200" dirty="0">
-                <a:solidFill>
-                  <a:srgbClr val="3B3B3B"/>
-                </a:solidFill>
-                <a:latin typeface="Consolas" panose="020B0609020204030204" pitchFamily="49" charset="0"/>
-              </a:rPr>
-              <a:t>, </a:t>
-            </a:r>
-            <a:r>
-              <a:rPr lang="en-US" sz="2200" dirty="0">
-                <a:solidFill>
-                  <a:srgbClr val="098658"/>
-                </a:solidFill>
-                <a:latin typeface="Consolas" panose="020B0609020204030204" pitchFamily="49" charset="0"/>
-              </a:rPr>
-              <a:t>7</a:t>
-            </a:r>
-            <a:r>
-              <a:rPr lang="en-US" sz="2200" dirty="0">
-                <a:solidFill>
-                  <a:srgbClr val="3B3B3B"/>
-                </a:solidFill>
-                <a:latin typeface="Consolas" panose="020B0609020204030204" pitchFamily="49" charset="0"/>
-              </a:rPr>
-              <a:t>, </a:t>
-            </a:r>
-            <a:r>
-              <a:rPr lang="en-US" sz="2200" dirty="0">
-                <a:solidFill>
-                  <a:srgbClr val="098658"/>
-                </a:solidFill>
-                <a:latin typeface="Consolas" panose="020B0609020204030204" pitchFamily="49" charset="0"/>
-              </a:rPr>
-              <a:t>9</a:t>
-            </a:r>
-            <a:r>
-              <a:rPr lang="en-US" sz="2200" dirty="0">
-                <a:solidFill>
-                  <a:srgbClr val="3B3B3B"/>
-                </a:solidFill>
-                <a:latin typeface="Consolas" panose="020B0609020204030204" pitchFamily="49" charset="0"/>
-              </a:rPr>
-              <a:t>], </a:t>
-            </a:r>
-            <a:r>
-              <a:rPr lang="en-US" sz="2200" dirty="0">
-                <a:solidFill>
-                  <a:srgbClr val="098658"/>
-                </a:solidFill>
-                <a:latin typeface="Consolas" panose="020B0609020204030204" pitchFamily="49" charset="0"/>
-              </a:rPr>
-              <a:t>7</a:t>
-            </a:r>
-            <a:r>
-              <a:rPr lang="en-US" sz="2200" dirty="0">
-                <a:solidFill>
-                  <a:srgbClr val="3B3B3B"/>
-                </a:solidFill>
-                <a:latin typeface="Consolas" panose="020B0609020204030204" pitchFamily="49" charset="0"/>
-              </a:rPr>
-              <a:t>)).</a:t>
-            </a:r>
-            <a:r>
-              <a:rPr lang="en-US" sz="2200" dirty="0" err="1">
-                <a:solidFill>
-                  <a:srgbClr val="795E26"/>
-                </a:solidFill>
-                <a:latin typeface="Consolas" panose="020B0609020204030204" pitchFamily="49" charset="0"/>
-              </a:rPr>
-              <a:t>toBe</a:t>
-            </a:r>
-            <a:r>
-              <a:rPr lang="en-US" sz="2200" dirty="0">
-                <a:solidFill>
-                  <a:srgbClr val="3B3B3B"/>
-                </a:solidFill>
-                <a:latin typeface="Consolas" panose="020B0609020204030204" pitchFamily="49" charset="0"/>
-              </a:rPr>
-              <a:t>(</a:t>
-            </a:r>
-            <a:r>
-              <a:rPr lang="en-US" sz="2200" dirty="0">
-                <a:solidFill>
-                  <a:srgbClr val="098658"/>
-                </a:solidFill>
-                <a:latin typeface="Consolas" panose="020B0609020204030204" pitchFamily="49" charset="0"/>
-              </a:rPr>
-              <a:t>7</a:t>
-            </a:r>
-            <a:r>
-              <a:rPr lang="en-US" sz="2200" dirty="0">
-                <a:solidFill>
-                  <a:srgbClr val="3B3B3B"/>
-                </a:solidFill>
-                <a:latin typeface="Consolas" panose="020B0609020204030204" pitchFamily="49" charset="0"/>
-              </a:rPr>
-              <a:t>);</a:t>
-            </a:r>
-          </a:p>
-          <a:p>
-            <a:r>
-              <a:rPr lang="en-US" sz="2200" dirty="0">
-                <a:solidFill>
-                  <a:srgbClr val="3B3B3B"/>
-                </a:solidFill>
-                <a:latin typeface="Consolas" panose="020B0609020204030204" pitchFamily="49" charset="0"/>
-              </a:rPr>
-              <a:t>  });</a:t>
-            </a:r>
-          </a:p>
-        </p:txBody>
-      </p:sp>
-    </p:spTree>
-    <p:extLst>
-      <p:ext uri="{BB962C8B-B14F-4D97-AF65-F5344CB8AC3E}">
-        <p14:creationId xmlns:p14="http://schemas.microsoft.com/office/powerpoint/2010/main" val="4065804702"/>
-      </p:ext>
-    </p:extLst>
-  </p:cSld>
-  <p:clrMapOvr>
-    <a:masterClrMapping/>
-  </p:clrMapOvr>
-</p:sld>
-</file>
-
 <file path=ppt/slides/slide4.xml><?xml version="1.0" encoding="utf-8"?>
 <p:sld xmlns:a="http://schemas.openxmlformats.org/drawingml/2006/main" xmlns:r="http://schemas.openxmlformats.org/officeDocument/2006/relationships" xmlns:p="http://schemas.openxmlformats.org/presentationml/2006/main">
   <p:cSld>
@@ -28998,7 +31212,19 @@
             <a:pPr lvl="1"/>
             <a:r>
               <a:rPr lang="en-US" dirty="0"/>
-              <a:t>Unit testing only needs to give a function tests that respect the functions preconditions: no need to test -3 or 1.4</a:t>
+              <a:t>Unit testing only needs to give a function tests that </a:t>
+            </a:r>
+            <a:r>
+              <a:rPr lang="en-US" dirty="0">
+                <a:solidFill>
+                  <a:srgbClr val="FF0000"/>
+                </a:solidFill>
+              </a:rPr>
+              <a:t>respect the functions preconditions</a:t>
+            </a:r>
+            <a:r>
+              <a:rPr lang="en-US" dirty="0"/>
+              <a:t>: no need to test -3 or 1.4</a:t>
             </a:r>
           </a:p>
           <a:p>
@@ -29015,15 +31241,35 @@
             <a:pPr lvl="1"/>
             <a:r>
               <a:rPr lang="en-US" dirty="0"/>
-              <a:t> test how parts of a program work together: that’s where we ensure </a:t>
-            </a:r>
-            <a:r>
-              <a:rPr lang="en-US" i="1" dirty="0"/>
+              <a:t> test how parts of a program work together: that’s where we </a:t>
+            </a:r>
+            <a:r>
+              <a:rPr lang="en-US" dirty="0">
+                <a:solidFill>
+                  <a:srgbClr val="FF0000"/>
+                </a:solidFill>
+              </a:rPr>
+              <a:t>ensure </a:t>
+            </a:r>
+            <a:r>
+              <a:rPr lang="en-US" i="1" dirty="0">
+                <a:solidFill>
+                  <a:srgbClr val="FF0000"/>
+                </a:solidFill>
+              </a:rPr>
               <a:t>other </a:t>
             </a:r>
             <a:r>
+              <a:rPr lang="en-US" dirty="0">
+                <a:solidFill>
+                  <a:srgbClr val="FF0000"/>
+                </a:solidFill>
+              </a:rPr>
+              <a:t>functions respect our function’s contracts</a:t>
+            </a:r>
+            <a:r>
               <a:rPr lang="en-US" dirty="0"/>
-              <a:t>functions respect our function’s contracts.</a:t>
+              <a:t>.</a:t>
             </a:r>
           </a:p>
         </p:txBody>
@@ -29095,6 +31341,333 @@
       </p:grpSpPr>
       <p:sp>
         <p:nvSpPr>
+          <p:cNvPr id="2" name="Title 1">
+            <a:extLst>
+              <a:ext uri="{FF2B5EF4-FFF2-40B4-BE49-F238E27FC236}">
+                <a16:creationId xmlns:a16="http://schemas.microsoft.com/office/drawing/2014/main" id="{D059E186-D46D-AB72-2799-EF993F03EF44}"/>
+              </a:ext>
+            </a:extLst>
+          </p:cNvPr>
+          <p:cNvSpPr>
+            <a:spLocks noGrp="1"/>
+          </p:cNvSpPr>
+          <p:nvPr>
+            <p:ph type="title"/>
+          </p:nvPr>
+        </p:nvSpPr>
+        <p:spPr/>
+        <p:txBody>
+          <a:bodyPr/>
+          <a:lstStyle/>
+          <a:p>
+            <a:r>
+              <a:rPr lang="en-US" dirty="0"/>
+              <a:t>Here's one test that will catch that mutant</a:t>
+            </a:r>
+          </a:p>
+        </p:txBody>
+      </p:sp>
+      <p:sp>
+        <p:nvSpPr>
+          <p:cNvPr id="4" name="TextBox 3">
+            <a:extLst>
+              <a:ext uri="{FF2B5EF4-FFF2-40B4-BE49-F238E27FC236}">
+                <a16:creationId xmlns:a16="http://schemas.microsoft.com/office/drawing/2014/main" id="{3E229CB5-D4EF-EC3D-16E3-6CFCCBA2A754}"/>
+              </a:ext>
+            </a:extLst>
+          </p:cNvPr>
+          <p:cNvSpPr txBox="1"/>
+          <p:nvPr/>
+        </p:nvSpPr>
+        <p:spPr>
+          <a:xfrm>
+            <a:off x="838200" y="2163627"/>
+            <a:ext cx="10515600" cy="1107996"/>
+          </a:xfrm>
+          <a:prstGeom prst="rect">
+            <a:avLst/>
+          </a:prstGeom>
+          <a:noFill/>
+          <a:ln w="25400" cap="flat">
+            <a:noFill/>
+            <a:miter lim="400000"/>
+          </a:ln>
+          <a:effectLst/>
+          <a:sp3d/>
+        </p:spPr>
+        <p:style>
+          <a:lnRef idx="0">
+            <a:scrgbClr r="0" g="0" b="0"/>
+          </a:lnRef>
+          <a:fillRef idx="0">
+            <a:scrgbClr r="0" g="0" b="0"/>
+          </a:fillRef>
+          <a:effectRef idx="0">
+            <a:scrgbClr r="0" g="0" b="0"/>
+          </a:effectRef>
+          <a:fontRef idx="none"/>
+        </p:style>
+        <p:txBody>
+          <a:bodyPr wrap="square">
+            <a:spAutoFit/>
+          </a:bodyPr>
+          <a:lstStyle/>
+          <a:p>
+            <a:r>
+              <a:rPr lang="en-US" sz="2200" dirty="0">
+                <a:solidFill>
+                  <a:srgbClr val="795E26"/>
+                </a:solidFill>
+                <a:latin typeface="Consolas" panose="020B0609020204030204" pitchFamily="49" charset="0"/>
+              </a:rPr>
+              <a:t>test</a:t>
+            </a:r>
+            <a:r>
+              <a:rPr lang="en-US" sz="2200" dirty="0">
+                <a:solidFill>
+                  <a:srgbClr val="3B3B3B"/>
+                </a:solidFill>
+                <a:latin typeface="Consolas" panose="020B0609020204030204" pitchFamily="49" charset="0"/>
+              </a:rPr>
+              <a:t>(</a:t>
+            </a:r>
+            <a:r>
+              <a:rPr lang="en-US" sz="2200" dirty="0">
+                <a:solidFill>
+                  <a:srgbClr val="A31515"/>
+                </a:solidFill>
+                <a:latin typeface="Consolas" panose="020B0609020204030204" pitchFamily="49" charset="0"/>
+              </a:rPr>
+              <a:t>"try target that is equal to some item in the list"</a:t>
+            </a:r>
+            <a:r>
+              <a:rPr lang="en-US" sz="2200" dirty="0">
+                <a:solidFill>
+                  <a:srgbClr val="3B3B3B"/>
+                </a:solidFill>
+                <a:latin typeface="Consolas" panose="020B0609020204030204" pitchFamily="49" charset="0"/>
+              </a:rPr>
+              <a:t>, () </a:t>
+            </a:r>
+            <a:r>
+              <a:rPr lang="en-US" sz="2200" dirty="0">
+                <a:solidFill>
+                  <a:srgbClr val="0000FF"/>
+                </a:solidFill>
+                <a:latin typeface="Consolas" panose="020B0609020204030204" pitchFamily="49" charset="0"/>
+              </a:rPr>
+              <a:t>=&gt;</a:t>
+            </a:r>
+            <a:r>
+              <a:rPr lang="en-US" sz="2200" dirty="0">
+                <a:solidFill>
+                  <a:srgbClr val="3B3B3B"/>
+                </a:solidFill>
+                <a:latin typeface="Consolas" panose="020B0609020204030204" pitchFamily="49" charset="0"/>
+              </a:rPr>
+              <a:t> {</a:t>
+            </a:r>
+          </a:p>
+          <a:p>
+            <a:r>
+              <a:rPr lang="en-US" sz="2200" dirty="0">
+                <a:solidFill>
+                  <a:srgbClr val="3B3B3B"/>
+                </a:solidFill>
+                <a:latin typeface="Consolas" panose="020B0609020204030204" pitchFamily="49" charset="0"/>
+              </a:rPr>
+              <a:t>    </a:t>
+            </a:r>
+            <a:r>
+              <a:rPr lang="en-US" sz="2200" dirty="0">
+                <a:solidFill>
+                  <a:srgbClr val="795E26"/>
+                </a:solidFill>
+                <a:latin typeface="Consolas" panose="020B0609020204030204" pitchFamily="49" charset="0"/>
+              </a:rPr>
+              <a:t>expect</a:t>
+            </a:r>
+            <a:r>
+              <a:rPr lang="en-US" sz="2200" dirty="0">
+                <a:solidFill>
+                  <a:srgbClr val="3B3B3B"/>
+                </a:solidFill>
+                <a:latin typeface="Consolas" panose="020B0609020204030204" pitchFamily="49" charset="0"/>
+              </a:rPr>
+              <a:t>(</a:t>
+            </a:r>
+            <a:r>
+              <a:rPr lang="en-US" sz="2200" dirty="0">
+                <a:solidFill>
+                  <a:srgbClr val="795E26"/>
+                </a:solidFill>
+                <a:latin typeface="Consolas" panose="020B0609020204030204" pitchFamily="49" charset="0"/>
+              </a:rPr>
+              <a:t>search</a:t>
+            </a:r>
+            <a:r>
+              <a:rPr lang="en-US" sz="2200" dirty="0">
+                <a:solidFill>
+                  <a:srgbClr val="3B3B3B"/>
+                </a:solidFill>
+                <a:latin typeface="Consolas" panose="020B0609020204030204" pitchFamily="49" charset="0"/>
+              </a:rPr>
+              <a:t>([</a:t>
+            </a:r>
+            <a:r>
+              <a:rPr lang="en-US" sz="2200" dirty="0">
+                <a:solidFill>
+                  <a:srgbClr val="098658"/>
+                </a:solidFill>
+                <a:latin typeface="Consolas" panose="020B0609020204030204" pitchFamily="49" charset="0"/>
+              </a:rPr>
+              <a:t>5</a:t>
+            </a:r>
+            <a:r>
+              <a:rPr lang="en-US" sz="2200" dirty="0">
+                <a:solidFill>
+                  <a:srgbClr val="3B3B3B"/>
+                </a:solidFill>
+                <a:latin typeface="Consolas" panose="020B0609020204030204" pitchFamily="49" charset="0"/>
+              </a:rPr>
+              <a:t>, </a:t>
+            </a:r>
+            <a:r>
+              <a:rPr lang="en-US" sz="2200" dirty="0">
+                <a:solidFill>
+                  <a:srgbClr val="098658"/>
+                </a:solidFill>
+                <a:latin typeface="Consolas" panose="020B0609020204030204" pitchFamily="49" charset="0"/>
+              </a:rPr>
+              <a:t>7</a:t>
+            </a:r>
+            <a:r>
+              <a:rPr lang="en-US" sz="2200" dirty="0">
+                <a:solidFill>
+                  <a:srgbClr val="3B3B3B"/>
+                </a:solidFill>
+                <a:latin typeface="Consolas" panose="020B0609020204030204" pitchFamily="49" charset="0"/>
+              </a:rPr>
+              <a:t>, </a:t>
+            </a:r>
+            <a:r>
+              <a:rPr lang="en-US" sz="2200" dirty="0">
+                <a:solidFill>
+                  <a:srgbClr val="098658"/>
+                </a:solidFill>
+                <a:latin typeface="Consolas" panose="020B0609020204030204" pitchFamily="49" charset="0"/>
+              </a:rPr>
+              <a:t>9</a:t>
+            </a:r>
+            <a:r>
+              <a:rPr lang="en-US" sz="2200" dirty="0">
+                <a:solidFill>
+                  <a:srgbClr val="3B3B3B"/>
+                </a:solidFill>
+                <a:latin typeface="Consolas" panose="020B0609020204030204" pitchFamily="49" charset="0"/>
+              </a:rPr>
+              <a:t>], </a:t>
+            </a:r>
+            <a:r>
+              <a:rPr lang="en-US" sz="2200" dirty="0">
+                <a:solidFill>
+                  <a:srgbClr val="098658"/>
+                </a:solidFill>
+                <a:latin typeface="Consolas" panose="020B0609020204030204" pitchFamily="49" charset="0"/>
+              </a:rPr>
+              <a:t>7</a:t>
+            </a:r>
+            <a:r>
+              <a:rPr lang="en-US" sz="2200" dirty="0">
+                <a:solidFill>
+                  <a:srgbClr val="3B3B3B"/>
+                </a:solidFill>
+                <a:latin typeface="Consolas" panose="020B0609020204030204" pitchFamily="49" charset="0"/>
+              </a:rPr>
+              <a:t>)).</a:t>
+            </a:r>
+            <a:r>
+              <a:rPr lang="en-US" sz="2200" dirty="0" err="1">
+                <a:solidFill>
+                  <a:srgbClr val="795E26"/>
+                </a:solidFill>
+                <a:latin typeface="Consolas" panose="020B0609020204030204" pitchFamily="49" charset="0"/>
+              </a:rPr>
+              <a:t>toBe</a:t>
+            </a:r>
+            <a:r>
+              <a:rPr lang="en-US" sz="2200" dirty="0">
+                <a:solidFill>
+                  <a:srgbClr val="3B3B3B"/>
+                </a:solidFill>
+                <a:latin typeface="Consolas" panose="020B0609020204030204" pitchFamily="49" charset="0"/>
+              </a:rPr>
+              <a:t>(</a:t>
+            </a:r>
+            <a:r>
+              <a:rPr lang="en-US" sz="2200" dirty="0">
+                <a:solidFill>
+                  <a:srgbClr val="098658"/>
+                </a:solidFill>
+                <a:latin typeface="Consolas" panose="020B0609020204030204" pitchFamily="49" charset="0"/>
+              </a:rPr>
+              <a:t>7</a:t>
+            </a:r>
+            <a:r>
+              <a:rPr lang="en-US" sz="2200" dirty="0">
+                <a:solidFill>
+                  <a:srgbClr val="3B3B3B"/>
+                </a:solidFill>
+                <a:latin typeface="Consolas" panose="020B0609020204030204" pitchFamily="49" charset="0"/>
+              </a:rPr>
+              <a:t>);</a:t>
+            </a:r>
+          </a:p>
+          <a:p>
+            <a:r>
+              <a:rPr lang="en-US" sz="2200" dirty="0">
+                <a:solidFill>
+                  <a:srgbClr val="3B3B3B"/>
+                </a:solidFill>
+                <a:latin typeface="Consolas" panose="020B0609020204030204" pitchFamily="49" charset="0"/>
+              </a:rPr>
+              <a:t>  });</a:t>
+            </a:r>
+          </a:p>
+        </p:txBody>
+      </p:sp>
+    </p:spTree>
+    <p:extLst>
+      <p:ext uri="{BB962C8B-B14F-4D97-AF65-F5344CB8AC3E}">
+        <p14:creationId xmlns:p14="http://schemas.microsoft.com/office/powerpoint/2010/main" val="4065804702"/>
+      </p:ext>
+    </p:extLst>
+  </p:cSld>
+  <p:clrMapOvr>
+    <a:masterClrMapping/>
+  </p:clrMapOvr>
+</p:sld>
+</file>
+
+<file path=ppt/slides/slide41.xml><?xml version="1.0" encoding="utf-8"?>
+<p:sld xmlns:a="http://schemas.openxmlformats.org/drawingml/2006/main" xmlns:r="http://schemas.openxmlformats.org/officeDocument/2006/relationships" xmlns:p="http://schemas.openxmlformats.org/presentationml/2006/main">
+  <p:cSld>
+    <p:spTree>
+      <p:nvGrpSpPr>
+        <p:cNvPr id="1" name=""/>
+        <p:cNvGrpSpPr/>
+        <p:nvPr/>
+      </p:nvGrpSpPr>
+      <p:grpSpPr>
+        <a:xfrm>
+          <a:off x="0" y="0"/>
+          <a:ext cx="0" cy="0"/>
+          <a:chOff x="0" y="0"/>
+          <a:chExt cx="0" cy="0"/>
+        </a:xfrm>
+      </p:grpSpPr>
+      <p:sp>
+        <p:nvSpPr>
           <p:cNvPr id="847" name="Use Mutation Analysis While Writing Tests"/>
           <p:cNvSpPr txBox="1">
             <a:spLocks noGrp="1"/>
@@ -29178,7 +31751,7 @@
           </a:ln>
           <a:extLst>
             <a:ext uri="{C572A759-6A51-4108-AA02-DFA0A04FC94B}">
-              <ma14:wrappingTextBoxFlag xmlns:ma14="http://schemas.microsoft.com/office/mac/drawingml/2011/main" xmlns:a14="http://schemas.microsoft.com/office/drawing/2010/main" xmlns:m="http://schemas.openxmlformats.org/officeDocument/2006/math" xmlns="" val="1"/>
+              <ma14:wrappingTextBoxFlag xmlns="" xmlns:m="http://schemas.openxmlformats.org/officeDocument/2006/math" xmlns:a14="http://schemas.microsoft.com/office/drawing/2010/main" xmlns:ma14="http://schemas.microsoft.com/office/mac/drawingml/2011/main" val="1"/>
             </a:ext>
           </a:extLst>
         </p:spPr>
@@ -29488,7 +32061,7 @@
             <a:fld id="{86CB4B4D-7CA3-9044-876B-883B54F8677D}" type="slidenum">
               <a:rPr lang="en-US" smtClean="0"/>
               <a:pPr/>
-              <a:t>40</a:t>
+              <a:t>41</a:t>
             </a:fld>
             <a:endParaRPr/>
           </a:p>
@@ -29543,7 +32116,7 @@
           </a:ln>
           <a:extLst>
             <a:ext uri="{C572A759-6A51-4108-AA02-DFA0A04FC94B}">
-              <ma14:wrappingTextBoxFlag xmlns:ma14="http://schemas.microsoft.com/office/mac/drawingml/2011/main" xmlns:a14="http://schemas.microsoft.com/office/drawing/2010/main" xmlns:m="http://schemas.openxmlformats.org/officeDocument/2006/math" xmlns="" val="1"/>
+              <ma14:wrappingTextBoxFlag xmlns="" xmlns:m="http://schemas.openxmlformats.org/officeDocument/2006/math" xmlns:a14="http://schemas.microsoft.com/office/drawing/2010/main" xmlns:ma14="http://schemas.microsoft.com/office/mac/drawingml/2011/main" val="1"/>
             </a:ext>
           </a:extLst>
         </p:spPr>
@@ -29568,7 +32141,7 @@
 </p:sld>
 </file>
 
-<file path=ppt/slides/slide41.xml><?xml version="1.0" encoding="utf-8"?>
+<file path=ppt/slides/slide42.xml><?xml version="1.0" encoding="utf-8"?>
 <p:sld xmlns:a="http://schemas.openxmlformats.org/drawingml/2006/main" xmlns:r="http://schemas.openxmlformats.org/officeDocument/2006/relationships" xmlns:p="http://schemas.openxmlformats.org/presentationml/2006/main">
   <p:cSld>
     <p:spTree>
@@ -29712,7 +32285,7 @@
           </a:ln>
           <a:extLst>
             <a:ext uri="{C572A759-6A51-4108-AA02-DFA0A04FC94B}">
-              <ma14:wrappingTextBoxFlag xmlns:ma14="http://schemas.microsoft.com/office/mac/drawingml/2011/main" xmlns:a14="http://schemas.microsoft.com/office/drawing/2010/main" xmlns:m="http://schemas.openxmlformats.org/officeDocument/2006/math" xmlns="" val="1"/>
+              <ma14:wrappingTextBoxFlag xmlns="" xmlns:m="http://schemas.openxmlformats.org/officeDocument/2006/math" xmlns:a14="http://schemas.microsoft.com/office/drawing/2010/main" xmlns:ma14="http://schemas.microsoft.com/office/mac/drawingml/2011/main" val="1"/>
             </a:ext>
           </a:extLst>
         </p:spPr>
@@ -30022,7 +32595,7 @@
             <a:fld id="{86CB4B4D-7CA3-9044-876B-883B54F8677D}" type="slidenum">
               <a:rPr lang="en-US" smtClean="0"/>
               <a:pPr/>
-              <a:t>41</a:t>
+              <a:t>42</a:t>
             </a:fld>
             <a:endParaRPr lang="en-US"/>
           </a:p>
@@ -30077,7 +32650,7 @@
 </p:sld>
 </file>
 
-<file path=ppt/slides/slide42.xml><?xml version="1.0" encoding="utf-8"?>
+<file path=ppt/slides/slide43.xml><?xml version="1.0" encoding="utf-8"?>
 <p:sld xmlns:a="http://schemas.openxmlformats.org/drawingml/2006/main" xmlns:r="http://schemas.openxmlformats.org/officeDocument/2006/relationships" xmlns:p="http://schemas.openxmlformats.org/presentationml/2006/main">
   <p:cSld>
     <p:spTree>
@@ -30204,7 +32777,7 @@
           </a:ln>
           <a:extLst>
             <a:ext uri="{C572A759-6A51-4108-AA02-DFA0A04FC94B}">
-              <ma14:wrappingTextBoxFlag xmlns="" xmlns:m="http://schemas.openxmlformats.org/officeDocument/2006/math" xmlns:a14="http://schemas.microsoft.com/office/drawing/2010/main" xmlns:ma14="http://schemas.microsoft.com/office/mac/drawingml/2011/main" val="1"/>
+              <ma14:wrappingTextBoxFlag xmlns:ma14="http://schemas.microsoft.com/office/mac/drawingml/2011/main" xmlns:a14="http://schemas.microsoft.com/office/drawing/2010/main" xmlns:m="http://schemas.openxmlformats.org/officeDocument/2006/math" xmlns="" val="1"/>
             </a:ext>
           </a:extLst>
         </p:spPr>
@@ -30514,7 +33087,7 @@
             <a:fld id="{86CB4B4D-7CA3-9044-876B-883B54F8677D}" type="slidenum">
               <a:rPr lang="en-US" smtClean="0"/>
               <a:pPr/>
-              <a:t>42</a:t>
+              <a:t>43</a:t>
             </a:fld>
             <a:endParaRPr/>
           </a:p>
@@ -30596,7 +33169,7 @@
 </p:sld>
 </file>
 
-<file path=ppt/slides/slide43.xml><?xml version="1.0" encoding="utf-8"?>
+<file path=ppt/slides/slide44.xml><?xml version="1.0" encoding="utf-8"?>
 <p:sld xmlns:a="http://schemas.openxmlformats.org/drawingml/2006/main" xmlns:r="http://schemas.openxmlformats.org/officeDocument/2006/relationships" xmlns:p="http://schemas.openxmlformats.org/presentationml/2006/main">
   <p:cSld>
     <p:spTree>
@@ -30772,7 +33345,7 @@
             <a:fld id="{20F37917-FD3A-4669-9018-DA04BCDD3D75}" type="slidenum">
               <a:rPr lang="en-US" noProof="0" smtClean="0"/>
               <a:pPr lvl="0"/>
-              <a:t>43</a:t>
+              <a:t>44</a:t>
             </a:fld>
             <a:endParaRPr lang="en-US" noProof="0"/>
           </a:p>
@@ -31003,7 +33576,7 @@
           </a:ln>
           <a:extLst>
             <a:ext uri="{C572A759-6A51-4108-AA02-DFA0A04FC94B}">
-              <ma14:wrappingTextBoxFlag xmlns:ma14="http://schemas.microsoft.com/office/mac/drawingml/2011/main" xmlns:a14="http://schemas.microsoft.com/office/drawing/2010/main" xmlns:m="http://schemas.openxmlformats.org/officeDocument/2006/math" xmlns="" val="1"/>
+              <ma14:wrappingTextBoxFlag xmlns="" xmlns:m="http://schemas.openxmlformats.org/officeDocument/2006/math" xmlns:a14="http://schemas.microsoft.com/office/drawing/2010/main" xmlns:ma14="http://schemas.microsoft.com/office/mac/drawingml/2011/main" val="1"/>
             </a:ext>
           </a:extLst>
         </p:spPr>
